--- a/01_FULL_DECK/ADBS_FULL_answer_key.pptx
+++ b/01_FULL_DECK/ADBS_FULL_answer_key.pptx
@@ -2346,7 +2346,7 @@
           <a:p/>
           <a:p>
             <a:r>
-              <a:t>(Whole part: 292 words, about 2 min 15 s at a calm 130 words a minute. Limit: 3 minutes.)</a:t>
+              <a:t>(Whole part: 250 words, about 1 min 55 s at a calm 130 words a minute. Limit: 3 minutes.)</a:t>
             </a:r>
           </a:p>
         </p:txBody>
@@ -20249,7 +20249,7 @@
                 </a:solidFill>
                 <a:latin typeface="Arial"/>
               </a:rPr>
-              <a:t>14 slides · about 2 min 15 s</a:t>
+              <a:t>14 slides · about 1 min 55 s</a:t>
             </a:r>
           </a:p>
         </p:txBody>

--- a/01_FULL_DECK/ADBS_FULL_answer_key.pptx
+++ b/01_FULL_DECK/ADBS_FULL_answer_key.pptx
@@ -1055,7 +1055,7 @@
           </a:p>
           <a:p>
             <a:r>
-              <a:t>deleteMany removes every match. We start from the handout's three movies: two from 1985 and one from 1984. We delete year 1985. Deleted count is 2.</a:t>
+              <a:t>deleteMany removes every match. We start from the handout's three movies: two from 1985 and one from 1984.</a:t>
             </a:r>
           </a:p>
           <a:p/>
@@ -1136,7 +1136,7 @@
           </a:p>
           <a:p>
             <a:r>
-              <a:t>After: only Sixteen Candles, from 1984, is left. Documents in, documents out.</a:t>
+              <a:t>We delete year 1985. Deleted count is 2. After: only Sixteen Candles, from 1984, is left. Documents in, documents out.</a:t>
             </a:r>
           </a:p>
           <a:p/>
@@ -9775,7 +9775,7 @@
         <p:spPr>
           <a:xfrm>
             <a:off x="411480" y="1097280"/>
-            <a:ext cx="11368735" cy="3063240"/>
+            <a:ext cx="11368735" cy="3027680"/>
           </a:xfrm>
           <a:prstGeom prst="rect">
             <a:avLst/>
@@ -9819,7 +9819,7 @@
         <p:spPr>
           <a:xfrm>
             <a:off x="557784" y="1188720"/>
-            <a:ext cx="11149279" cy="2953512"/>
+            <a:ext cx="11149279" cy="2917951"/>
           </a:xfrm>
           <a:prstGeom prst="rect">
             <a:avLst/>
@@ -9834,7 +9834,7 @@
           <a:p>
             <a:pPr algn="l">
               <a:lnSpc>
-                <a:spcPct val="100000"/>
+                <a:spcPts val="3200"/>
               </a:lnSpc>
             </a:pPr>
             <a:r>
@@ -9850,7 +9850,7 @@
           <a:p>
             <a:pPr algn="l">
               <a:lnSpc>
-                <a:spcPct val="100000"/>
+                <a:spcPts val="3200"/>
               </a:lnSpc>
             </a:pPr>
             <a:r>
@@ -9866,7 +9866,7 @@
           <a:p>
             <a:pPr algn="l">
               <a:lnSpc>
-                <a:spcPct val="100000"/>
+                <a:spcPts val="3200"/>
               </a:lnSpc>
             </a:pPr>
             <a:r>
@@ -9882,7 +9882,7 @@
           <a:p>
             <a:pPr algn="l">
               <a:lnSpc>
-                <a:spcPct val="100000"/>
+                <a:spcPts val="3200"/>
               </a:lnSpc>
             </a:pPr>
             <a:r>
@@ -9916,7 +9916,7 @@
           <a:p>
             <a:pPr algn="l">
               <a:lnSpc>
-                <a:spcPct val="100000"/>
+                <a:spcPts val="3200"/>
               </a:lnSpc>
             </a:pPr>
             <a:r>
@@ -9950,7 +9950,7 @@
           <a:p>
             <a:pPr algn="l">
               <a:lnSpc>
-                <a:spcPct val="100000"/>
+                <a:spcPts val="3200"/>
               </a:lnSpc>
             </a:pPr>
             <a:r>
@@ -9984,7 +9984,7 @@
           <a:p>
             <a:pPr algn="l">
               <a:lnSpc>
-                <a:spcPct val="100000"/>
+                <a:spcPts val="3200"/>
               </a:lnSpc>
             </a:pPr>
             <a:r>
@@ -10291,7 +10291,7 @@
         <p:spPr>
           <a:xfrm>
             <a:off x="411480" y="1097280"/>
-            <a:ext cx="11368735" cy="1005840"/>
+            <a:ext cx="11368735" cy="995679"/>
           </a:xfrm>
           <a:prstGeom prst="rect">
             <a:avLst/>
@@ -10335,7 +10335,7 @@
         <p:spPr>
           <a:xfrm>
             <a:off x="557784" y="1188720"/>
-            <a:ext cx="11149279" cy="896112"/>
+            <a:ext cx="11149279" cy="885951"/>
           </a:xfrm>
           <a:prstGeom prst="rect">
             <a:avLst/>
@@ -10350,7 +10350,7 @@
           <a:p>
             <a:pPr algn="l">
               <a:lnSpc>
-                <a:spcPct val="100000"/>
+                <a:spcPts val="3200"/>
               </a:lnSpc>
             </a:pPr>
             <a:r>
@@ -10375,7 +10375,7 @@
           <a:p>
             <a:pPr algn="l">
               <a:lnSpc>
-                <a:spcPct val="100000"/>
+                <a:spcPts val="3200"/>
               </a:lnSpc>
             </a:pPr>
             <a:r>
@@ -10398,8 +10398,8 @@
         </p:nvSpPr>
         <p:spPr>
           <a:xfrm>
-            <a:off x="411480" y="2212848"/>
-            <a:ext cx="11368735" cy="3886200"/>
+            <a:off x="411480" y="2202688"/>
+            <a:ext cx="11368735" cy="3840480"/>
           </a:xfrm>
           <a:prstGeom prst="rect">
             <a:avLst/>
@@ -10442,8 +10442,8 @@
         </p:nvSpPr>
         <p:spPr>
           <a:xfrm>
-            <a:off x="557784" y="2304288"/>
-            <a:ext cx="11149279" cy="3776472"/>
+            <a:off x="557784" y="2294128"/>
+            <a:ext cx="11149279" cy="3730752"/>
           </a:xfrm>
           <a:prstGeom prst="rect">
             <a:avLst/>
@@ -10458,7 +10458,7 @@
           <a:p>
             <a:pPr algn="l">
               <a:lnSpc>
-                <a:spcPct val="100000"/>
+                <a:spcPts val="3200"/>
               </a:lnSpc>
             </a:pPr>
             <a:r>
@@ -10474,7 +10474,7 @@
           <a:p>
             <a:pPr algn="l">
               <a:lnSpc>
-                <a:spcPct val="100000"/>
+                <a:spcPts val="3200"/>
               </a:lnSpc>
             </a:pPr>
             <a:r>
@@ -10490,7 +10490,7 @@
           <a:p>
             <a:pPr algn="l">
               <a:lnSpc>
-                <a:spcPct val="100000"/>
+                <a:spcPts val="3200"/>
               </a:lnSpc>
             </a:pPr>
             <a:r>
@@ -10506,7 +10506,7 @@
           <a:p>
             <a:pPr algn="l">
               <a:lnSpc>
-                <a:spcPct val="100000"/>
+                <a:spcPts val="3200"/>
               </a:lnSpc>
             </a:pPr>
             <a:r>
@@ -10522,7 +10522,7 @@
           <a:p>
             <a:pPr algn="l">
               <a:lnSpc>
-                <a:spcPct val="100000"/>
+                <a:spcPts val="3200"/>
               </a:lnSpc>
             </a:pPr>
             <a:r>
@@ -10538,7 +10538,7 @@
           <a:p>
             <a:pPr algn="l">
               <a:lnSpc>
-                <a:spcPct val="100000"/>
+                <a:spcPts val="3200"/>
               </a:lnSpc>
             </a:pPr>
             <a:r>
@@ -10554,7 +10554,7 @@
           <a:p>
             <a:pPr algn="l">
               <a:lnSpc>
-                <a:spcPct val="100000"/>
+                <a:spcPts val="3200"/>
               </a:lnSpc>
             </a:pPr>
             <a:r>
@@ -10570,7 +10570,7 @@
           <a:p>
             <a:pPr algn="l">
               <a:lnSpc>
-                <a:spcPct val="100000"/>
+                <a:spcPts val="3200"/>
               </a:lnSpc>
             </a:pPr>
             <a:r>
@@ -10586,7 +10586,7 @@
           <a:p>
             <a:pPr algn="l">
               <a:lnSpc>
-                <a:spcPct val="100000"/>
+                <a:spcPts val="3200"/>
               </a:lnSpc>
             </a:pPr>
             <a:r>
@@ -10836,7 +10836,7 @@
         <p:spPr>
           <a:xfrm>
             <a:off x="411480" y="1097280"/>
-            <a:ext cx="11368735" cy="2240280"/>
+            <a:ext cx="11368735" cy="2214880"/>
           </a:xfrm>
           <a:prstGeom prst="rect">
             <a:avLst/>
@@ -10880,7 +10880,7 @@
         <p:spPr>
           <a:xfrm>
             <a:off x="557784" y="1188720"/>
-            <a:ext cx="11149279" cy="2130552"/>
+            <a:ext cx="11149279" cy="2105152"/>
           </a:xfrm>
           <a:prstGeom prst="rect">
             <a:avLst/>
@@ -10895,7 +10895,7 @@
           <a:p>
             <a:pPr algn="l">
               <a:lnSpc>
-                <a:spcPct val="100000"/>
+                <a:spcPts val="3200"/>
               </a:lnSpc>
             </a:pPr>
             <a:r>
@@ -10920,7 +10920,7 @@
           <a:p>
             <a:pPr algn="l">
               <a:lnSpc>
-                <a:spcPct val="100000"/>
+                <a:spcPts val="3200"/>
               </a:lnSpc>
             </a:pPr>
             <a:r>
@@ -10936,7 +10936,7 @@
           <a:p>
             <a:pPr algn="l">
               <a:lnSpc>
-                <a:spcPct val="100000"/>
+                <a:spcPts val="3200"/>
               </a:lnSpc>
             </a:pPr>
             <a:r>
@@ -10970,7 +10970,7 @@
           <a:p>
             <a:pPr algn="l">
               <a:lnSpc>
-                <a:spcPct val="100000"/>
+                <a:spcPts val="3200"/>
               </a:lnSpc>
             </a:pPr>
             <a:r>
@@ -11004,7 +11004,7 @@
           <a:p>
             <a:pPr algn="l">
               <a:lnSpc>
-                <a:spcPct val="100000"/>
+                <a:spcPts val="3200"/>
               </a:lnSpc>
             </a:pPr>
             <a:r>
@@ -11311,7 +11311,7 @@
         <p:spPr>
           <a:xfrm>
             <a:off x="411480" y="1097280"/>
-            <a:ext cx="11368735" cy="3063240"/>
+            <a:ext cx="11368735" cy="3027680"/>
           </a:xfrm>
           <a:prstGeom prst="rect">
             <a:avLst/>
@@ -11355,7 +11355,7 @@
         <p:spPr>
           <a:xfrm>
             <a:off x="557784" y="1188720"/>
-            <a:ext cx="11149279" cy="2953512"/>
+            <a:ext cx="11149279" cy="2917951"/>
           </a:xfrm>
           <a:prstGeom prst="rect">
             <a:avLst/>
@@ -11370,7 +11370,7 @@
           <a:p>
             <a:pPr algn="l">
               <a:lnSpc>
-                <a:spcPct val="100000"/>
+                <a:spcPts val="3200"/>
               </a:lnSpc>
             </a:pPr>
             <a:r>
@@ -11386,7 +11386,7 @@
           <a:p>
             <a:pPr algn="l">
               <a:lnSpc>
-                <a:spcPct val="100000"/>
+                <a:spcPts val="3200"/>
               </a:lnSpc>
             </a:pPr>
             <a:r>
@@ -11402,7 +11402,7 @@
           <a:p>
             <a:pPr algn="l">
               <a:lnSpc>
-                <a:spcPct val="100000"/>
+                <a:spcPts val="3200"/>
               </a:lnSpc>
             </a:pPr>
             <a:r>
@@ -11418,7 +11418,7 @@
           <a:p>
             <a:pPr algn="l">
               <a:lnSpc>
-                <a:spcPct val="100000"/>
+                <a:spcPts val="3200"/>
               </a:lnSpc>
             </a:pPr>
             <a:r>
@@ -11434,7 +11434,7 @@
           <a:p>
             <a:pPr algn="l">
               <a:lnSpc>
-                <a:spcPct val="100000"/>
+                <a:spcPts val="3200"/>
               </a:lnSpc>
             </a:pPr>
             <a:r>
@@ -11468,7 +11468,7 @@
           <a:p>
             <a:pPr algn="l">
               <a:lnSpc>
-                <a:spcPct val="100000"/>
+                <a:spcPts val="3200"/>
               </a:lnSpc>
             </a:pPr>
             <a:r>
@@ -11484,7 +11484,7 @@
           <a:p>
             <a:pPr algn="l">
               <a:lnSpc>
-                <a:spcPct val="100000"/>
+                <a:spcPts val="3200"/>
               </a:lnSpc>
             </a:pPr>
             <a:r>
@@ -11507,8 +11507,8 @@
         </p:nvSpPr>
         <p:spPr>
           <a:xfrm>
-            <a:off x="411480" y="4270248"/>
-            <a:ext cx="11368735" cy="1417320"/>
+            <a:off x="411480" y="4234688"/>
+            <a:ext cx="11368735" cy="1402080"/>
           </a:xfrm>
           <a:prstGeom prst="rect">
             <a:avLst/>
@@ -11551,8 +11551,8 @@
         </p:nvSpPr>
         <p:spPr>
           <a:xfrm>
-            <a:off x="557784" y="4361688"/>
-            <a:ext cx="11149279" cy="1307592"/>
+            <a:off x="557784" y="4326128"/>
+            <a:ext cx="11149279" cy="1292351"/>
           </a:xfrm>
           <a:prstGeom prst="rect">
             <a:avLst/>
@@ -11567,7 +11567,7 @@
           <a:p>
             <a:pPr algn="l">
               <a:lnSpc>
-                <a:spcPct val="100000"/>
+                <a:spcPts val="3200"/>
               </a:lnSpc>
             </a:pPr>
             <a:r>
@@ -11583,7 +11583,7 @@
           <a:p>
             <a:pPr algn="l">
               <a:lnSpc>
-                <a:spcPct val="100000"/>
+                <a:spcPts val="3200"/>
               </a:lnSpc>
             </a:pPr>
             <a:r>
@@ -11599,7 +11599,7 @@
           <a:p>
             <a:pPr algn="l">
               <a:lnSpc>
-                <a:spcPct val="100000"/>
+                <a:spcPts val="3200"/>
               </a:lnSpc>
             </a:pPr>
             <a:r>
@@ -11849,7 +11849,7 @@
         <p:spPr>
           <a:xfrm>
             <a:off x="411480" y="1097280"/>
-            <a:ext cx="11368735" cy="2651760"/>
+            <a:ext cx="11368735" cy="2621280"/>
           </a:xfrm>
           <a:prstGeom prst="rect">
             <a:avLst/>
@@ -11893,7 +11893,7 @@
         <p:spPr>
           <a:xfrm>
             <a:off x="557784" y="1188720"/>
-            <a:ext cx="11149279" cy="2542032"/>
+            <a:ext cx="11149279" cy="2511552"/>
           </a:xfrm>
           <a:prstGeom prst="rect">
             <a:avLst/>
@@ -11908,7 +11908,7 @@
           <a:p>
             <a:pPr algn="l">
               <a:lnSpc>
-                <a:spcPct val="100000"/>
+                <a:spcPts val="3200"/>
               </a:lnSpc>
             </a:pPr>
             <a:r>
@@ -11924,7 +11924,7 @@
           <a:p>
             <a:pPr algn="l">
               <a:lnSpc>
-                <a:spcPct val="100000"/>
+                <a:spcPts val="3200"/>
               </a:lnSpc>
             </a:pPr>
             <a:r>
@@ -11940,7 +11940,7 @@
           <a:p>
             <a:pPr algn="l">
               <a:lnSpc>
-                <a:spcPct val="100000"/>
+                <a:spcPts val="3200"/>
               </a:lnSpc>
             </a:pPr>
             <a:r>
@@ -11956,7 +11956,7 @@
           <a:p>
             <a:pPr algn="l">
               <a:lnSpc>
-                <a:spcPct val="100000"/>
+                <a:spcPts val="3200"/>
               </a:lnSpc>
             </a:pPr>
             <a:r>
@@ -11972,7 +11972,7 @@
           <a:p>
             <a:pPr algn="l">
               <a:lnSpc>
-                <a:spcPct val="100000"/>
+                <a:spcPts val="3200"/>
               </a:lnSpc>
             </a:pPr>
             <a:r>
@@ -11988,7 +11988,7 @@
           <a:p>
             <a:pPr algn="l">
               <a:lnSpc>
-                <a:spcPct val="100000"/>
+                <a:spcPts val="3200"/>
               </a:lnSpc>
             </a:pPr>
             <a:r>
@@ -12295,7 +12295,7 @@
         <p:spPr>
           <a:xfrm>
             <a:off x="411480" y="1097280"/>
-            <a:ext cx="11368735" cy="3474720"/>
+            <a:ext cx="11368735" cy="3434080"/>
           </a:xfrm>
           <a:prstGeom prst="rect">
             <a:avLst/>
@@ -12339,7 +12339,7 @@
         <p:spPr>
           <a:xfrm>
             <a:off x="557784" y="1188720"/>
-            <a:ext cx="11149279" cy="3364992"/>
+            <a:ext cx="11149279" cy="3324352"/>
           </a:xfrm>
           <a:prstGeom prst="rect">
             <a:avLst/>
@@ -12354,7 +12354,7 @@
           <a:p>
             <a:pPr algn="l">
               <a:lnSpc>
-                <a:spcPct val="100000"/>
+                <a:spcPts val="3200"/>
               </a:lnSpc>
             </a:pPr>
             <a:r>
@@ -12379,7 +12379,7 @@
           <a:p>
             <a:pPr algn="l">
               <a:lnSpc>
-                <a:spcPct val="100000"/>
+                <a:spcPts val="3200"/>
               </a:lnSpc>
             </a:pPr>
             <a:r>
@@ -12395,7 +12395,7 @@
           <a:p>
             <a:pPr algn="l">
               <a:lnSpc>
-                <a:spcPct val="100000"/>
+                <a:spcPts val="3200"/>
               </a:lnSpc>
             </a:pPr>
             <a:r>
@@ -12411,7 +12411,7 @@
           <a:p>
             <a:pPr algn="l">
               <a:lnSpc>
-                <a:spcPct val="100000"/>
+                <a:spcPts val="3200"/>
               </a:lnSpc>
             </a:pPr>
             <a:r>
@@ -12445,7 +12445,7 @@
           <a:p>
             <a:pPr algn="l">
               <a:lnSpc>
-                <a:spcPct val="100000"/>
+                <a:spcPts val="3200"/>
               </a:lnSpc>
             </a:pPr>
             <a:r>
@@ -12479,7 +12479,7 @@
           <a:p>
             <a:pPr algn="l">
               <a:lnSpc>
-                <a:spcPct val="100000"/>
+                <a:spcPts val="3200"/>
               </a:lnSpc>
             </a:pPr>
             <a:r>
@@ -12495,7 +12495,7 @@
           <a:p>
             <a:pPr algn="l">
               <a:lnSpc>
-                <a:spcPct val="100000"/>
+                <a:spcPts val="3200"/>
               </a:lnSpc>
             </a:pPr>
             <a:r>
@@ -12511,7 +12511,7 @@
           <a:p>
             <a:pPr algn="l">
               <a:lnSpc>
-                <a:spcPct val="100000"/>
+                <a:spcPts val="3200"/>
               </a:lnSpc>
             </a:pPr>
             <a:r>
@@ -12528,58 +12528,14 @@
       </p:sp>
       <p:sp>
         <p:nvSpPr>
-          <p:cNvPr id="6" name="Rectangle 5"/>
-          <p:cNvSpPr/>
-          <p:nvPr/>
-        </p:nvSpPr>
-        <p:spPr>
-          <a:xfrm>
-            <a:off x="411480" y="4681728"/>
-            <a:ext cx="11368735" cy="1417320"/>
-          </a:xfrm>
-          <a:prstGeom prst="rect">
-            <a:avLst/>
-          </a:prstGeom>
-          <a:solidFill>
-            <a:srgbClr val="16212E"/>
-          </a:solidFill>
-          <a:ln>
-            <a:noFill/>
-          </a:ln>
-          <a:effectLst/>
-        </p:spPr>
-        <p:style>
-          <a:lnRef idx="1">
-            <a:schemeClr val="accent1"/>
-          </a:lnRef>
-          <a:fillRef idx="3">
-            <a:schemeClr val="accent1"/>
-          </a:fillRef>
-          <a:effectRef idx="2">
-            <a:schemeClr val="accent1"/>
-          </a:effectRef>
-          <a:fontRef idx="minor">
-            <a:schemeClr val="lt1"/>
-          </a:fontRef>
-        </p:style>
-        <p:txBody>
-          <a:bodyPr rtlCol="0" anchor="ctr"/>
-          <a:lstStyle/>
-          <a:p>
-            <a:pPr algn="ctr"/>
-          </a:p>
-        </p:txBody>
-      </p:sp>
-      <p:sp>
-        <p:nvSpPr>
-          <p:cNvPr id="7" name="TextBox 6"/>
+          <p:cNvPr id="6" name="TextBox 5"/>
           <p:cNvSpPr txBox="1"/>
           <p:nvPr/>
         </p:nvSpPr>
         <p:spPr>
           <a:xfrm>
-            <a:off x="557784" y="4773168"/>
-            <a:ext cx="11149279" cy="1307592"/>
+            <a:off x="411480" y="5696712"/>
+            <a:ext cx="11368735" cy="566928"/>
           </a:xfrm>
           <a:prstGeom prst="rect">
             <a:avLst/>
@@ -12587,63 +12543,31 @@
           <a:noFill/>
         </p:spPr>
         <p:txBody>
-          <a:bodyPr wrap="none" anchor="t" lIns="0" rIns="0" tIns="0" bIns="0">
+          <a:bodyPr wrap="square" anchor="ctr" lIns="164592" rIns="164592" tIns="164592" bIns="164592">
             <a:spAutoFit/>
           </a:bodyPr>
           <a:lstStyle/>
           <a:p>
-            <a:pPr algn="l">
+            <a:pPr algn="r">
               <a:lnSpc>
                 <a:spcPct val="100000"/>
               </a:lnSpc>
             </a:pPr>
             <a:r>
-              <a:rPr sz="2800" b="1">
-                <a:solidFill>
-                  <a:srgbClr val="F2B27A"/>
-                </a:solidFill>
-                <a:latin typeface="Arial"/>
-              </a:rPr>
-              <a:t>2  COMMAND → REPLY</a:t>
-            </a:r>
-          </a:p>
-          <a:p>
-            <a:pPr algn="l">
-              <a:lnSpc>
-                <a:spcPct val="100000"/>
-              </a:lnSpc>
-            </a:pPr>
-            <a:r>
               <a:rPr sz="2800" b="0">
                 <a:solidFill>
-                  <a:srgbClr val="E6ECF2"/>
-                </a:solidFill>
-                <a:latin typeface="Courier New"/>
-              </a:rPr>
-              <a:t>db.movies.deleteMany({"year" : 1985})</a:t>
-            </a:r>
-          </a:p>
-          <a:p>
-            <a:pPr algn="l">
-              <a:lnSpc>
-                <a:spcPct val="100000"/>
-              </a:lnSpc>
-            </a:pPr>
-            <a:r>
-              <a:rPr sz="2800" b="0">
-                <a:solidFill>
-                  <a:srgbClr val="9FE0C9"/>
-                </a:solidFill>
-                <a:latin typeface="Courier New"/>
-              </a:rPr>
-              <a:t>{ acknowledged: true, deletedCount: 2 }</a:t>
-            </a:r>
-          </a:p>
-        </p:txBody>
-      </p:sp>
-      <p:sp>
-        <p:nvSpPr>
-          <p:cNvPr id="8" name="EXEMPT_FOOTER"/>
+                  <a:srgbClr val="4A5868"/>
+                </a:solidFill>
+                <a:latin typeface="Arial"/>
+              </a:rPr>
+              <a:t>Next: 2  COMMAND → REPLY  →</a:t>
+            </a:r>
+          </a:p>
+        </p:txBody>
+      </p:sp>
+      <p:sp>
+        <p:nvSpPr>
+          <p:cNvPr id="7" name="EXEMPT_FOOTER"/>
           <p:cNvSpPr txBox="1"/>
           <p:nvPr/>
         </p:nvSpPr>
@@ -12682,7 +12606,7 @@
       </p:sp>
       <p:sp>
         <p:nvSpPr>
-          <p:cNvPr id="9" name="EXEMPT_FOOTER"/>
+          <p:cNvPr id="8" name="EXEMPT_FOOTER"/>
           <p:cNvSpPr txBox="1"/>
           <p:nvPr/>
         </p:nvSpPr>
@@ -12721,7 +12645,7 @@
       </p:sp>
       <p:sp>
         <p:nvSpPr>
-          <p:cNvPr id="10" name="EXEMPT_PROGRESS"/>
+          <p:cNvPr id="9" name="EXEMPT_PROGRESS"/>
           <p:cNvSpPr txBox="1"/>
           <p:nvPr/>
         </p:nvSpPr>
@@ -12876,7 +12800,7 @@
         <p:spPr>
           <a:xfrm>
             <a:off x="411480" y="1097280"/>
-            <a:ext cx="11368735" cy="1005840"/>
+            <a:ext cx="11368735" cy="1402080"/>
           </a:xfrm>
           <a:prstGeom prst="rect">
             <a:avLst/>
@@ -12920,7 +12844,7 @@
         <p:spPr>
           <a:xfrm>
             <a:off x="557784" y="1188720"/>
-            <a:ext cx="11149279" cy="896112"/>
+            <a:ext cx="11149279" cy="1292351"/>
           </a:xfrm>
           <a:prstGeom prst="rect">
             <a:avLst/>
@@ -12935,7 +12859,7 @@
           <a:p>
             <a:pPr algn="l">
               <a:lnSpc>
-                <a:spcPct val="100000"/>
+                <a:spcPts val="3200"/>
               </a:lnSpc>
             </a:pPr>
             <a:r>
@@ -12945,6 +12869,121 @@
                 </a:solidFill>
                 <a:latin typeface="Arial"/>
               </a:rPr>
+              <a:t>2  COMMAND → REPLY</a:t>
+            </a:r>
+          </a:p>
+          <a:p>
+            <a:pPr algn="l">
+              <a:lnSpc>
+                <a:spcPts val="3200"/>
+              </a:lnSpc>
+            </a:pPr>
+            <a:r>
+              <a:rPr sz="2800" b="0">
+                <a:solidFill>
+                  <a:srgbClr val="E6ECF2"/>
+                </a:solidFill>
+                <a:latin typeface="Courier New"/>
+              </a:rPr>
+              <a:t>db.movies.deleteMany({"year" : 1985})</a:t>
+            </a:r>
+          </a:p>
+          <a:p>
+            <a:pPr algn="l">
+              <a:lnSpc>
+                <a:spcPts val="3200"/>
+              </a:lnSpc>
+            </a:pPr>
+            <a:r>
+              <a:rPr sz="2800" b="0">
+                <a:solidFill>
+                  <a:srgbClr val="9FE0C9"/>
+                </a:solidFill>
+                <a:latin typeface="Courier New"/>
+              </a:rPr>
+              <a:t>{ acknowledged: true, deletedCount: 2 }</a:t>
+            </a:r>
+          </a:p>
+        </p:txBody>
+      </p:sp>
+      <p:sp>
+        <p:nvSpPr>
+          <p:cNvPr id="6" name="Rectangle 5"/>
+          <p:cNvSpPr/>
+          <p:nvPr/>
+        </p:nvSpPr>
+        <p:spPr>
+          <a:xfrm>
+            <a:off x="411480" y="2609088"/>
+            <a:ext cx="11368735" cy="995679"/>
+          </a:xfrm>
+          <a:prstGeom prst="rect">
+            <a:avLst/>
+          </a:prstGeom>
+          <a:solidFill>
+            <a:srgbClr val="16212E"/>
+          </a:solidFill>
+          <a:ln>
+            <a:noFill/>
+          </a:ln>
+          <a:effectLst/>
+        </p:spPr>
+        <p:style>
+          <a:lnRef idx="1">
+            <a:schemeClr val="accent1"/>
+          </a:lnRef>
+          <a:fillRef idx="3">
+            <a:schemeClr val="accent1"/>
+          </a:fillRef>
+          <a:effectRef idx="2">
+            <a:schemeClr val="accent1"/>
+          </a:effectRef>
+          <a:fontRef idx="minor">
+            <a:schemeClr val="lt1"/>
+          </a:fontRef>
+        </p:style>
+        <p:txBody>
+          <a:bodyPr rtlCol="0" anchor="ctr"/>
+          <a:lstStyle/>
+          <a:p>
+            <a:pPr algn="ctr"/>
+          </a:p>
+        </p:txBody>
+      </p:sp>
+      <p:sp>
+        <p:nvSpPr>
+          <p:cNvPr id="7" name="TextBox 6"/>
+          <p:cNvSpPr txBox="1"/>
+          <p:nvPr/>
+        </p:nvSpPr>
+        <p:spPr>
+          <a:xfrm>
+            <a:off x="557784" y="2700528"/>
+            <a:ext cx="11149279" cy="885951"/>
+          </a:xfrm>
+          <a:prstGeom prst="rect">
+            <a:avLst/>
+          </a:prstGeom>
+          <a:noFill/>
+        </p:spPr>
+        <p:txBody>
+          <a:bodyPr wrap="none" anchor="t" lIns="0" rIns="0" tIns="0" bIns="0">
+            <a:spAutoFit/>
+          </a:bodyPr>
+          <a:lstStyle/>
+          <a:p>
+            <a:pPr algn="l">
+              <a:lnSpc>
+                <a:spcPts val="3200"/>
+              </a:lnSpc>
+            </a:pPr>
+            <a:r>
+              <a:rPr sz="2800" b="1">
+                <a:solidFill>
+                  <a:srgbClr val="F2B27A"/>
+                </a:solidFill>
+                <a:latin typeface="Arial"/>
+              </a:rPr>
               <a:t>3  AFTER</a:t>
             </a:r>
             <a:r>
@@ -12960,7 +12999,7 @@
           <a:p>
             <a:pPr algn="l">
               <a:lnSpc>
-                <a:spcPct val="100000"/>
+                <a:spcPts val="3200"/>
               </a:lnSpc>
             </a:pPr>
             <a:r>
@@ -12977,7 +13016,7 @@
       </p:sp>
       <p:sp>
         <p:nvSpPr>
-          <p:cNvPr id="6" name="Rectangle 5"/>
+          <p:cNvPr id="8" name="Rectangle 7"/>
           <p:cNvSpPr/>
           <p:nvPr/>
         </p:nvSpPr>
@@ -13034,7 +13073,7 @@
       </p:sp>
       <p:sp>
         <p:nvSpPr>
-          <p:cNvPr id="7" name="EXEMPT_FOOTER"/>
+          <p:cNvPr id="9" name="EXEMPT_FOOTER"/>
           <p:cNvSpPr txBox="1"/>
           <p:nvPr/>
         </p:nvSpPr>
@@ -13073,7 +13112,7 @@
       </p:sp>
       <p:sp>
         <p:nvSpPr>
-          <p:cNvPr id="8" name="EXEMPT_FOOTER"/>
+          <p:cNvPr id="10" name="EXEMPT_FOOTER"/>
           <p:cNvSpPr txBox="1"/>
           <p:nvPr/>
         </p:nvSpPr>
@@ -13112,7 +13151,7 @@
       </p:sp>
       <p:sp>
         <p:nvSpPr>
-          <p:cNvPr id="9" name="EXEMPT_PROGRESS"/>
+          <p:cNvPr id="11" name="EXEMPT_PROGRESS"/>
           <p:cNvSpPr txBox="1"/>
           <p:nvPr/>
         </p:nvSpPr>
@@ -13488,7 +13527,7 @@
         <p:spPr>
           <a:xfrm>
             <a:off x="411480" y="1097280"/>
-            <a:ext cx="11368735" cy="3474720"/>
+            <a:ext cx="11368735" cy="3434080"/>
           </a:xfrm>
           <a:prstGeom prst="rect">
             <a:avLst/>
@@ -13532,7 +13571,7 @@
         <p:spPr>
           <a:xfrm>
             <a:off x="557784" y="1188720"/>
-            <a:ext cx="11149279" cy="3364992"/>
+            <a:ext cx="11149279" cy="3324352"/>
           </a:xfrm>
           <a:prstGeom prst="rect">
             <a:avLst/>
@@ -13547,7 +13586,7 @@
           <a:p>
             <a:pPr algn="l">
               <a:lnSpc>
-                <a:spcPct val="100000"/>
+                <a:spcPts val="3200"/>
               </a:lnSpc>
             </a:pPr>
             <a:r>
@@ -13563,7 +13602,7 @@
           <a:p>
             <a:pPr algn="l">
               <a:lnSpc>
-                <a:spcPct val="100000"/>
+                <a:spcPts val="3200"/>
               </a:lnSpc>
             </a:pPr>
             <a:r>
@@ -13579,7 +13618,7 @@
           <a:p>
             <a:pPr algn="l">
               <a:lnSpc>
-                <a:spcPct val="100000"/>
+                <a:spcPts val="3200"/>
               </a:lnSpc>
             </a:pPr>
             <a:r>
@@ -13595,7 +13634,7 @@
           <a:p>
             <a:pPr algn="l">
               <a:lnSpc>
-                <a:spcPct val="100000"/>
+                <a:spcPts val="3200"/>
               </a:lnSpc>
             </a:pPr>
             <a:r>
@@ -13611,7 +13650,7 @@
           <a:p>
             <a:pPr algn="l">
               <a:lnSpc>
-                <a:spcPct val="100000"/>
+                <a:spcPts val="3200"/>
               </a:lnSpc>
             </a:pPr>
             <a:r>
@@ -13627,7 +13666,7 @@
           <a:p>
             <a:pPr algn="l">
               <a:lnSpc>
-                <a:spcPct val="100000"/>
+                <a:spcPts val="3200"/>
               </a:lnSpc>
             </a:pPr>
             <a:r>
@@ -13643,7 +13682,7 @@
           <a:p>
             <a:pPr algn="l">
               <a:lnSpc>
-                <a:spcPct val="100000"/>
+                <a:spcPts val="3200"/>
               </a:lnSpc>
             </a:pPr>
             <a:r>
@@ -13659,7 +13698,7 @@
           <a:p>
             <a:pPr algn="l">
               <a:lnSpc>
-                <a:spcPct val="100000"/>
+                <a:spcPts val="3200"/>
               </a:lnSpc>
             </a:pPr>
             <a:r>
@@ -13966,7 +14005,7 @@
         <p:spPr>
           <a:xfrm>
             <a:off x="411480" y="1097280"/>
-            <a:ext cx="11368735" cy="3063240"/>
+            <a:ext cx="11368735" cy="3027680"/>
           </a:xfrm>
           <a:prstGeom prst="rect">
             <a:avLst/>
@@ -14010,7 +14049,7 @@
         <p:spPr>
           <a:xfrm>
             <a:off x="557784" y="1188720"/>
-            <a:ext cx="11149279" cy="2953512"/>
+            <a:ext cx="11149279" cy="2917951"/>
           </a:xfrm>
           <a:prstGeom prst="rect">
             <a:avLst/>
@@ -14025,174 +14064,213 @@
           <a:p>
             <a:pPr algn="l">
               <a:lnSpc>
+                <a:spcPts val="3200"/>
+              </a:lnSpc>
+            </a:pPr>
+            <a:r>
+              <a:rPr sz="2800" b="1">
+                <a:solidFill>
+                  <a:srgbClr val="F2B27A"/>
+                </a:solidFill>
+                <a:latin typeface="Arial"/>
+              </a:rPr>
+              <a:t>1  BEFORE</a:t>
+            </a:r>
+            <a:r>
+              <a:rPr sz="2800" b="0">
+                <a:solidFill>
+                  <a:srgbClr val="8FA3B8"/>
+                </a:solidFill>
+                <a:latin typeface="Courier New"/>
+              </a:rPr>
+              <a:t>   db.users.findOne({"name" : "Joe"})</a:t>
+            </a:r>
+          </a:p>
+          <a:p>
+            <a:pPr algn="l">
+              <a:lnSpc>
+                <a:spcPts val="3200"/>
+              </a:lnSpc>
+            </a:pPr>
+            <a:r>
+              <a:rPr sz="2800" b="0">
+                <a:solidFill>
+                  <a:srgbClr val="9FE0C9"/>
+                </a:solidFill>
+                <a:latin typeface="Courier New"/>
+              </a:rPr>
+              <a:t>{</a:t>
+            </a:r>
+          </a:p>
+          <a:p>
+            <a:pPr algn="l">
+              <a:lnSpc>
+                <a:spcPts val="3200"/>
+              </a:lnSpc>
+            </a:pPr>
+            <a:r>
+              <a:rPr sz="2800" b="0">
+                <a:solidFill>
+                  <a:srgbClr val="9FE0C9"/>
+                </a:solidFill>
+                <a:latin typeface="Courier New"/>
+              </a:rPr>
+              <a:t>  _id: ObjectId('4b2b9f67a1f631733d917a7a'),</a:t>
+            </a:r>
+          </a:p>
+          <a:p>
+            <a:pPr algn="l">
+              <a:lnSpc>
+                <a:spcPts val="3200"/>
+              </a:lnSpc>
+            </a:pPr>
+            <a:r>
+              <a:rPr sz="2800" b="0">
+                <a:solidFill>
+                  <a:srgbClr val="9FE0C9"/>
+                </a:solidFill>
+                <a:latin typeface="Courier New"/>
+              </a:rPr>
+              <a:t>  </a:t>
+            </a:r>
+            <a:r>
+              <a:rPr sz="2800" b="0" strike="sngStrike">
+                <a:solidFill>
+                  <a:srgbClr val="FFB4A8"/>
+                </a:solidFill>
+                <a:latin typeface="Courier New"/>
+              </a:rPr>
+              <a:t>name: 'Joe'</a:t>
+            </a:r>
+            <a:r>
+              <a:rPr sz="2800" b="0">
+                <a:solidFill>
+                  <a:srgbClr val="9FE0C9"/>
+                </a:solidFill>
+                <a:latin typeface="Courier New"/>
+              </a:rPr>
+              <a:t>,</a:t>
+            </a:r>
+          </a:p>
+          <a:p>
+            <a:pPr algn="l">
+              <a:lnSpc>
+                <a:spcPts val="3200"/>
+              </a:lnSpc>
+            </a:pPr>
+            <a:r>
+              <a:rPr sz="2800" b="0">
+                <a:solidFill>
+                  <a:srgbClr val="9FE0C9"/>
+                </a:solidFill>
+                <a:latin typeface="Courier New"/>
+              </a:rPr>
+              <a:t>  </a:t>
+            </a:r>
+            <a:r>
+              <a:rPr sz="2800" b="0" strike="sngStrike">
+                <a:solidFill>
+                  <a:srgbClr val="FFB4A8"/>
+                </a:solidFill>
+                <a:latin typeface="Courier New"/>
+              </a:rPr>
+              <a:t>friends: 32</a:t>
+            </a:r>
+            <a:r>
+              <a:rPr sz="2800" b="0">
+                <a:solidFill>
+                  <a:srgbClr val="9FE0C9"/>
+                </a:solidFill>
+                <a:latin typeface="Courier New"/>
+              </a:rPr>
+              <a:t>,</a:t>
+            </a:r>
+          </a:p>
+          <a:p>
+            <a:pPr algn="l">
+              <a:lnSpc>
+                <a:spcPts val="3200"/>
+              </a:lnSpc>
+            </a:pPr>
+            <a:r>
+              <a:rPr sz="2800" b="0">
+                <a:solidFill>
+                  <a:srgbClr val="9FE0C9"/>
+                </a:solidFill>
+                <a:latin typeface="Courier New"/>
+              </a:rPr>
+              <a:t>  </a:t>
+            </a:r>
+            <a:r>
+              <a:rPr sz="2800" b="0" strike="sngStrike">
+                <a:solidFill>
+                  <a:srgbClr val="FFB4A8"/>
+                </a:solidFill>
+                <a:latin typeface="Courier New"/>
+              </a:rPr>
+              <a:t>enemies: 2</a:t>
+            </a:r>
+          </a:p>
+          <a:p>
+            <a:pPr algn="l">
+              <a:lnSpc>
+                <a:spcPts val="3200"/>
+              </a:lnSpc>
+            </a:pPr>
+            <a:r>
+              <a:rPr sz="2800" b="0">
+                <a:solidFill>
+                  <a:srgbClr val="9FE0C9"/>
+                </a:solidFill>
+                <a:latin typeface="Courier New"/>
+              </a:rPr>
+              <a:t>}</a:t>
+            </a:r>
+          </a:p>
+        </p:txBody>
+      </p:sp>
+      <p:sp>
+        <p:nvSpPr>
+          <p:cNvPr id="6" name="TextBox 5"/>
+          <p:cNvSpPr txBox="1"/>
+          <p:nvPr/>
+        </p:nvSpPr>
+        <p:spPr>
+          <a:xfrm>
+            <a:off x="411480" y="5696712"/>
+            <a:ext cx="11368735" cy="566928"/>
+          </a:xfrm>
+          <a:prstGeom prst="rect">
+            <a:avLst/>
+          </a:prstGeom>
+          <a:noFill/>
+        </p:spPr>
+        <p:txBody>
+          <a:bodyPr wrap="square" anchor="ctr" lIns="164592" rIns="164592" tIns="164592" bIns="164592">
+            <a:spAutoFit/>
+          </a:bodyPr>
+          <a:lstStyle/>
+          <a:p>
+            <a:pPr algn="r">
+              <a:lnSpc>
                 <a:spcPct val="100000"/>
               </a:lnSpc>
             </a:pPr>
             <a:r>
-              <a:rPr sz="2800" b="1">
-                <a:solidFill>
-                  <a:srgbClr val="F2B27A"/>
-                </a:solidFill>
-                <a:latin typeface="Arial"/>
-              </a:rPr>
-              <a:t>1  BEFORE</a:t>
-            </a:r>
-            <a:r>
               <a:rPr sz="2800" b="0">
                 <a:solidFill>
-                  <a:srgbClr val="8FA3B8"/>
-                </a:solidFill>
-                <a:latin typeface="Courier New"/>
-              </a:rPr>
-              <a:t>   db.users.findOne({"name" : "Joe"})</a:t>
-            </a:r>
-          </a:p>
-          <a:p>
-            <a:pPr algn="l">
-              <a:lnSpc>
-                <a:spcPct val="100000"/>
-              </a:lnSpc>
-            </a:pPr>
-            <a:r>
-              <a:rPr sz="2800" b="0">
-                <a:solidFill>
-                  <a:srgbClr val="9FE0C9"/>
-                </a:solidFill>
-                <a:latin typeface="Courier New"/>
-              </a:rPr>
-              <a:t>{</a:t>
-            </a:r>
-          </a:p>
-          <a:p>
-            <a:pPr algn="l">
-              <a:lnSpc>
-                <a:spcPct val="100000"/>
-              </a:lnSpc>
-            </a:pPr>
-            <a:r>
-              <a:rPr sz="2800" b="0">
-                <a:solidFill>
-                  <a:srgbClr val="9FE0C9"/>
-                </a:solidFill>
-                <a:latin typeface="Courier New"/>
-              </a:rPr>
-              <a:t>  _id: ObjectId('4b2b9f67a1f631733d917a7a'),</a:t>
-            </a:r>
-          </a:p>
-          <a:p>
-            <a:pPr algn="l">
-              <a:lnSpc>
-                <a:spcPct val="100000"/>
-              </a:lnSpc>
-            </a:pPr>
-            <a:r>
-              <a:rPr sz="2800" b="0">
-                <a:solidFill>
-                  <a:srgbClr val="9FE0C9"/>
-                </a:solidFill>
-                <a:latin typeface="Courier New"/>
-              </a:rPr>
-              <a:t>  </a:t>
-            </a:r>
-            <a:r>
-              <a:rPr sz="2800" b="0" strike="sngStrike">
-                <a:solidFill>
-                  <a:srgbClr val="FFB4A8"/>
-                </a:solidFill>
-                <a:latin typeface="Courier New"/>
-              </a:rPr>
-              <a:t>name: 'Joe'</a:t>
-            </a:r>
-            <a:r>
-              <a:rPr sz="2800" b="0">
-                <a:solidFill>
-                  <a:srgbClr val="9FE0C9"/>
-                </a:solidFill>
-                <a:latin typeface="Courier New"/>
-              </a:rPr>
-              <a:t>,</a:t>
-            </a:r>
-          </a:p>
-          <a:p>
-            <a:pPr algn="l">
-              <a:lnSpc>
-                <a:spcPct val="100000"/>
-              </a:lnSpc>
-            </a:pPr>
-            <a:r>
-              <a:rPr sz="2800" b="0">
-                <a:solidFill>
-                  <a:srgbClr val="9FE0C9"/>
-                </a:solidFill>
-                <a:latin typeface="Courier New"/>
-              </a:rPr>
-              <a:t>  </a:t>
-            </a:r>
-            <a:r>
-              <a:rPr sz="2800" b="0" strike="sngStrike">
-                <a:solidFill>
-                  <a:srgbClr val="FFB4A8"/>
-                </a:solidFill>
-                <a:latin typeface="Courier New"/>
-              </a:rPr>
-              <a:t>friends: 32</a:t>
-            </a:r>
-            <a:r>
-              <a:rPr sz="2800" b="0">
-                <a:solidFill>
-                  <a:srgbClr val="9FE0C9"/>
-                </a:solidFill>
-                <a:latin typeface="Courier New"/>
-              </a:rPr>
-              <a:t>,</a:t>
-            </a:r>
-          </a:p>
-          <a:p>
-            <a:pPr algn="l">
-              <a:lnSpc>
-                <a:spcPct val="100000"/>
-              </a:lnSpc>
-            </a:pPr>
-            <a:r>
-              <a:rPr sz="2800" b="0">
-                <a:solidFill>
-                  <a:srgbClr val="9FE0C9"/>
-                </a:solidFill>
-                <a:latin typeface="Courier New"/>
-              </a:rPr>
-              <a:t>  </a:t>
-            </a:r>
-            <a:r>
-              <a:rPr sz="2800" b="0" strike="sngStrike">
-                <a:solidFill>
-                  <a:srgbClr val="FFB4A8"/>
-                </a:solidFill>
-                <a:latin typeface="Courier New"/>
-              </a:rPr>
-              <a:t>enemies: 2</a:t>
-            </a:r>
-          </a:p>
-          <a:p>
-            <a:pPr algn="l">
-              <a:lnSpc>
-                <a:spcPct val="100000"/>
-              </a:lnSpc>
-            </a:pPr>
-            <a:r>
-              <a:rPr sz="2800" b="0">
-                <a:solidFill>
-                  <a:srgbClr val="9FE0C9"/>
-                </a:solidFill>
-                <a:latin typeface="Courier New"/>
-              </a:rPr>
-              <a:t>}</a:t>
-            </a:r>
-          </a:p>
-        </p:txBody>
-      </p:sp>
-      <p:sp>
-        <p:nvSpPr>
-          <p:cNvPr id="6" name="EXEMPT_FOOTER"/>
+                  <a:srgbClr val="4A5868"/>
+                </a:solidFill>
+                <a:latin typeface="Arial"/>
+              </a:rPr>
+              <a:t>Next: 2  COMMAND → REPLY  →</a:t>
+            </a:r>
+          </a:p>
+        </p:txBody>
+      </p:sp>
+      <p:sp>
+        <p:nvSpPr>
+          <p:cNvPr id="7" name="EXEMPT_FOOTER"/>
           <p:cNvSpPr txBox="1"/>
           <p:nvPr/>
         </p:nvSpPr>
@@ -14231,7 +14309,7 @@
       </p:sp>
       <p:sp>
         <p:nvSpPr>
-          <p:cNvPr id="7" name="EXEMPT_FOOTER"/>
+          <p:cNvPr id="8" name="EXEMPT_FOOTER"/>
           <p:cNvSpPr txBox="1"/>
           <p:nvPr/>
         </p:nvSpPr>
@@ -14270,7 +14348,7 @@
       </p:sp>
       <p:sp>
         <p:nvSpPr>
-          <p:cNvPr id="8" name="EXEMPT_PROGRESS"/>
+          <p:cNvPr id="9" name="EXEMPT_PROGRESS"/>
           <p:cNvSpPr txBox="1"/>
           <p:nvPr/>
         </p:nvSpPr>
@@ -15526,7 +15604,7 @@
         <p:spPr>
           <a:xfrm>
             <a:off x="411480" y="1097280"/>
-            <a:ext cx="11368735" cy="4709160"/>
+            <a:ext cx="11368735" cy="4653280"/>
           </a:xfrm>
           <a:prstGeom prst="rect">
             <a:avLst/>
@@ -15570,7 +15648,7 @@
         <p:spPr>
           <a:xfrm>
             <a:off x="557784" y="1188720"/>
-            <a:ext cx="11149279" cy="4599432"/>
+            <a:ext cx="11149279" cy="4543552"/>
           </a:xfrm>
           <a:prstGeom prst="rect">
             <a:avLst/>
@@ -15585,7 +15663,7 @@
           <a:p>
             <a:pPr algn="l">
               <a:lnSpc>
-                <a:spcPct val="100000"/>
+                <a:spcPts val="3200"/>
               </a:lnSpc>
             </a:pPr>
             <a:r>
@@ -15601,7 +15679,7 @@
           <a:p>
             <a:pPr algn="l">
               <a:lnSpc>
-                <a:spcPct val="100000"/>
+                <a:spcPts val="3200"/>
               </a:lnSpc>
             </a:pPr>
             <a:r>
@@ -15617,7 +15695,7 @@
           <a:p>
             <a:pPr algn="l">
               <a:lnSpc>
-                <a:spcPct val="100000"/>
+                <a:spcPts val="3200"/>
               </a:lnSpc>
             </a:pPr>
             <a:r>
@@ -15633,7 +15711,7 @@
           <a:p>
             <a:pPr algn="l">
               <a:lnSpc>
-                <a:spcPct val="100000"/>
+                <a:spcPts val="3200"/>
               </a:lnSpc>
             </a:pPr>
             <a:r>
@@ -15649,7 +15727,7 @@
           <a:p>
             <a:pPr algn="l">
               <a:lnSpc>
-                <a:spcPct val="100000"/>
+                <a:spcPts val="3200"/>
               </a:lnSpc>
             </a:pPr>
             <a:r>
@@ -15665,7 +15743,7 @@
           <a:p>
             <a:pPr algn="l">
               <a:lnSpc>
-                <a:spcPct val="100000"/>
+                <a:spcPts val="3200"/>
               </a:lnSpc>
             </a:pPr>
             <a:r>
@@ -15681,7 +15759,7 @@
           <a:p>
             <a:pPr algn="l">
               <a:lnSpc>
-                <a:spcPct val="100000"/>
+                <a:spcPts val="3200"/>
               </a:lnSpc>
             </a:pPr>
             <a:r>
@@ -15697,7 +15775,7 @@
           <a:p>
             <a:pPr algn="l">
               <a:lnSpc>
-                <a:spcPct val="100000"/>
+                <a:spcPts val="3200"/>
               </a:lnSpc>
             </a:pPr>
             <a:r>
@@ -15713,7 +15791,7 @@
           <a:p>
             <a:pPr algn="l">
               <a:lnSpc>
-                <a:spcPct val="100000"/>
+                <a:spcPts val="3200"/>
               </a:lnSpc>
             </a:pPr>
             <a:r>
@@ -15729,7 +15807,7 @@
           <a:p>
             <a:pPr algn="l">
               <a:lnSpc>
-                <a:spcPct val="100000"/>
+                <a:spcPts val="3200"/>
               </a:lnSpc>
             </a:pPr>
             <a:r>
@@ -15745,7 +15823,7 @@
           <a:p>
             <a:pPr algn="l">
               <a:lnSpc>
-                <a:spcPct val="100000"/>
+                <a:spcPts val="3200"/>
               </a:lnSpc>
             </a:pPr>
             <a:r>
@@ -15995,7 +16073,7 @@
         <p:spPr>
           <a:xfrm>
             <a:off x="411480" y="1097280"/>
-            <a:ext cx="11368735" cy="2651760"/>
+            <a:ext cx="11368735" cy="2621280"/>
           </a:xfrm>
           <a:prstGeom prst="rect">
             <a:avLst/>
@@ -16039,7 +16117,7 @@
         <p:spPr>
           <a:xfrm>
             <a:off x="557784" y="1188720"/>
-            <a:ext cx="11149279" cy="2542032"/>
+            <a:ext cx="11149279" cy="2511552"/>
           </a:xfrm>
           <a:prstGeom prst="rect">
             <a:avLst/>
@@ -16054,7 +16132,7 @@
           <a:p>
             <a:pPr algn="l">
               <a:lnSpc>
-                <a:spcPct val="100000"/>
+                <a:spcPts val="3200"/>
               </a:lnSpc>
             </a:pPr>
             <a:r>
@@ -16079,7 +16157,7 @@
           <a:p>
             <a:pPr algn="l">
               <a:lnSpc>
-                <a:spcPct val="100000"/>
+                <a:spcPts val="3200"/>
               </a:lnSpc>
             </a:pPr>
             <a:r>
@@ -16095,7 +16173,7 @@
           <a:p>
             <a:pPr algn="l">
               <a:lnSpc>
-                <a:spcPct val="100000"/>
+                <a:spcPts val="3200"/>
               </a:lnSpc>
             </a:pPr>
             <a:r>
@@ -16111,7 +16189,7 @@
           <a:p>
             <a:pPr algn="l">
               <a:lnSpc>
-                <a:spcPct val="100000"/>
+                <a:spcPts val="3200"/>
               </a:lnSpc>
             </a:pPr>
             <a:r>
@@ -16145,7 +16223,7 @@
           <a:p>
             <a:pPr algn="l">
               <a:lnSpc>
-                <a:spcPct val="100000"/>
+                <a:spcPts val="3200"/>
               </a:lnSpc>
             </a:pPr>
             <a:r>
@@ -16170,7 +16248,7 @@
           <a:p>
             <a:pPr algn="l">
               <a:lnSpc>
-                <a:spcPct val="100000"/>
+                <a:spcPts val="3200"/>
               </a:lnSpc>
             </a:pPr>
             <a:r>
@@ -16477,7 +16555,7 @@
         <p:spPr>
           <a:xfrm>
             <a:off x="411480" y="1097280"/>
-            <a:ext cx="11368735" cy="3474720"/>
+            <a:ext cx="11368735" cy="3434080"/>
           </a:xfrm>
           <a:prstGeom prst="rect">
             <a:avLst/>
@@ -16521,7 +16599,7 @@
         <p:spPr>
           <a:xfrm>
             <a:off x="557784" y="1188720"/>
-            <a:ext cx="11149279" cy="3364992"/>
+            <a:ext cx="11149279" cy="3324352"/>
           </a:xfrm>
           <a:prstGeom prst="rect">
             <a:avLst/>
@@ -16536,136 +16614,175 @@
           <a:p>
             <a:pPr algn="l">
               <a:lnSpc>
+                <a:spcPts val="3200"/>
+              </a:lnSpc>
+            </a:pPr>
+            <a:r>
+              <a:rPr sz="2800" b="1">
+                <a:solidFill>
+                  <a:srgbClr val="F2B27A"/>
+                </a:solidFill>
+                <a:latin typeface="Arial"/>
+              </a:rPr>
+              <a:t>1  BEFORE</a:t>
+            </a:r>
+          </a:p>
+          <a:p>
+            <a:pPr algn="l">
+              <a:lnSpc>
+                <a:spcPts val="3200"/>
+              </a:lnSpc>
+            </a:pPr>
+            <a:r>
+              <a:rPr sz="2800" b="0">
+                <a:solidFill>
+                  <a:srgbClr val="8FA3B8"/>
+                </a:solidFill>
+                <a:latin typeface="Courier New"/>
+              </a:rPr>
+              <a:t>db.users.findOne({"name" : "John"}, {"_id" : 0})</a:t>
+            </a:r>
+          </a:p>
+          <a:p>
+            <a:pPr algn="l">
+              <a:lnSpc>
+                <a:spcPts val="3200"/>
+              </a:lnSpc>
+            </a:pPr>
+            <a:r>
+              <a:rPr sz="2800" b="0">
+                <a:solidFill>
+                  <a:srgbClr val="9FE0C9"/>
+                </a:solidFill>
+                <a:latin typeface="Courier New"/>
+              </a:rPr>
+              <a:t>{</a:t>
+            </a:r>
+          </a:p>
+          <a:p>
+            <a:pPr algn="l">
+              <a:lnSpc>
+                <a:spcPts val="3200"/>
+              </a:lnSpc>
+            </a:pPr>
+            <a:r>
+              <a:rPr sz="2800" b="0">
+                <a:solidFill>
+                  <a:srgbClr val="9FE0C9"/>
+                </a:solidFill>
+                <a:latin typeface="Courier New"/>
+              </a:rPr>
+              <a:t>  name: 'John',</a:t>
+            </a:r>
+          </a:p>
+          <a:p>
+            <a:pPr algn="l">
+              <a:lnSpc>
+                <a:spcPts val="3200"/>
+              </a:lnSpc>
+            </a:pPr>
+            <a:r>
+              <a:rPr sz="2800" b="0">
+                <a:solidFill>
+                  <a:srgbClr val="9FE0C9"/>
+                </a:solidFill>
+                <a:latin typeface="Courier New"/>
+              </a:rPr>
+              <a:t>  age: 24,</a:t>
+            </a:r>
+          </a:p>
+          <a:p>
+            <a:pPr algn="l">
+              <a:lnSpc>
+                <a:spcPts val="3200"/>
+              </a:lnSpc>
+            </a:pPr>
+            <a:r>
+              <a:rPr sz="2800" b="0">
+                <a:solidFill>
+                  <a:srgbClr val="9FE0C9"/>
+                </a:solidFill>
+                <a:latin typeface="Courier New"/>
+              </a:rPr>
+              <a:t>  sex: 'male',</a:t>
+            </a:r>
+          </a:p>
+          <a:p>
+            <a:pPr algn="l">
+              <a:lnSpc>
+                <a:spcPts val="3200"/>
+              </a:lnSpc>
+            </a:pPr>
+            <a:r>
+              <a:rPr sz="2800" b="0">
+                <a:solidFill>
+                  <a:srgbClr val="9FE0C9"/>
+                </a:solidFill>
+                <a:latin typeface="Courier New"/>
+              </a:rPr>
+              <a:t>  location: 'Taytay'</a:t>
+            </a:r>
+          </a:p>
+          <a:p>
+            <a:pPr algn="l">
+              <a:lnSpc>
+                <a:spcPts val="3200"/>
+              </a:lnSpc>
+            </a:pPr>
+            <a:r>
+              <a:rPr sz="2800" b="0">
+                <a:solidFill>
+                  <a:srgbClr val="9FE0C9"/>
+                </a:solidFill>
+                <a:latin typeface="Courier New"/>
+              </a:rPr>
+              <a:t>}</a:t>
+            </a:r>
+          </a:p>
+        </p:txBody>
+      </p:sp>
+      <p:sp>
+        <p:nvSpPr>
+          <p:cNvPr id="6" name="TextBox 5"/>
+          <p:cNvSpPr txBox="1"/>
+          <p:nvPr/>
+        </p:nvSpPr>
+        <p:spPr>
+          <a:xfrm>
+            <a:off x="411480" y="5696712"/>
+            <a:ext cx="11368735" cy="566928"/>
+          </a:xfrm>
+          <a:prstGeom prst="rect">
+            <a:avLst/>
+          </a:prstGeom>
+          <a:noFill/>
+        </p:spPr>
+        <p:txBody>
+          <a:bodyPr wrap="square" anchor="ctr" lIns="164592" rIns="164592" tIns="164592" bIns="164592">
+            <a:spAutoFit/>
+          </a:bodyPr>
+          <a:lstStyle/>
+          <a:p>
+            <a:pPr algn="r">
+              <a:lnSpc>
                 <a:spcPct val="100000"/>
               </a:lnSpc>
             </a:pPr>
             <a:r>
-              <a:rPr sz="2800" b="1">
-                <a:solidFill>
-                  <a:srgbClr val="F2B27A"/>
-                </a:solidFill>
-                <a:latin typeface="Arial"/>
-              </a:rPr>
-              <a:t>1  BEFORE</a:t>
-            </a:r>
-          </a:p>
-          <a:p>
-            <a:pPr algn="l">
-              <a:lnSpc>
-                <a:spcPct val="100000"/>
-              </a:lnSpc>
-            </a:pPr>
-            <a:r>
               <a:rPr sz="2800" b="0">
                 <a:solidFill>
-                  <a:srgbClr val="8FA3B8"/>
-                </a:solidFill>
-                <a:latin typeface="Courier New"/>
-              </a:rPr>
-              <a:t>db.users.findOne({"name" : "John"}, {"_id" : 0})</a:t>
-            </a:r>
-          </a:p>
-          <a:p>
-            <a:pPr algn="l">
-              <a:lnSpc>
-                <a:spcPct val="100000"/>
-              </a:lnSpc>
-            </a:pPr>
-            <a:r>
-              <a:rPr sz="2800" b="0">
-                <a:solidFill>
-                  <a:srgbClr val="9FE0C9"/>
-                </a:solidFill>
-                <a:latin typeface="Courier New"/>
-              </a:rPr>
-              <a:t>{</a:t>
-            </a:r>
-          </a:p>
-          <a:p>
-            <a:pPr algn="l">
-              <a:lnSpc>
-                <a:spcPct val="100000"/>
-              </a:lnSpc>
-            </a:pPr>
-            <a:r>
-              <a:rPr sz="2800" b="0">
-                <a:solidFill>
-                  <a:srgbClr val="9FE0C9"/>
-                </a:solidFill>
-                <a:latin typeface="Courier New"/>
-              </a:rPr>
-              <a:t>  name: 'John',</a:t>
-            </a:r>
-          </a:p>
-          <a:p>
-            <a:pPr algn="l">
-              <a:lnSpc>
-                <a:spcPct val="100000"/>
-              </a:lnSpc>
-            </a:pPr>
-            <a:r>
-              <a:rPr sz="2800" b="0">
-                <a:solidFill>
-                  <a:srgbClr val="9FE0C9"/>
-                </a:solidFill>
-                <a:latin typeface="Courier New"/>
-              </a:rPr>
-              <a:t>  age: 24,</a:t>
-            </a:r>
-          </a:p>
-          <a:p>
-            <a:pPr algn="l">
-              <a:lnSpc>
-                <a:spcPct val="100000"/>
-              </a:lnSpc>
-            </a:pPr>
-            <a:r>
-              <a:rPr sz="2800" b="0">
-                <a:solidFill>
-                  <a:srgbClr val="9FE0C9"/>
-                </a:solidFill>
-                <a:latin typeface="Courier New"/>
-              </a:rPr>
-              <a:t>  sex: 'male',</a:t>
-            </a:r>
-          </a:p>
-          <a:p>
-            <a:pPr algn="l">
-              <a:lnSpc>
-                <a:spcPct val="100000"/>
-              </a:lnSpc>
-            </a:pPr>
-            <a:r>
-              <a:rPr sz="2800" b="0">
-                <a:solidFill>
-                  <a:srgbClr val="9FE0C9"/>
-                </a:solidFill>
-                <a:latin typeface="Courier New"/>
-              </a:rPr>
-              <a:t>  location: 'Taytay'</a:t>
-            </a:r>
-          </a:p>
-          <a:p>
-            <a:pPr algn="l">
-              <a:lnSpc>
-                <a:spcPct val="100000"/>
-              </a:lnSpc>
-            </a:pPr>
-            <a:r>
-              <a:rPr sz="2800" b="0">
-                <a:solidFill>
-                  <a:srgbClr val="9FE0C9"/>
-                </a:solidFill>
-                <a:latin typeface="Courier New"/>
-              </a:rPr>
-              <a:t>}</a:t>
-            </a:r>
-          </a:p>
-        </p:txBody>
-      </p:sp>
-      <p:sp>
-        <p:nvSpPr>
-          <p:cNvPr id="6" name="EXEMPT_FOOTER"/>
+                  <a:srgbClr val="4A5868"/>
+                </a:solidFill>
+                <a:latin typeface="Arial"/>
+              </a:rPr>
+              <a:t>Next: 2  COMMAND → REPLY  →</a:t>
+            </a:r>
+          </a:p>
+        </p:txBody>
+      </p:sp>
+      <p:sp>
+        <p:nvSpPr>
+          <p:cNvPr id="7" name="EXEMPT_FOOTER"/>
           <p:cNvSpPr txBox="1"/>
           <p:nvPr/>
         </p:nvSpPr>
@@ -16704,7 +16821,7 @@
       </p:sp>
       <p:sp>
         <p:nvSpPr>
-          <p:cNvPr id="7" name="EXEMPT_FOOTER"/>
+          <p:cNvPr id="8" name="EXEMPT_FOOTER"/>
           <p:cNvSpPr txBox="1"/>
           <p:nvPr/>
         </p:nvSpPr>
@@ -16743,7 +16860,7 @@
       </p:sp>
       <p:sp>
         <p:nvSpPr>
-          <p:cNvPr id="8" name="EXEMPT_PROGRESS"/>
+          <p:cNvPr id="9" name="EXEMPT_PROGRESS"/>
           <p:cNvSpPr txBox="1"/>
           <p:nvPr/>
         </p:nvSpPr>
@@ -16898,7 +17015,7 @@
         <p:spPr>
           <a:xfrm>
             <a:off x="411480" y="1097280"/>
-            <a:ext cx="11368735" cy="3063240"/>
+            <a:ext cx="11368735" cy="3027680"/>
           </a:xfrm>
           <a:prstGeom prst="rect">
             <a:avLst/>
@@ -16942,7 +17059,7 @@
         <p:spPr>
           <a:xfrm>
             <a:off x="557784" y="1188720"/>
-            <a:ext cx="11149279" cy="2953512"/>
+            <a:ext cx="11149279" cy="2917951"/>
           </a:xfrm>
           <a:prstGeom prst="rect">
             <a:avLst/>
@@ -16957,120 +17074,159 @@
           <a:p>
             <a:pPr algn="l">
               <a:lnSpc>
+                <a:spcPts val="3200"/>
+              </a:lnSpc>
+            </a:pPr>
+            <a:r>
+              <a:rPr sz="2800" b="1">
+                <a:solidFill>
+                  <a:srgbClr val="F2B27A"/>
+                </a:solidFill>
+                <a:latin typeface="Arial"/>
+              </a:rPr>
+              <a:t>2  COMMAND → REPLY</a:t>
+            </a:r>
+          </a:p>
+          <a:p>
+            <a:pPr algn="l">
+              <a:lnSpc>
+                <a:spcPts val="3200"/>
+              </a:lnSpc>
+            </a:pPr>
+            <a:r>
+              <a:rPr sz="2800" b="0">
+                <a:solidFill>
+                  <a:srgbClr val="E6ECF2"/>
+                </a:solidFill>
+                <a:latin typeface="Courier New"/>
+              </a:rPr>
+              <a:t>db.users.updateOne({"name" : "John"},</a:t>
+            </a:r>
+          </a:p>
+          <a:p>
+            <a:pPr algn="l">
+              <a:lnSpc>
+                <a:spcPts val="3200"/>
+              </a:lnSpc>
+            </a:pPr>
+            <a:r>
+              <a:rPr sz="2800" b="0">
+                <a:solidFill>
+                  <a:srgbClr val="E6ECF2"/>
+                </a:solidFill>
+                <a:latin typeface="Courier New"/>
+              </a:rPr>
+              <a:t>  {"$set" : {"favorite book" :</a:t>
+            </a:r>
+          </a:p>
+          <a:p>
+            <a:pPr algn="l">
+              <a:lnSpc>
+                <a:spcPts val="3200"/>
+              </a:lnSpc>
+            </a:pPr>
+            <a:r>
+              <a:rPr sz="2800" b="0">
+                <a:solidFill>
+                  <a:srgbClr val="E6ECF2"/>
+                </a:solidFill>
+                <a:latin typeface="Courier New"/>
+              </a:rPr>
+              <a:t>    "Green Eggs and Ham"}})</a:t>
+            </a:r>
+          </a:p>
+          <a:p>
+            <a:pPr algn="l">
+              <a:lnSpc>
+                <a:spcPts val="3200"/>
+              </a:lnSpc>
+            </a:pPr>
+            <a:r>
+              <a:rPr sz="2800" b="0">
+                <a:solidFill>
+                  <a:srgbClr val="9FE0C9"/>
+                </a:solidFill>
+                <a:latin typeface="Courier New"/>
+              </a:rPr>
+              <a:t>{ acknowledged: true, insertedId: null,</a:t>
+            </a:r>
+          </a:p>
+          <a:p>
+            <a:pPr algn="l">
+              <a:lnSpc>
+                <a:spcPts val="3200"/>
+              </a:lnSpc>
+            </a:pPr>
+            <a:r>
+              <a:rPr sz="2800" b="0">
+                <a:solidFill>
+                  <a:srgbClr val="9FE0C9"/>
+                </a:solidFill>
+                <a:latin typeface="Courier New"/>
+              </a:rPr>
+              <a:t>  matchedCount: 1, modifiedCount: 1,</a:t>
+            </a:r>
+          </a:p>
+          <a:p>
+            <a:pPr algn="l">
+              <a:lnSpc>
+                <a:spcPts val="3200"/>
+              </a:lnSpc>
+            </a:pPr>
+            <a:r>
+              <a:rPr sz="2800" b="0">
+                <a:solidFill>
+                  <a:srgbClr val="9FE0C9"/>
+                </a:solidFill>
+                <a:latin typeface="Courier New"/>
+              </a:rPr>
+              <a:t>  upsertedCount: 0 }</a:t>
+            </a:r>
+          </a:p>
+        </p:txBody>
+      </p:sp>
+      <p:sp>
+        <p:nvSpPr>
+          <p:cNvPr id="6" name="TextBox 5"/>
+          <p:cNvSpPr txBox="1"/>
+          <p:nvPr/>
+        </p:nvSpPr>
+        <p:spPr>
+          <a:xfrm>
+            <a:off x="411480" y="5696712"/>
+            <a:ext cx="11368735" cy="566928"/>
+          </a:xfrm>
+          <a:prstGeom prst="rect">
+            <a:avLst/>
+          </a:prstGeom>
+          <a:noFill/>
+        </p:spPr>
+        <p:txBody>
+          <a:bodyPr wrap="square" anchor="ctr" lIns="164592" rIns="164592" tIns="164592" bIns="164592">
+            <a:spAutoFit/>
+          </a:bodyPr>
+          <a:lstStyle/>
+          <a:p>
+            <a:pPr algn="r">
+              <a:lnSpc>
                 <a:spcPct val="100000"/>
               </a:lnSpc>
             </a:pPr>
             <a:r>
-              <a:rPr sz="2800" b="1">
-                <a:solidFill>
-                  <a:srgbClr val="F2B27A"/>
-                </a:solidFill>
-                <a:latin typeface="Arial"/>
-              </a:rPr>
-              <a:t>2  COMMAND → REPLY</a:t>
-            </a:r>
-          </a:p>
-          <a:p>
-            <a:pPr algn="l">
-              <a:lnSpc>
-                <a:spcPct val="100000"/>
-              </a:lnSpc>
-            </a:pPr>
-            <a:r>
               <a:rPr sz="2800" b="0">
                 <a:solidFill>
-                  <a:srgbClr val="E6ECF2"/>
-                </a:solidFill>
-                <a:latin typeface="Courier New"/>
-              </a:rPr>
-              <a:t>db.users.updateOne({"name" : "John"},</a:t>
-            </a:r>
-          </a:p>
-          <a:p>
-            <a:pPr algn="l">
-              <a:lnSpc>
-                <a:spcPct val="100000"/>
-              </a:lnSpc>
-            </a:pPr>
-            <a:r>
-              <a:rPr sz="2800" b="0">
-                <a:solidFill>
-                  <a:srgbClr val="E6ECF2"/>
-                </a:solidFill>
-                <a:latin typeface="Courier New"/>
-              </a:rPr>
-              <a:t>  {"$set" : {"favorite book" :</a:t>
-            </a:r>
-          </a:p>
-          <a:p>
-            <a:pPr algn="l">
-              <a:lnSpc>
-                <a:spcPct val="100000"/>
-              </a:lnSpc>
-            </a:pPr>
-            <a:r>
-              <a:rPr sz="2800" b="0">
-                <a:solidFill>
-                  <a:srgbClr val="E6ECF2"/>
-                </a:solidFill>
-                <a:latin typeface="Courier New"/>
-              </a:rPr>
-              <a:t>    "Green Eggs and Ham"}})</a:t>
-            </a:r>
-          </a:p>
-          <a:p>
-            <a:pPr algn="l">
-              <a:lnSpc>
-                <a:spcPct val="100000"/>
-              </a:lnSpc>
-            </a:pPr>
-            <a:r>
-              <a:rPr sz="2800" b="0">
-                <a:solidFill>
-                  <a:srgbClr val="9FE0C9"/>
-                </a:solidFill>
-                <a:latin typeface="Courier New"/>
-              </a:rPr>
-              <a:t>{ acknowledged: true, insertedId: null,</a:t>
-            </a:r>
-          </a:p>
-          <a:p>
-            <a:pPr algn="l">
-              <a:lnSpc>
-                <a:spcPct val="100000"/>
-              </a:lnSpc>
-            </a:pPr>
-            <a:r>
-              <a:rPr sz="2800" b="0">
-                <a:solidFill>
-                  <a:srgbClr val="9FE0C9"/>
-                </a:solidFill>
-                <a:latin typeface="Courier New"/>
-              </a:rPr>
-              <a:t>  matchedCount: 1, modifiedCount: 1,</a:t>
-            </a:r>
-          </a:p>
-          <a:p>
-            <a:pPr algn="l">
-              <a:lnSpc>
-                <a:spcPct val="100000"/>
-              </a:lnSpc>
-            </a:pPr>
-            <a:r>
-              <a:rPr sz="2800" b="0">
-                <a:solidFill>
-                  <a:srgbClr val="9FE0C9"/>
-                </a:solidFill>
-                <a:latin typeface="Courier New"/>
-              </a:rPr>
-              <a:t>  upsertedCount: 0 }</a:t>
-            </a:r>
-          </a:p>
-        </p:txBody>
-      </p:sp>
-      <p:sp>
-        <p:nvSpPr>
-          <p:cNvPr id="6" name="EXEMPT_FOOTER"/>
+                  <a:srgbClr val="4A5868"/>
+                </a:solidFill>
+                <a:latin typeface="Arial"/>
+              </a:rPr>
+              <a:t>Next: 3  AFTER  →</a:t>
+            </a:r>
+          </a:p>
+        </p:txBody>
+      </p:sp>
+      <p:sp>
+        <p:nvSpPr>
+          <p:cNvPr id="7" name="EXEMPT_FOOTER"/>
           <p:cNvSpPr txBox="1"/>
           <p:nvPr/>
         </p:nvSpPr>
@@ -17109,7 +17265,7 @@
       </p:sp>
       <p:sp>
         <p:nvSpPr>
-          <p:cNvPr id="7" name="EXEMPT_FOOTER"/>
+          <p:cNvPr id="8" name="EXEMPT_FOOTER"/>
           <p:cNvSpPr txBox="1"/>
           <p:nvPr/>
         </p:nvSpPr>
@@ -17148,7 +17304,7 @@
       </p:sp>
       <p:sp>
         <p:nvSpPr>
-          <p:cNvPr id="8" name="EXEMPT_PROGRESS"/>
+          <p:cNvPr id="9" name="EXEMPT_PROGRESS"/>
           <p:cNvSpPr txBox="1"/>
           <p:nvPr/>
         </p:nvSpPr>
@@ -17303,7 +17459,7 @@
         <p:spPr>
           <a:xfrm>
             <a:off x="411480" y="1097280"/>
-            <a:ext cx="11368735" cy="3886200"/>
+            <a:ext cx="11368735" cy="3840480"/>
           </a:xfrm>
           <a:prstGeom prst="rect">
             <a:avLst/>
@@ -17347,7 +17503,7 @@
         <p:spPr>
           <a:xfrm>
             <a:off x="557784" y="1188720"/>
-            <a:ext cx="11149279" cy="3776472"/>
+            <a:ext cx="11149279" cy="3730752"/>
           </a:xfrm>
           <a:prstGeom prst="rect">
             <a:avLst/>
@@ -17362,7 +17518,7 @@
           <a:p>
             <a:pPr algn="l">
               <a:lnSpc>
-                <a:spcPct val="100000"/>
+                <a:spcPts val="3200"/>
               </a:lnSpc>
             </a:pPr>
             <a:r>
@@ -17378,7 +17534,7 @@
           <a:p>
             <a:pPr algn="l">
               <a:lnSpc>
-                <a:spcPct val="100000"/>
+                <a:spcPts val="3200"/>
               </a:lnSpc>
             </a:pPr>
             <a:r>
@@ -17394,7 +17550,7 @@
           <a:p>
             <a:pPr algn="l">
               <a:lnSpc>
-                <a:spcPct val="100000"/>
+                <a:spcPts val="3200"/>
               </a:lnSpc>
             </a:pPr>
             <a:r>
@@ -17410,7 +17566,7 @@
           <a:p>
             <a:pPr algn="l">
               <a:lnSpc>
-                <a:spcPct val="100000"/>
+                <a:spcPts val="3200"/>
               </a:lnSpc>
             </a:pPr>
             <a:r>
@@ -17426,7 +17582,7 @@
           <a:p>
             <a:pPr algn="l">
               <a:lnSpc>
-                <a:spcPct val="100000"/>
+                <a:spcPts val="3200"/>
               </a:lnSpc>
             </a:pPr>
             <a:r>
@@ -17442,7 +17598,7 @@
           <a:p>
             <a:pPr algn="l">
               <a:lnSpc>
-                <a:spcPct val="100000"/>
+                <a:spcPts val="3200"/>
               </a:lnSpc>
             </a:pPr>
             <a:r>
@@ -17458,7 +17614,7 @@
           <a:p>
             <a:pPr algn="l">
               <a:lnSpc>
-                <a:spcPct val="100000"/>
+                <a:spcPts val="3200"/>
               </a:lnSpc>
             </a:pPr>
             <a:r>
@@ -17474,7 +17630,7 @@
           <a:p>
             <a:pPr algn="l">
               <a:lnSpc>
-                <a:spcPct val="100000"/>
+                <a:spcPts val="3200"/>
               </a:lnSpc>
             </a:pPr>
             <a:r>
@@ -17499,7 +17655,7 @@
           <a:p>
             <a:pPr algn="l">
               <a:lnSpc>
-                <a:spcPct val="100000"/>
+                <a:spcPts val="3200"/>
               </a:lnSpc>
             </a:pPr>
             <a:r>
@@ -17806,7 +17962,7 @@
         <p:spPr>
           <a:xfrm>
             <a:off x="411480" y="1097280"/>
-            <a:ext cx="11368735" cy="3886200"/>
+            <a:ext cx="11368735" cy="3840480"/>
           </a:xfrm>
           <a:prstGeom prst="rect">
             <a:avLst/>
@@ -17850,7 +18006,7 @@
         <p:spPr>
           <a:xfrm>
             <a:off x="557784" y="1188720"/>
-            <a:ext cx="11149279" cy="3776472"/>
+            <a:ext cx="11149279" cy="3730752"/>
           </a:xfrm>
           <a:prstGeom prst="rect">
             <a:avLst/>
@@ -17865,161 +18021,200 @@
           <a:p>
             <a:pPr algn="l">
               <a:lnSpc>
+                <a:spcPts val="3200"/>
+              </a:lnSpc>
+            </a:pPr>
+            <a:r>
+              <a:rPr sz="2800" b="1">
+                <a:solidFill>
+                  <a:srgbClr val="F2B27A"/>
+                </a:solidFill>
+                <a:latin typeface="Arial"/>
+              </a:rPr>
+              <a:t>1  BEFORE</a:t>
+            </a:r>
+          </a:p>
+          <a:p>
+            <a:pPr algn="l">
+              <a:lnSpc>
+                <a:spcPts val="3200"/>
+              </a:lnSpc>
+            </a:pPr>
+            <a:r>
+              <a:rPr sz="2800" b="0">
+                <a:solidFill>
+                  <a:srgbClr val="8FA3B8"/>
+                </a:solidFill>
+                <a:latin typeface="Courier New"/>
+              </a:rPr>
+              <a:t>db.users.findOne({"name" : "John"}, {"_id" : 0})</a:t>
+            </a:r>
+          </a:p>
+          <a:p>
+            <a:pPr algn="l">
+              <a:lnSpc>
+                <a:spcPts val="3200"/>
+              </a:lnSpc>
+            </a:pPr>
+            <a:r>
+              <a:rPr sz="2800" b="0">
+                <a:solidFill>
+                  <a:srgbClr val="9FE0C9"/>
+                </a:solidFill>
+                <a:latin typeface="Courier New"/>
+              </a:rPr>
+              <a:t>{</a:t>
+            </a:r>
+          </a:p>
+          <a:p>
+            <a:pPr algn="l">
+              <a:lnSpc>
+                <a:spcPts val="3200"/>
+              </a:lnSpc>
+            </a:pPr>
+            <a:r>
+              <a:rPr sz="2800" b="0">
+                <a:solidFill>
+                  <a:srgbClr val="9FE0C9"/>
+                </a:solidFill>
+                <a:latin typeface="Courier New"/>
+              </a:rPr>
+              <a:t>  name: 'John',</a:t>
+            </a:r>
+          </a:p>
+          <a:p>
+            <a:pPr algn="l">
+              <a:lnSpc>
+                <a:spcPts val="3200"/>
+              </a:lnSpc>
+            </a:pPr>
+            <a:r>
+              <a:rPr sz="2800" b="0">
+                <a:solidFill>
+                  <a:srgbClr val="9FE0C9"/>
+                </a:solidFill>
+                <a:latin typeface="Courier New"/>
+              </a:rPr>
+              <a:t>  age: 24,</a:t>
+            </a:r>
+          </a:p>
+          <a:p>
+            <a:pPr algn="l">
+              <a:lnSpc>
+                <a:spcPts val="3200"/>
+              </a:lnSpc>
+            </a:pPr>
+            <a:r>
+              <a:rPr sz="2800" b="0">
+                <a:solidFill>
+                  <a:srgbClr val="9FE0C9"/>
+                </a:solidFill>
+                <a:latin typeface="Courier New"/>
+              </a:rPr>
+              <a:t>  sex: 'male',</a:t>
+            </a:r>
+          </a:p>
+          <a:p>
+            <a:pPr algn="l">
+              <a:lnSpc>
+                <a:spcPts val="3200"/>
+              </a:lnSpc>
+            </a:pPr>
+            <a:r>
+              <a:rPr sz="2800" b="0">
+                <a:solidFill>
+                  <a:srgbClr val="9FE0C9"/>
+                </a:solidFill>
+                <a:latin typeface="Courier New"/>
+              </a:rPr>
+              <a:t>  location: 'Taytay',</a:t>
+            </a:r>
+          </a:p>
+          <a:p>
+            <a:pPr algn="l">
+              <a:lnSpc>
+                <a:spcPts val="3200"/>
+              </a:lnSpc>
+            </a:pPr>
+            <a:r>
+              <a:rPr sz="2800" b="0">
+                <a:solidFill>
+                  <a:srgbClr val="9FE0C9"/>
+                </a:solidFill>
+                <a:latin typeface="Courier New"/>
+              </a:rPr>
+              <a:t>  'favorite book': </a:t>
+            </a:r>
+            <a:r>
+              <a:rPr sz="2800" b="0" strike="sngStrike">
+                <a:solidFill>
+                  <a:srgbClr val="FFB4A8"/>
+                </a:solidFill>
+                <a:latin typeface="Courier New"/>
+              </a:rPr>
+              <a:t>'Green Eggs and Ham'</a:t>
+            </a:r>
+          </a:p>
+          <a:p>
+            <a:pPr algn="l">
+              <a:lnSpc>
+                <a:spcPts val="3200"/>
+              </a:lnSpc>
+            </a:pPr>
+            <a:r>
+              <a:rPr sz="2800" b="0">
+                <a:solidFill>
+                  <a:srgbClr val="9FE0C9"/>
+                </a:solidFill>
+                <a:latin typeface="Courier New"/>
+              </a:rPr>
+              <a:t>}</a:t>
+            </a:r>
+          </a:p>
+        </p:txBody>
+      </p:sp>
+      <p:sp>
+        <p:nvSpPr>
+          <p:cNvPr id="6" name="TextBox 5"/>
+          <p:cNvSpPr txBox="1"/>
+          <p:nvPr/>
+        </p:nvSpPr>
+        <p:spPr>
+          <a:xfrm>
+            <a:off x="411480" y="5696712"/>
+            <a:ext cx="11368735" cy="566928"/>
+          </a:xfrm>
+          <a:prstGeom prst="rect">
+            <a:avLst/>
+          </a:prstGeom>
+          <a:noFill/>
+        </p:spPr>
+        <p:txBody>
+          <a:bodyPr wrap="square" anchor="ctr" lIns="164592" rIns="164592" tIns="164592" bIns="164592">
+            <a:spAutoFit/>
+          </a:bodyPr>
+          <a:lstStyle/>
+          <a:p>
+            <a:pPr algn="r">
+              <a:lnSpc>
                 <a:spcPct val="100000"/>
               </a:lnSpc>
             </a:pPr>
             <a:r>
-              <a:rPr sz="2800" b="1">
-                <a:solidFill>
-                  <a:srgbClr val="F2B27A"/>
-                </a:solidFill>
-                <a:latin typeface="Arial"/>
-              </a:rPr>
-              <a:t>1  BEFORE</a:t>
-            </a:r>
-          </a:p>
-          <a:p>
-            <a:pPr algn="l">
-              <a:lnSpc>
-                <a:spcPct val="100000"/>
-              </a:lnSpc>
-            </a:pPr>
-            <a:r>
               <a:rPr sz="2800" b="0">
                 <a:solidFill>
-                  <a:srgbClr val="8FA3B8"/>
-                </a:solidFill>
-                <a:latin typeface="Courier New"/>
-              </a:rPr>
-              <a:t>db.users.findOne({"name" : "John"}, {"_id" : 0})</a:t>
-            </a:r>
-          </a:p>
-          <a:p>
-            <a:pPr algn="l">
-              <a:lnSpc>
-                <a:spcPct val="100000"/>
-              </a:lnSpc>
-            </a:pPr>
-            <a:r>
-              <a:rPr sz="2800" b="0">
-                <a:solidFill>
-                  <a:srgbClr val="9FE0C9"/>
-                </a:solidFill>
-                <a:latin typeface="Courier New"/>
-              </a:rPr>
-              <a:t>{</a:t>
-            </a:r>
-          </a:p>
-          <a:p>
-            <a:pPr algn="l">
-              <a:lnSpc>
-                <a:spcPct val="100000"/>
-              </a:lnSpc>
-            </a:pPr>
-            <a:r>
-              <a:rPr sz="2800" b="0">
-                <a:solidFill>
-                  <a:srgbClr val="9FE0C9"/>
-                </a:solidFill>
-                <a:latin typeface="Courier New"/>
-              </a:rPr>
-              <a:t>  name: 'John',</a:t>
-            </a:r>
-          </a:p>
-          <a:p>
-            <a:pPr algn="l">
-              <a:lnSpc>
-                <a:spcPct val="100000"/>
-              </a:lnSpc>
-            </a:pPr>
-            <a:r>
-              <a:rPr sz="2800" b="0">
-                <a:solidFill>
-                  <a:srgbClr val="9FE0C9"/>
-                </a:solidFill>
-                <a:latin typeface="Courier New"/>
-              </a:rPr>
-              <a:t>  age: 24,</a:t>
-            </a:r>
-          </a:p>
-          <a:p>
-            <a:pPr algn="l">
-              <a:lnSpc>
-                <a:spcPct val="100000"/>
-              </a:lnSpc>
-            </a:pPr>
-            <a:r>
-              <a:rPr sz="2800" b="0">
-                <a:solidFill>
-                  <a:srgbClr val="9FE0C9"/>
-                </a:solidFill>
-                <a:latin typeface="Courier New"/>
-              </a:rPr>
-              <a:t>  sex: 'male',</a:t>
-            </a:r>
-          </a:p>
-          <a:p>
-            <a:pPr algn="l">
-              <a:lnSpc>
-                <a:spcPct val="100000"/>
-              </a:lnSpc>
-            </a:pPr>
-            <a:r>
-              <a:rPr sz="2800" b="0">
-                <a:solidFill>
-                  <a:srgbClr val="9FE0C9"/>
-                </a:solidFill>
-                <a:latin typeface="Courier New"/>
-              </a:rPr>
-              <a:t>  location: 'Taytay',</a:t>
-            </a:r>
-          </a:p>
-          <a:p>
-            <a:pPr algn="l">
-              <a:lnSpc>
-                <a:spcPct val="100000"/>
-              </a:lnSpc>
-            </a:pPr>
-            <a:r>
-              <a:rPr sz="2800" b="0">
-                <a:solidFill>
-                  <a:srgbClr val="9FE0C9"/>
-                </a:solidFill>
-                <a:latin typeface="Courier New"/>
-              </a:rPr>
-              <a:t>  'favorite book': </a:t>
-            </a:r>
-            <a:r>
-              <a:rPr sz="2800" b="0" strike="sngStrike">
-                <a:solidFill>
-                  <a:srgbClr val="FFB4A8"/>
-                </a:solidFill>
-                <a:latin typeface="Courier New"/>
-              </a:rPr>
-              <a:t>'Green Eggs and Ham'</a:t>
-            </a:r>
-          </a:p>
-          <a:p>
-            <a:pPr algn="l">
-              <a:lnSpc>
-                <a:spcPct val="100000"/>
-              </a:lnSpc>
-            </a:pPr>
-            <a:r>
-              <a:rPr sz="2800" b="0">
-                <a:solidFill>
-                  <a:srgbClr val="9FE0C9"/>
-                </a:solidFill>
-                <a:latin typeface="Courier New"/>
-              </a:rPr>
-              <a:t>}</a:t>
-            </a:r>
-          </a:p>
-        </p:txBody>
-      </p:sp>
-      <p:sp>
-        <p:nvSpPr>
-          <p:cNvPr id="6" name="EXEMPT_FOOTER"/>
+                  <a:srgbClr val="4A5868"/>
+                </a:solidFill>
+                <a:latin typeface="Arial"/>
+              </a:rPr>
+              <a:t>Next: 2  COMMAND → REPLY  →</a:t>
+            </a:r>
+          </a:p>
+        </p:txBody>
+      </p:sp>
+      <p:sp>
+        <p:nvSpPr>
+          <p:cNvPr id="7" name="EXEMPT_FOOTER"/>
           <p:cNvSpPr txBox="1"/>
           <p:nvPr/>
         </p:nvSpPr>
@@ -18058,7 +18253,7 @@
       </p:sp>
       <p:sp>
         <p:nvSpPr>
-          <p:cNvPr id="7" name="EXEMPT_FOOTER"/>
+          <p:cNvPr id="8" name="EXEMPT_FOOTER"/>
           <p:cNvSpPr txBox="1"/>
           <p:nvPr/>
         </p:nvSpPr>
@@ -18097,7 +18292,7 @@
       </p:sp>
       <p:sp>
         <p:nvSpPr>
-          <p:cNvPr id="8" name="EXEMPT_PROGRESS"/>
+          <p:cNvPr id="9" name="EXEMPT_PROGRESS"/>
           <p:cNvSpPr txBox="1"/>
           <p:nvPr/>
         </p:nvSpPr>
@@ -18252,7 +18447,7 @@
         <p:spPr>
           <a:xfrm>
             <a:off x="411480" y="1097280"/>
-            <a:ext cx="11368735" cy="3474720"/>
+            <a:ext cx="11368735" cy="3434080"/>
           </a:xfrm>
           <a:prstGeom prst="rect">
             <a:avLst/>
@@ -18296,7 +18491,7 @@
         <p:spPr>
           <a:xfrm>
             <a:off x="557784" y="1188720"/>
-            <a:ext cx="11149279" cy="3364992"/>
+            <a:ext cx="11149279" cy="3324352"/>
           </a:xfrm>
           <a:prstGeom prst="rect">
             <a:avLst/>
@@ -18311,136 +18506,175 @@
           <a:p>
             <a:pPr algn="l">
               <a:lnSpc>
+                <a:spcPts val="3200"/>
+              </a:lnSpc>
+            </a:pPr>
+            <a:r>
+              <a:rPr sz="2800" b="1">
+                <a:solidFill>
+                  <a:srgbClr val="F2B27A"/>
+                </a:solidFill>
+                <a:latin typeface="Arial"/>
+              </a:rPr>
+              <a:t>2  COMMAND → REPLY</a:t>
+            </a:r>
+          </a:p>
+          <a:p>
+            <a:pPr algn="l">
+              <a:lnSpc>
+                <a:spcPts val="3200"/>
+              </a:lnSpc>
+            </a:pPr>
+            <a:r>
+              <a:rPr sz="2800" b="0">
+                <a:solidFill>
+                  <a:srgbClr val="E6ECF2"/>
+                </a:solidFill>
+                <a:latin typeface="Courier New"/>
+              </a:rPr>
+              <a:t>db.users.updateOne({"name" : "John"},</a:t>
+            </a:r>
+          </a:p>
+          <a:p>
+            <a:pPr algn="l">
+              <a:lnSpc>
+                <a:spcPts val="3200"/>
+              </a:lnSpc>
+            </a:pPr>
+            <a:r>
+              <a:rPr sz="2800" b="0">
+                <a:solidFill>
+                  <a:srgbClr val="E6ECF2"/>
+                </a:solidFill>
+                <a:latin typeface="Courier New"/>
+              </a:rPr>
+              <a:t>  {"$set" : {"favorite book" :</a:t>
+            </a:r>
+          </a:p>
+          <a:p>
+            <a:pPr algn="l">
+              <a:lnSpc>
+                <a:spcPts val="3200"/>
+              </a:lnSpc>
+            </a:pPr>
+            <a:r>
+              <a:rPr sz="2800" b="0">
+                <a:solidFill>
+                  <a:srgbClr val="E6ECF2"/>
+                </a:solidFill>
+                <a:latin typeface="Courier New"/>
+              </a:rPr>
+              <a:t>  ["Cat's Cradle", "Foundation Trilogy",</a:t>
+            </a:r>
+          </a:p>
+          <a:p>
+            <a:pPr algn="l">
+              <a:lnSpc>
+                <a:spcPts val="3200"/>
+              </a:lnSpc>
+            </a:pPr>
+            <a:r>
+              <a:rPr sz="2800" b="0">
+                <a:solidFill>
+                  <a:srgbClr val="E6ECF2"/>
+                </a:solidFill>
+                <a:latin typeface="Courier New"/>
+              </a:rPr>
+              <a:t>   "Ender's Game"]}})</a:t>
+            </a:r>
+          </a:p>
+          <a:p>
+            <a:pPr algn="l">
+              <a:lnSpc>
+                <a:spcPts val="3200"/>
+              </a:lnSpc>
+            </a:pPr>
+            <a:r>
+              <a:rPr sz="2800" b="0">
+                <a:solidFill>
+                  <a:srgbClr val="9FE0C9"/>
+                </a:solidFill>
+                <a:latin typeface="Courier New"/>
+              </a:rPr>
+              <a:t>{ acknowledged: true, insertedId: null,</a:t>
+            </a:r>
+          </a:p>
+          <a:p>
+            <a:pPr algn="l">
+              <a:lnSpc>
+                <a:spcPts val="3200"/>
+              </a:lnSpc>
+            </a:pPr>
+            <a:r>
+              <a:rPr sz="2800" b="0">
+                <a:solidFill>
+                  <a:srgbClr val="9FE0C9"/>
+                </a:solidFill>
+                <a:latin typeface="Courier New"/>
+              </a:rPr>
+              <a:t>  matchedCount: 1, modifiedCount: 1,</a:t>
+            </a:r>
+          </a:p>
+          <a:p>
+            <a:pPr algn="l">
+              <a:lnSpc>
+                <a:spcPts val="3200"/>
+              </a:lnSpc>
+            </a:pPr>
+            <a:r>
+              <a:rPr sz="2800" b="0">
+                <a:solidFill>
+                  <a:srgbClr val="9FE0C9"/>
+                </a:solidFill>
+                <a:latin typeface="Courier New"/>
+              </a:rPr>
+              <a:t>  upsertedCount: 0 }</a:t>
+            </a:r>
+          </a:p>
+        </p:txBody>
+      </p:sp>
+      <p:sp>
+        <p:nvSpPr>
+          <p:cNvPr id="6" name="TextBox 5"/>
+          <p:cNvSpPr txBox="1"/>
+          <p:nvPr/>
+        </p:nvSpPr>
+        <p:spPr>
+          <a:xfrm>
+            <a:off x="411480" y="5696712"/>
+            <a:ext cx="11368735" cy="566928"/>
+          </a:xfrm>
+          <a:prstGeom prst="rect">
+            <a:avLst/>
+          </a:prstGeom>
+          <a:noFill/>
+        </p:spPr>
+        <p:txBody>
+          <a:bodyPr wrap="square" anchor="ctr" lIns="164592" rIns="164592" tIns="164592" bIns="164592">
+            <a:spAutoFit/>
+          </a:bodyPr>
+          <a:lstStyle/>
+          <a:p>
+            <a:pPr algn="r">
+              <a:lnSpc>
                 <a:spcPct val="100000"/>
               </a:lnSpc>
             </a:pPr>
             <a:r>
-              <a:rPr sz="2800" b="1">
-                <a:solidFill>
-                  <a:srgbClr val="F2B27A"/>
-                </a:solidFill>
-                <a:latin typeface="Arial"/>
-              </a:rPr>
-              <a:t>2  COMMAND → REPLY</a:t>
-            </a:r>
-          </a:p>
-          <a:p>
-            <a:pPr algn="l">
-              <a:lnSpc>
-                <a:spcPct val="100000"/>
-              </a:lnSpc>
-            </a:pPr>
-            <a:r>
               <a:rPr sz="2800" b="0">
                 <a:solidFill>
-                  <a:srgbClr val="E6ECF2"/>
-                </a:solidFill>
-                <a:latin typeface="Courier New"/>
-              </a:rPr>
-              <a:t>db.users.updateOne({"name" : "John"},</a:t>
-            </a:r>
-          </a:p>
-          <a:p>
-            <a:pPr algn="l">
-              <a:lnSpc>
-                <a:spcPct val="100000"/>
-              </a:lnSpc>
-            </a:pPr>
-            <a:r>
-              <a:rPr sz="2800" b="0">
-                <a:solidFill>
-                  <a:srgbClr val="E6ECF2"/>
-                </a:solidFill>
-                <a:latin typeface="Courier New"/>
-              </a:rPr>
-              <a:t>  {"$set" : {"favorite book" :</a:t>
-            </a:r>
-          </a:p>
-          <a:p>
-            <a:pPr algn="l">
-              <a:lnSpc>
-                <a:spcPct val="100000"/>
-              </a:lnSpc>
-            </a:pPr>
-            <a:r>
-              <a:rPr sz="2800" b="0">
-                <a:solidFill>
-                  <a:srgbClr val="E6ECF2"/>
-                </a:solidFill>
-                <a:latin typeface="Courier New"/>
-              </a:rPr>
-              <a:t>  ["Cat's Cradle", "Foundation Trilogy",</a:t>
-            </a:r>
-          </a:p>
-          <a:p>
-            <a:pPr algn="l">
-              <a:lnSpc>
-                <a:spcPct val="100000"/>
-              </a:lnSpc>
-            </a:pPr>
-            <a:r>
-              <a:rPr sz="2800" b="0">
-                <a:solidFill>
-                  <a:srgbClr val="E6ECF2"/>
-                </a:solidFill>
-                <a:latin typeface="Courier New"/>
-              </a:rPr>
-              <a:t>   "Ender's Game"]}})</a:t>
-            </a:r>
-          </a:p>
-          <a:p>
-            <a:pPr algn="l">
-              <a:lnSpc>
-                <a:spcPct val="100000"/>
-              </a:lnSpc>
-            </a:pPr>
-            <a:r>
-              <a:rPr sz="2800" b="0">
-                <a:solidFill>
-                  <a:srgbClr val="9FE0C9"/>
-                </a:solidFill>
-                <a:latin typeface="Courier New"/>
-              </a:rPr>
-              <a:t>{ acknowledged: true, insertedId: null,</a:t>
-            </a:r>
-          </a:p>
-          <a:p>
-            <a:pPr algn="l">
-              <a:lnSpc>
-                <a:spcPct val="100000"/>
-              </a:lnSpc>
-            </a:pPr>
-            <a:r>
-              <a:rPr sz="2800" b="0">
-                <a:solidFill>
-                  <a:srgbClr val="9FE0C9"/>
-                </a:solidFill>
-                <a:latin typeface="Courier New"/>
-              </a:rPr>
-              <a:t>  matchedCount: 1, modifiedCount: 1,</a:t>
-            </a:r>
-          </a:p>
-          <a:p>
-            <a:pPr algn="l">
-              <a:lnSpc>
-                <a:spcPct val="100000"/>
-              </a:lnSpc>
-            </a:pPr>
-            <a:r>
-              <a:rPr sz="2800" b="0">
-                <a:solidFill>
-                  <a:srgbClr val="9FE0C9"/>
-                </a:solidFill>
-                <a:latin typeface="Courier New"/>
-              </a:rPr>
-              <a:t>  upsertedCount: 0 }</a:t>
-            </a:r>
-          </a:p>
-        </p:txBody>
-      </p:sp>
-      <p:sp>
-        <p:nvSpPr>
-          <p:cNvPr id="6" name="EXEMPT_FOOTER"/>
+                  <a:srgbClr val="4A5868"/>
+                </a:solidFill>
+                <a:latin typeface="Arial"/>
+              </a:rPr>
+              <a:t>Next: 3  AFTER  →</a:t>
+            </a:r>
+          </a:p>
+        </p:txBody>
+      </p:sp>
+      <p:sp>
+        <p:nvSpPr>
+          <p:cNvPr id="7" name="EXEMPT_FOOTER"/>
           <p:cNvSpPr txBox="1"/>
           <p:nvPr/>
         </p:nvSpPr>
@@ -18479,7 +18713,7 @@
       </p:sp>
       <p:sp>
         <p:nvSpPr>
-          <p:cNvPr id="7" name="EXEMPT_FOOTER"/>
+          <p:cNvPr id="8" name="EXEMPT_FOOTER"/>
           <p:cNvSpPr txBox="1"/>
           <p:nvPr/>
         </p:nvSpPr>
@@ -18518,7 +18752,7 @@
       </p:sp>
       <p:sp>
         <p:nvSpPr>
-          <p:cNvPr id="8" name="EXEMPT_PROGRESS"/>
+          <p:cNvPr id="9" name="EXEMPT_PROGRESS"/>
           <p:cNvSpPr txBox="1"/>
           <p:nvPr/>
         </p:nvSpPr>
@@ -18673,7 +18907,7 @@
         <p:spPr>
           <a:xfrm>
             <a:off x="411480" y="1097280"/>
-            <a:ext cx="11368735" cy="4297680"/>
+            <a:ext cx="11368735" cy="4246880"/>
           </a:xfrm>
           <a:prstGeom prst="rect">
             <a:avLst/>
@@ -18717,7 +18951,7 @@
         <p:spPr>
           <a:xfrm>
             <a:off x="557784" y="1188720"/>
-            <a:ext cx="11149279" cy="4187952"/>
+            <a:ext cx="11149279" cy="4137152"/>
           </a:xfrm>
           <a:prstGeom prst="rect">
             <a:avLst/>
@@ -18732,7 +18966,7 @@
           <a:p>
             <a:pPr algn="l">
               <a:lnSpc>
-                <a:spcPct val="100000"/>
+                <a:spcPts val="3200"/>
               </a:lnSpc>
             </a:pPr>
             <a:r>
@@ -18748,7 +18982,7 @@
           <a:p>
             <a:pPr algn="l">
               <a:lnSpc>
-                <a:spcPct val="100000"/>
+                <a:spcPts val="3200"/>
               </a:lnSpc>
             </a:pPr>
             <a:r>
@@ -18764,7 +18998,7 @@
           <a:p>
             <a:pPr algn="l">
               <a:lnSpc>
-                <a:spcPct val="100000"/>
+                <a:spcPts val="3200"/>
               </a:lnSpc>
             </a:pPr>
             <a:r>
@@ -18780,7 +19014,7 @@
           <a:p>
             <a:pPr algn="l">
               <a:lnSpc>
-                <a:spcPct val="100000"/>
+                <a:spcPts val="3200"/>
               </a:lnSpc>
             </a:pPr>
             <a:r>
@@ -18796,7 +19030,7 @@
           <a:p>
             <a:pPr algn="l">
               <a:lnSpc>
-                <a:spcPct val="100000"/>
+                <a:spcPts val="3200"/>
               </a:lnSpc>
             </a:pPr>
             <a:r>
@@ -18812,7 +19046,7 @@
           <a:p>
             <a:pPr algn="l">
               <a:lnSpc>
-                <a:spcPct val="100000"/>
+                <a:spcPts val="3200"/>
               </a:lnSpc>
             </a:pPr>
             <a:r>
@@ -18828,7 +19062,7 @@
           <a:p>
             <a:pPr algn="l">
               <a:lnSpc>
-                <a:spcPct val="100000"/>
+                <a:spcPts val="3200"/>
               </a:lnSpc>
             </a:pPr>
             <a:r>
@@ -18844,7 +19078,7 @@
           <a:p>
             <a:pPr algn="l">
               <a:lnSpc>
-                <a:spcPct val="100000"/>
+                <a:spcPts val="3200"/>
               </a:lnSpc>
             </a:pPr>
             <a:r>
@@ -18878,7 +19112,7 @@
           <a:p>
             <a:pPr algn="l">
               <a:lnSpc>
-                <a:spcPct val="100000"/>
+                <a:spcPts val="3200"/>
               </a:lnSpc>
             </a:pPr>
             <a:r>
@@ -18930,7 +19164,7 @@
           <a:p>
             <a:pPr algn="l">
               <a:lnSpc>
-                <a:spcPct val="100000"/>
+                <a:spcPts val="3200"/>
               </a:lnSpc>
             </a:pPr>
             <a:r>
@@ -19237,7 +19471,7 @@
         <p:spPr>
           <a:xfrm>
             <a:off x="411480" y="1097280"/>
-            <a:ext cx="11368735" cy="4297680"/>
+            <a:ext cx="11368735" cy="4246880"/>
           </a:xfrm>
           <a:prstGeom prst="rect">
             <a:avLst/>
@@ -19281,7 +19515,7 @@
         <p:spPr>
           <a:xfrm>
             <a:off x="557784" y="1188720"/>
-            <a:ext cx="11149279" cy="4187952"/>
+            <a:ext cx="11149279" cy="4137152"/>
           </a:xfrm>
           <a:prstGeom prst="rect">
             <a:avLst/>
@@ -19296,240 +19530,279 @@
           <a:p>
             <a:pPr algn="l">
               <a:lnSpc>
+                <a:spcPts val="3200"/>
+              </a:lnSpc>
+            </a:pPr>
+            <a:r>
+              <a:rPr sz="2800" b="1">
+                <a:solidFill>
+                  <a:srgbClr val="F2B27A"/>
+                </a:solidFill>
+                <a:latin typeface="Arial"/>
+              </a:rPr>
+              <a:t>1  BEFORE</a:t>
+            </a:r>
+          </a:p>
+          <a:p>
+            <a:pPr algn="l">
+              <a:lnSpc>
+                <a:spcPts val="3200"/>
+              </a:lnSpc>
+            </a:pPr>
+            <a:r>
+              <a:rPr sz="2800" b="0">
+                <a:solidFill>
+                  <a:srgbClr val="8FA3B8"/>
+                </a:solidFill>
+                <a:latin typeface="Courier New"/>
+              </a:rPr>
+              <a:t>db.users.findOne({"name" : "John"}, {"_id" : 0})</a:t>
+            </a:r>
+          </a:p>
+          <a:p>
+            <a:pPr algn="l">
+              <a:lnSpc>
+                <a:spcPts val="3200"/>
+              </a:lnSpc>
+            </a:pPr>
+            <a:r>
+              <a:rPr sz="2800" b="0">
+                <a:solidFill>
+                  <a:srgbClr val="9FE0C9"/>
+                </a:solidFill>
+                <a:latin typeface="Courier New"/>
+              </a:rPr>
+              <a:t>{</a:t>
+            </a:r>
+          </a:p>
+          <a:p>
+            <a:pPr algn="l">
+              <a:lnSpc>
+                <a:spcPts val="3200"/>
+              </a:lnSpc>
+            </a:pPr>
+            <a:r>
+              <a:rPr sz="2800" b="0">
+                <a:solidFill>
+                  <a:srgbClr val="9FE0C9"/>
+                </a:solidFill>
+                <a:latin typeface="Courier New"/>
+              </a:rPr>
+              <a:t>  name: 'John',</a:t>
+            </a:r>
+          </a:p>
+          <a:p>
+            <a:pPr algn="l">
+              <a:lnSpc>
+                <a:spcPts val="3200"/>
+              </a:lnSpc>
+            </a:pPr>
+            <a:r>
+              <a:rPr sz="2800" b="0">
+                <a:solidFill>
+                  <a:srgbClr val="9FE0C9"/>
+                </a:solidFill>
+                <a:latin typeface="Courier New"/>
+              </a:rPr>
+              <a:t>  age: 24,</a:t>
+            </a:r>
+          </a:p>
+          <a:p>
+            <a:pPr algn="l">
+              <a:lnSpc>
+                <a:spcPts val="3200"/>
+              </a:lnSpc>
+            </a:pPr>
+            <a:r>
+              <a:rPr sz="2800" b="0">
+                <a:solidFill>
+                  <a:srgbClr val="9FE0C9"/>
+                </a:solidFill>
+                <a:latin typeface="Courier New"/>
+              </a:rPr>
+              <a:t>  sex: 'male',</a:t>
+            </a:r>
+          </a:p>
+          <a:p>
+            <a:pPr algn="l">
+              <a:lnSpc>
+                <a:spcPts val="3200"/>
+              </a:lnSpc>
+            </a:pPr>
+            <a:r>
+              <a:rPr sz="2800" b="0">
+                <a:solidFill>
+                  <a:srgbClr val="9FE0C9"/>
+                </a:solidFill>
+                <a:latin typeface="Courier New"/>
+              </a:rPr>
+              <a:t>  location: 'Taytay',</a:t>
+            </a:r>
+          </a:p>
+          <a:p>
+            <a:pPr algn="l">
+              <a:lnSpc>
+                <a:spcPts val="3200"/>
+              </a:lnSpc>
+            </a:pPr>
+            <a:r>
+              <a:rPr sz="2800" b="0">
+                <a:solidFill>
+                  <a:srgbClr val="9FE0C9"/>
+                </a:solidFill>
+                <a:latin typeface="Courier New"/>
+              </a:rPr>
+              <a:t>  </a:t>
+            </a:r>
+            <a:r>
+              <a:rPr sz="2800" b="0" strike="sngStrike">
+                <a:solidFill>
+                  <a:srgbClr val="FFB4A8"/>
+                </a:solidFill>
+                <a:latin typeface="Courier New"/>
+              </a:rPr>
+              <a:t>'favorite book'</a:t>
+            </a:r>
+            <a:r>
+              <a:rPr sz="2800" b="0">
+                <a:solidFill>
+                  <a:srgbClr val="9FE0C9"/>
+                </a:solidFill>
+                <a:latin typeface="Courier New"/>
+              </a:rPr>
+              <a:t>: [ </a:t>
+            </a:r>
+            <a:r>
+              <a:rPr sz="2800" b="0" strike="sngStrike">
+                <a:solidFill>
+                  <a:srgbClr val="FFB4A8"/>
+                </a:solidFill>
+                <a:latin typeface="Courier New"/>
+              </a:rPr>
+              <a:t>"Cat's Cradle"</a:t>
+            </a:r>
+            <a:r>
+              <a:rPr sz="2800" b="0">
+                <a:solidFill>
+                  <a:srgbClr val="9FE0C9"/>
+                </a:solidFill>
+                <a:latin typeface="Courier New"/>
+              </a:rPr>
+              <a:t>,</a:t>
+            </a:r>
+          </a:p>
+          <a:p>
+            <a:pPr algn="l">
+              <a:lnSpc>
+                <a:spcPts val="3200"/>
+              </a:lnSpc>
+            </a:pPr>
+            <a:r>
+              <a:rPr sz="2800" b="0">
+                <a:solidFill>
+                  <a:srgbClr val="9FE0C9"/>
+                </a:solidFill>
+                <a:latin typeface="Courier New"/>
+              </a:rPr>
+              <a:t>    </a:t>
+            </a:r>
+            <a:r>
+              <a:rPr sz="2800" b="0" strike="sngStrike">
+                <a:solidFill>
+                  <a:srgbClr val="FFB4A8"/>
+                </a:solidFill>
+                <a:latin typeface="Courier New"/>
+              </a:rPr>
+              <a:t>'Foundation Trilogy'</a:t>
+            </a:r>
+            <a:r>
+              <a:rPr sz="2800" b="0">
+                <a:solidFill>
+                  <a:srgbClr val="9FE0C9"/>
+                </a:solidFill>
+                <a:latin typeface="Courier New"/>
+              </a:rPr>
+              <a:t>, </a:t>
+            </a:r>
+            <a:r>
+              <a:rPr sz="2800" b="0" strike="sngStrike">
+                <a:solidFill>
+                  <a:srgbClr val="FFB4A8"/>
+                </a:solidFill>
+                <a:latin typeface="Courier New"/>
+              </a:rPr>
+              <a:t>"Ender's Game"</a:t>
+            </a:r>
+            <a:r>
+              <a:rPr sz="2800" b="0">
+                <a:solidFill>
+                  <a:srgbClr val="9FE0C9"/>
+                </a:solidFill>
+                <a:latin typeface="Courier New"/>
+              </a:rPr>
+              <a:t> ]</a:t>
+            </a:r>
+          </a:p>
+          <a:p>
+            <a:pPr algn="l">
+              <a:lnSpc>
+                <a:spcPts val="3200"/>
+              </a:lnSpc>
+            </a:pPr>
+            <a:r>
+              <a:rPr sz="2800" b="0">
+                <a:solidFill>
+                  <a:srgbClr val="9FE0C9"/>
+                </a:solidFill>
+                <a:latin typeface="Courier New"/>
+              </a:rPr>
+              <a:t>}</a:t>
+            </a:r>
+          </a:p>
+        </p:txBody>
+      </p:sp>
+      <p:sp>
+        <p:nvSpPr>
+          <p:cNvPr id="6" name="TextBox 5"/>
+          <p:cNvSpPr txBox="1"/>
+          <p:nvPr/>
+        </p:nvSpPr>
+        <p:spPr>
+          <a:xfrm>
+            <a:off x="411480" y="5696712"/>
+            <a:ext cx="11368735" cy="566928"/>
+          </a:xfrm>
+          <a:prstGeom prst="rect">
+            <a:avLst/>
+          </a:prstGeom>
+          <a:noFill/>
+        </p:spPr>
+        <p:txBody>
+          <a:bodyPr wrap="square" anchor="ctr" lIns="164592" rIns="164592" tIns="164592" bIns="164592">
+            <a:spAutoFit/>
+          </a:bodyPr>
+          <a:lstStyle/>
+          <a:p>
+            <a:pPr algn="r">
+              <a:lnSpc>
                 <a:spcPct val="100000"/>
               </a:lnSpc>
             </a:pPr>
             <a:r>
-              <a:rPr sz="2800" b="1">
-                <a:solidFill>
-                  <a:srgbClr val="F2B27A"/>
-                </a:solidFill>
-                <a:latin typeface="Arial"/>
-              </a:rPr>
-              <a:t>1  BEFORE</a:t>
-            </a:r>
-          </a:p>
-          <a:p>
-            <a:pPr algn="l">
-              <a:lnSpc>
-                <a:spcPct val="100000"/>
-              </a:lnSpc>
-            </a:pPr>
-            <a:r>
               <a:rPr sz="2800" b="0">
                 <a:solidFill>
-                  <a:srgbClr val="8FA3B8"/>
-                </a:solidFill>
-                <a:latin typeface="Courier New"/>
-              </a:rPr>
-              <a:t>db.users.findOne({"name" : "John"}, {"_id" : 0})</a:t>
-            </a:r>
-          </a:p>
-          <a:p>
-            <a:pPr algn="l">
-              <a:lnSpc>
-                <a:spcPct val="100000"/>
-              </a:lnSpc>
-            </a:pPr>
-            <a:r>
-              <a:rPr sz="2800" b="0">
-                <a:solidFill>
-                  <a:srgbClr val="9FE0C9"/>
-                </a:solidFill>
-                <a:latin typeface="Courier New"/>
-              </a:rPr>
-              <a:t>{</a:t>
-            </a:r>
-          </a:p>
-          <a:p>
-            <a:pPr algn="l">
-              <a:lnSpc>
-                <a:spcPct val="100000"/>
-              </a:lnSpc>
-            </a:pPr>
-            <a:r>
-              <a:rPr sz="2800" b="0">
-                <a:solidFill>
-                  <a:srgbClr val="9FE0C9"/>
-                </a:solidFill>
-                <a:latin typeface="Courier New"/>
-              </a:rPr>
-              <a:t>  name: 'John',</a:t>
-            </a:r>
-          </a:p>
-          <a:p>
-            <a:pPr algn="l">
-              <a:lnSpc>
-                <a:spcPct val="100000"/>
-              </a:lnSpc>
-            </a:pPr>
-            <a:r>
-              <a:rPr sz="2800" b="0">
-                <a:solidFill>
-                  <a:srgbClr val="9FE0C9"/>
-                </a:solidFill>
-                <a:latin typeface="Courier New"/>
-              </a:rPr>
-              <a:t>  age: 24,</a:t>
-            </a:r>
-          </a:p>
-          <a:p>
-            <a:pPr algn="l">
-              <a:lnSpc>
-                <a:spcPct val="100000"/>
-              </a:lnSpc>
-            </a:pPr>
-            <a:r>
-              <a:rPr sz="2800" b="0">
-                <a:solidFill>
-                  <a:srgbClr val="9FE0C9"/>
-                </a:solidFill>
-                <a:latin typeface="Courier New"/>
-              </a:rPr>
-              <a:t>  sex: 'male',</a:t>
-            </a:r>
-          </a:p>
-          <a:p>
-            <a:pPr algn="l">
-              <a:lnSpc>
-                <a:spcPct val="100000"/>
-              </a:lnSpc>
-            </a:pPr>
-            <a:r>
-              <a:rPr sz="2800" b="0">
-                <a:solidFill>
-                  <a:srgbClr val="9FE0C9"/>
-                </a:solidFill>
-                <a:latin typeface="Courier New"/>
-              </a:rPr>
-              <a:t>  location: 'Taytay',</a:t>
-            </a:r>
-          </a:p>
-          <a:p>
-            <a:pPr algn="l">
-              <a:lnSpc>
-                <a:spcPct val="100000"/>
-              </a:lnSpc>
-            </a:pPr>
-            <a:r>
-              <a:rPr sz="2800" b="0">
-                <a:solidFill>
-                  <a:srgbClr val="9FE0C9"/>
-                </a:solidFill>
-                <a:latin typeface="Courier New"/>
-              </a:rPr>
-              <a:t>  </a:t>
-            </a:r>
-            <a:r>
-              <a:rPr sz="2800" b="0" strike="sngStrike">
-                <a:solidFill>
-                  <a:srgbClr val="FFB4A8"/>
-                </a:solidFill>
-                <a:latin typeface="Courier New"/>
-              </a:rPr>
-              <a:t>'favorite book'</a:t>
-            </a:r>
-            <a:r>
-              <a:rPr sz="2800" b="0">
-                <a:solidFill>
-                  <a:srgbClr val="9FE0C9"/>
-                </a:solidFill>
-                <a:latin typeface="Courier New"/>
-              </a:rPr>
-              <a:t>: [ </a:t>
-            </a:r>
-            <a:r>
-              <a:rPr sz="2800" b="0" strike="sngStrike">
-                <a:solidFill>
-                  <a:srgbClr val="FFB4A8"/>
-                </a:solidFill>
-                <a:latin typeface="Courier New"/>
-              </a:rPr>
-              <a:t>"Cat's Cradle"</a:t>
-            </a:r>
-            <a:r>
-              <a:rPr sz="2800" b="0">
-                <a:solidFill>
-                  <a:srgbClr val="9FE0C9"/>
-                </a:solidFill>
-                <a:latin typeface="Courier New"/>
-              </a:rPr>
-              <a:t>,</a:t>
-            </a:r>
-          </a:p>
-          <a:p>
-            <a:pPr algn="l">
-              <a:lnSpc>
-                <a:spcPct val="100000"/>
-              </a:lnSpc>
-            </a:pPr>
-            <a:r>
-              <a:rPr sz="2800" b="0">
-                <a:solidFill>
-                  <a:srgbClr val="9FE0C9"/>
-                </a:solidFill>
-                <a:latin typeface="Courier New"/>
-              </a:rPr>
-              <a:t>    </a:t>
-            </a:r>
-            <a:r>
-              <a:rPr sz="2800" b="0" strike="sngStrike">
-                <a:solidFill>
-                  <a:srgbClr val="FFB4A8"/>
-                </a:solidFill>
-                <a:latin typeface="Courier New"/>
-              </a:rPr>
-              <a:t>'Foundation Trilogy'</a:t>
-            </a:r>
-            <a:r>
-              <a:rPr sz="2800" b="0">
-                <a:solidFill>
-                  <a:srgbClr val="9FE0C9"/>
-                </a:solidFill>
-                <a:latin typeface="Courier New"/>
-              </a:rPr>
-              <a:t>, </a:t>
-            </a:r>
-            <a:r>
-              <a:rPr sz="2800" b="0" strike="sngStrike">
-                <a:solidFill>
-                  <a:srgbClr val="FFB4A8"/>
-                </a:solidFill>
-                <a:latin typeface="Courier New"/>
-              </a:rPr>
-              <a:t>"Ender's Game"</a:t>
-            </a:r>
-            <a:r>
-              <a:rPr sz="2800" b="0">
-                <a:solidFill>
-                  <a:srgbClr val="9FE0C9"/>
-                </a:solidFill>
-                <a:latin typeface="Courier New"/>
-              </a:rPr>
-              <a:t> ]</a:t>
-            </a:r>
-          </a:p>
-          <a:p>
-            <a:pPr algn="l">
-              <a:lnSpc>
-                <a:spcPct val="100000"/>
-              </a:lnSpc>
-            </a:pPr>
-            <a:r>
-              <a:rPr sz="2800" b="0">
-                <a:solidFill>
-                  <a:srgbClr val="9FE0C9"/>
-                </a:solidFill>
-                <a:latin typeface="Courier New"/>
-              </a:rPr>
-              <a:t>}</a:t>
-            </a:r>
-          </a:p>
-        </p:txBody>
-      </p:sp>
-      <p:sp>
-        <p:nvSpPr>
-          <p:cNvPr id="6" name="EXEMPT_FOOTER"/>
+                  <a:srgbClr val="4A5868"/>
+                </a:solidFill>
+                <a:latin typeface="Arial"/>
+              </a:rPr>
+              <a:t>Next: 2  COMMAND → REPLY  →</a:t>
+            </a:r>
+          </a:p>
+        </p:txBody>
+      </p:sp>
+      <p:sp>
+        <p:nvSpPr>
+          <p:cNvPr id="7" name="EXEMPT_FOOTER"/>
           <p:cNvSpPr txBox="1"/>
           <p:nvPr/>
         </p:nvSpPr>
@@ -19568,7 +19841,7 @@
       </p:sp>
       <p:sp>
         <p:nvSpPr>
-          <p:cNvPr id="7" name="EXEMPT_FOOTER"/>
+          <p:cNvPr id="8" name="EXEMPT_FOOTER"/>
           <p:cNvSpPr txBox="1"/>
           <p:nvPr/>
         </p:nvSpPr>
@@ -19607,7 +19880,7 @@
       </p:sp>
       <p:sp>
         <p:nvSpPr>
-          <p:cNvPr id="8" name="EXEMPT_PROGRESS"/>
+          <p:cNvPr id="9" name="EXEMPT_PROGRESS"/>
           <p:cNvSpPr txBox="1"/>
           <p:nvPr/>
         </p:nvSpPr>
@@ -19762,7 +20035,7 @@
         <p:spPr>
           <a:xfrm>
             <a:off x="411480" y="1097280"/>
-            <a:ext cx="11368735" cy="2651760"/>
+            <a:ext cx="11368735" cy="2621280"/>
           </a:xfrm>
           <a:prstGeom prst="rect">
             <a:avLst/>
@@ -19806,7 +20079,7 @@
         <p:spPr>
           <a:xfrm>
             <a:off x="557784" y="1188720"/>
-            <a:ext cx="11149279" cy="2542032"/>
+            <a:ext cx="11149279" cy="2511552"/>
           </a:xfrm>
           <a:prstGeom prst="rect">
             <a:avLst/>
@@ -19821,104 +20094,143 @@
           <a:p>
             <a:pPr algn="l">
               <a:lnSpc>
+                <a:spcPts val="3200"/>
+              </a:lnSpc>
+            </a:pPr>
+            <a:r>
+              <a:rPr sz="2800" b="1">
+                <a:solidFill>
+                  <a:srgbClr val="F2B27A"/>
+                </a:solidFill>
+                <a:latin typeface="Arial"/>
+              </a:rPr>
+              <a:t>2  COMMAND → REPLY</a:t>
+            </a:r>
+          </a:p>
+          <a:p>
+            <a:pPr algn="l">
+              <a:lnSpc>
+                <a:spcPts val="3200"/>
+              </a:lnSpc>
+            </a:pPr>
+            <a:r>
+              <a:rPr sz="2800" b="0">
+                <a:solidFill>
+                  <a:srgbClr val="E6ECF2"/>
+                </a:solidFill>
+                <a:latin typeface="Courier New"/>
+              </a:rPr>
+              <a:t>db.users.updateOne({"name" : "John"},</a:t>
+            </a:r>
+          </a:p>
+          <a:p>
+            <a:pPr algn="l">
+              <a:lnSpc>
+                <a:spcPts val="3200"/>
+              </a:lnSpc>
+            </a:pPr>
+            <a:r>
+              <a:rPr sz="2800" b="0">
+                <a:solidFill>
+                  <a:srgbClr val="E6ECF2"/>
+                </a:solidFill>
+                <a:latin typeface="Courier New"/>
+              </a:rPr>
+              <a:t>  {"$unset" : {"favorite book" : 1}})</a:t>
+            </a:r>
+          </a:p>
+          <a:p>
+            <a:pPr algn="l">
+              <a:lnSpc>
+                <a:spcPts val="3200"/>
+              </a:lnSpc>
+            </a:pPr>
+            <a:r>
+              <a:rPr sz="2800" b="0">
+                <a:solidFill>
+                  <a:srgbClr val="9FE0C9"/>
+                </a:solidFill>
+                <a:latin typeface="Courier New"/>
+              </a:rPr>
+              <a:t>{ acknowledged: true, insertedId: null,</a:t>
+            </a:r>
+          </a:p>
+          <a:p>
+            <a:pPr algn="l">
+              <a:lnSpc>
+                <a:spcPts val="3200"/>
+              </a:lnSpc>
+            </a:pPr>
+            <a:r>
+              <a:rPr sz="2800" b="0">
+                <a:solidFill>
+                  <a:srgbClr val="9FE0C9"/>
+                </a:solidFill>
+                <a:latin typeface="Courier New"/>
+              </a:rPr>
+              <a:t>  matchedCount: 1, modifiedCount: 1,</a:t>
+            </a:r>
+          </a:p>
+          <a:p>
+            <a:pPr algn="l">
+              <a:lnSpc>
+                <a:spcPts val="3200"/>
+              </a:lnSpc>
+            </a:pPr>
+            <a:r>
+              <a:rPr sz="2800" b="0">
+                <a:solidFill>
+                  <a:srgbClr val="9FE0C9"/>
+                </a:solidFill>
+                <a:latin typeface="Courier New"/>
+              </a:rPr>
+              <a:t>  upsertedCount: 0 }</a:t>
+            </a:r>
+          </a:p>
+        </p:txBody>
+      </p:sp>
+      <p:sp>
+        <p:nvSpPr>
+          <p:cNvPr id="6" name="TextBox 5"/>
+          <p:cNvSpPr txBox="1"/>
+          <p:nvPr/>
+        </p:nvSpPr>
+        <p:spPr>
+          <a:xfrm>
+            <a:off x="411480" y="5696712"/>
+            <a:ext cx="11368735" cy="566928"/>
+          </a:xfrm>
+          <a:prstGeom prst="rect">
+            <a:avLst/>
+          </a:prstGeom>
+          <a:noFill/>
+        </p:spPr>
+        <p:txBody>
+          <a:bodyPr wrap="square" anchor="ctr" lIns="164592" rIns="164592" tIns="164592" bIns="164592">
+            <a:spAutoFit/>
+          </a:bodyPr>
+          <a:lstStyle/>
+          <a:p>
+            <a:pPr algn="r">
+              <a:lnSpc>
                 <a:spcPct val="100000"/>
               </a:lnSpc>
             </a:pPr>
             <a:r>
-              <a:rPr sz="2800" b="1">
-                <a:solidFill>
-                  <a:srgbClr val="F2B27A"/>
-                </a:solidFill>
-                <a:latin typeface="Arial"/>
-              </a:rPr>
-              <a:t>2  COMMAND → REPLY</a:t>
-            </a:r>
-          </a:p>
-          <a:p>
-            <a:pPr algn="l">
-              <a:lnSpc>
-                <a:spcPct val="100000"/>
-              </a:lnSpc>
-            </a:pPr>
-            <a:r>
               <a:rPr sz="2800" b="0">
                 <a:solidFill>
-                  <a:srgbClr val="E6ECF2"/>
-                </a:solidFill>
-                <a:latin typeface="Courier New"/>
-              </a:rPr>
-              <a:t>db.users.updateOne({"name" : "John"},</a:t>
-            </a:r>
-          </a:p>
-          <a:p>
-            <a:pPr algn="l">
-              <a:lnSpc>
-                <a:spcPct val="100000"/>
-              </a:lnSpc>
-            </a:pPr>
-            <a:r>
-              <a:rPr sz="2800" b="0">
-                <a:solidFill>
-                  <a:srgbClr val="E6ECF2"/>
-                </a:solidFill>
-                <a:latin typeface="Courier New"/>
-              </a:rPr>
-              <a:t>  {"$unset" : {"favorite book" : 1}})</a:t>
-            </a:r>
-          </a:p>
-          <a:p>
-            <a:pPr algn="l">
-              <a:lnSpc>
-                <a:spcPct val="100000"/>
-              </a:lnSpc>
-            </a:pPr>
-            <a:r>
-              <a:rPr sz="2800" b="0">
-                <a:solidFill>
-                  <a:srgbClr val="9FE0C9"/>
-                </a:solidFill>
-                <a:latin typeface="Courier New"/>
-              </a:rPr>
-              <a:t>{ acknowledged: true, insertedId: null,</a:t>
-            </a:r>
-          </a:p>
-          <a:p>
-            <a:pPr algn="l">
-              <a:lnSpc>
-                <a:spcPct val="100000"/>
-              </a:lnSpc>
-            </a:pPr>
-            <a:r>
-              <a:rPr sz="2800" b="0">
-                <a:solidFill>
-                  <a:srgbClr val="9FE0C9"/>
-                </a:solidFill>
-                <a:latin typeface="Courier New"/>
-              </a:rPr>
-              <a:t>  matchedCount: 1, modifiedCount: 1,</a:t>
-            </a:r>
-          </a:p>
-          <a:p>
-            <a:pPr algn="l">
-              <a:lnSpc>
-                <a:spcPct val="100000"/>
-              </a:lnSpc>
-            </a:pPr>
-            <a:r>
-              <a:rPr sz="2800" b="0">
-                <a:solidFill>
-                  <a:srgbClr val="9FE0C9"/>
-                </a:solidFill>
-                <a:latin typeface="Courier New"/>
-              </a:rPr>
-              <a:t>  upsertedCount: 0 }</a:t>
-            </a:r>
-          </a:p>
-        </p:txBody>
-      </p:sp>
-      <p:sp>
-        <p:nvSpPr>
-          <p:cNvPr id="6" name="EXEMPT_FOOTER"/>
+                  <a:srgbClr val="4A5868"/>
+                </a:solidFill>
+                <a:latin typeface="Arial"/>
+              </a:rPr>
+              <a:t>Next: 3  AFTER  →</a:t>
+            </a:r>
+          </a:p>
+        </p:txBody>
+      </p:sp>
+      <p:sp>
+        <p:nvSpPr>
+          <p:cNvPr id="7" name="EXEMPT_FOOTER"/>
           <p:cNvSpPr txBox="1"/>
           <p:nvPr/>
         </p:nvSpPr>
@@ -19957,7 +20269,7 @@
       </p:sp>
       <p:sp>
         <p:nvSpPr>
-          <p:cNvPr id="7" name="EXEMPT_FOOTER"/>
+          <p:cNvPr id="8" name="EXEMPT_FOOTER"/>
           <p:cNvSpPr txBox="1"/>
           <p:nvPr/>
         </p:nvSpPr>
@@ -19996,7 +20308,7 @@
       </p:sp>
       <p:sp>
         <p:nvSpPr>
-          <p:cNvPr id="8" name="EXEMPT_PROGRESS"/>
+          <p:cNvPr id="9" name="EXEMPT_PROGRESS"/>
           <p:cNvSpPr txBox="1"/>
           <p:nvPr/>
         </p:nvSpPr>
@@ -20372,7 +20684,7 @@
         <p:spPr>
           <a:xfrm>
             <a:off x="411480" y="1097280"/>
-            <a:ext cx="11368735" cy="3474720"/>
+            <a:ext cx="11368735" cy="3434080"/>
           </a:xfrm>
           <a:prstGeom prst="rect">
             <a:avLst/>
@@ -20416,7 +20728,7 @@
         <p:spPr>
           <a:xfrm>
             <a:off x="557784" y="1188720"/>
-            <a:ext cx="11149279" cy="3364992"/>
+            <a:ext cx="11149279" cy="3324352"/>
           </a:xfrm>
           <a:prstGeom prst="rect">
             <a:avLst/>
@@ -20431,7 +20743,7 @@
           <a:p>
             <a:pPr algn="l">
               <a:lnSpc>
-                <a:spcPct val="100000"/>
+                <a:spcPts val="3200"/>
               </a:lnSpc>
             </a:pPr>
             <a:r>
@@ -20447,7 +20759,7 @@
           <a:p>
             <a:pPr algn="l">
               <a:lnSpc>
-                <a:spcPct val="100000"/>
+                <a:spcPts val="3200"/>
               </a:lnSpc>
             </a:pPr>
             <a:r>
@@ -20463,7 +20775,7 @@
           <a:p>
             <a:pPr algn="l">
               <a:lnSpc>
-                <a:spcPct val="100000"/>
+                <a:spcPts val="3200"/>
               </a:lnSpc>
             </a:pPr>
             <a:r>
@@ -20479,7 +20791,7 @@
           <a:p>
             <a:pPr algn="l">
               <a:lnSpc>
-                <a:spcPct val="100000"/>
+                <a:spcPts val="3200"/>
               </a:lnSpc>
             </a:pPr>
             <a:r>
@@ -20495,7 +20807,7 @@
           <a:p>
             <a:pPr algn="l">
               <a:lnSpc>
-                <a:spcPct val="100000"/>
+                <a:spcPts val="3200"/>
               </a:lnSpc>
             </a:pPr>
             <a:r>
@@ -20511,7 +20823,7 @@
           <a:p>
             <a:pPr algn="l">
               <a:lnSpc>
-                <a:spcPct val="100000"/>
+                <a:spcPts val="3200"/>
               </a:lnSpc>
             </a:pPr>
             <a:r>
@@ -20527,7 +20839,7 @@
           <a:p>
             <a:pPr algn="l">
               <a:lnSpc>
-                <a:spcPct val="100000"/>
+                <a:spcPts val="3200"/>
               </a:lnSpc>
             </a:pPr>
             <a:r>
@@ -20543,7 +20855,7 @@
           <a:p>
             <a:pPr algn="l">
               <a:lnSpc>
-                <a:spcPct val="100000"/>
+                <a:spcPts val="3200"/>
               </a:lnSpc>
             </a:pPr>
             <a:r>
@@ -20850,7 +21162,7 @@
         <p:spPr>
           <a:xfrm>
             <a:off x="411480" y="1097280"/>
-            <a:ext cx="11368735" cy="3474720"/>
+            <a:ext cx="11368735" cy="3434080"/>
           </a:xfrm>
           <a:prstGeom prst="rect">
             <a:avLst/>
@@ -20894,7 +21206,7 @@
         <p:spPr>
           <a:xfrm>
             <a:off x="557784" y="1188720"/>
-            <a:ext cx="11149279" cy="3364992"/>
+            <a:ext cx="11149279" cy="3324352"/>
           </a:xfrm>
           <a:prstGeom prst="rect">
             <a:avLst/>
@@ -20909,163 +21221,202 @@
           <a:p>
             <a:pPr algn="l">
               <a:lnSpc>
+                <a:spcPts val="3200"/>
+              </a:lnSpc>
+            </a:pPr>
+            <a:r>
+              <a:rPr sz="2800" b="1">
+                <a:solidFill>
+                  <a:srgbClr val="F2B27A"/>
+                </a:solidFill>
+                <a:latin typeface="Arial"/>
+              </a:rPr>
+              <a:t>1  BEFORE</a:t>
+            </a:r>
+            <a:r>
+              <a:rPr sz="2800" b="0">
+                <a:solidFill>
+                  <a:srgbClr val="8FA3B8"/>
+                </a:solidFill>
+                <a:latin typeface="Courier New"/>
+              </a:rPr>
+              <a:t>   db.books.findOne({}, {"_id" : 0})</a:t>
+            </a:r>
+          </a:p>
+          <a:p>
+            <a:pPr algn="l">
+              <a:lnSpc>
+                <a:spcPts val="3200"/>
+              </a:lnSpc>
+            </a:pPr>
+            <a:r>
+              <a:rPr sz="2800" b="0">
+                <a:solidFill>
+                  <a:srgbClr val="9FE0C9"/>
+                </a:solidFill>
+                <a:latin typeface="Courier New"/>
+              </a:rPr>
+              <a:t>{</a:t>
+            </a:r>
+          </a:p>
+          <a:p>
+            <a:pPr algn="l">
+              <a:lnSpc>
+                <a:spcPts val="3200"/>
+              </a:lnSpc>
+            </a:pPr>
+            <a:r>
+              <a:rPr sz="2800" b="0">
+                <a:solidFill>
+                  <a:srgbClr val="9FE0C9"/>
+                </a:solidFill>
+                <a:latin typeface="Courier New"/>
+              </a:rPr>
+              <a:t>  title: 'MongoDB-2019',</a:t>
+            </a:r>
+          </a:p>
+          <a:p>
+            <a:pPr algn="l">
+              <a:lnSpc>
+                <a:spcPts val="3200"/>
+              </a:lnSpc>
+            </a:pPr>
+            <a:r>
+              <a:rPr sz="2800" b="0">
+                <a:solidFill>
+                  <a:srgbClr val="9FE0C9"/>
+                </a:solidFill>
+                <a:latin typeface="Courier New"/>
+              </a:rPr>
+              <a:t>  author: {</a:t>
+            </a:r>
+          </a:p>
+          <a:p>
+            <a:pPr algn="l">
+              <a:lnSpc>
+                <a:spcPts val="3200"/>
+              </a:lnSpc>
+            </a:pPr>
+            <a:r>
+              <a:rPr sz="2800" b="0">
+                <a:solidFill>
+                  <a:srgbClr val="9FE0C9"/>
+                </a:solidFill>
+                <a:latin typeface="Courier New"/>
+              </a:rPr>
+              <a:t>    </a:t>
+            </a:r>
+            <a:r>
+              <a:rPr sz="2800" b="0" strike="sngStrike">
+                <a:solidFill>
+                  <a:srgbClr val="FFB4A8"/>
+                </a:solidFill>
+                <a:latin typeface="Courier New"/>
+              </a:rPr>
+              <a:t>name: 'Nicole'</a:t>
+            </a:r>
+            <a:r>
+              <a:rPr sz="2800" b="0">
+                <a:solidFill>
+                  <a:srgbClr val="9FE0C9"/>
+                </a:solidFill>
+                <a:latin typeface="Courier New"/>
+              </a:rPr>
+              <a:t>,</a:t>
+            </a:r>
+          </a:p>
+          <a:p>
+            <a:pPr algn="l">
+              <a:lnSpc>
+                <a:spcPts val="3200"/>
+              </a:lnSpc>
+            </a:pPr>
+            <a:r>
+              <a:rPr sz="2800" b="0">
+                <a:solidFill>
+                  <a:srgbClr val="9FE0C9"/>
+                </a:solidFill>
+                <a:latin typeface="Courier New"/>
+              </a:rPr>
+              <a:t>    email: 'Nic@example.com'</a:t>
+            </a:r>
+          </a:p>
+          <a:p>
+            <a:pPr algn="l">
+              <a:lnSpc>
+                <a:spcPts val="3200"/>
+              </a:lnSpc>
+            </a:pPr>
+            <a:r>
+              <a:rPr sz="2800" b="0">
+                <a:solidFill>
+                  <a:srgbClr val="9FE0C9"/>
+                </a:solidFill>
+                <a:latin typeface="Courier New"/>
+              </a:rPr>
+              <a:t>  }</a:t>
+            </a:r>
+          </a:p>
+          <a:p>
+            <a:pPr algn="l">
+              <a:lnSpc>
+                <a:spcPts val="3200"/>
+              </a:lnSpc>
+            </a:pPr>
+            <a:r>
+              <a:rPr sz="2800" b="0">
+                <a:solidFill>
+                  <a:srgbClr val="9FE0C9"/>
+                </a:solidFill>
+                <a:latin typeface="Courier New"/>
+              </a:rPr>
+              <a:t>}</a:t>
+            </a:r>
+          </a:p>
+        </p:txBody>
+      </p:sp>
+      <p:sp>
+        <p:nvSpPr>
+          <p:cNvPr id="6" name="TextBox 5"/>
+          <p:cNvSpPr txBox="1"/>
+          <p:nvPr/>
+        </p:nvSpPr>
+        <p:spPr>
+          <a:xfrm>
+            <a:off x="411480" y="5696712"/>
+            <a:ext cx="11368735" cy="566928"/>
+          </a:xfrm>
+          <a:prstGeom prst="rect">
+            <a:avLst/>
+          </a:prstGeom>
+          <a:noFill/>
+        </p:spPr>
+        <p:txBody>
+          <a:bodyPr wrap="square" anchor="ctr" lIns="164592" rIns="164592" tIns="164592" bIns="164592">
+            <a:spAutoFit/>
+          </a:bodyPr>
+          <a:lstStyle/>
+          <a:p>
+            <a:pPr algn="r">
+              <a:lnSpc>
                 <a:spcPct val="100000"/>
               </a:lnSpc>
             </a:pPr>
             <a:r>
-              <a:rPr sz="2800" b="1">
-                <a:solidFill>
-                  <a:srgbClr val="F2B27A"/>
-                </a:solidFill>
-                <a:latin typeface="Arial"/>
-              </a:rPr>
-              <a:t>1  BEFORE</a:t>
-            </a:r>
-            <a:r>
               <a:rPr sz="2800" b="0">
                 <a:solidFill>
-                  <a:srgbClr val="8FA3B8"/>
-                </a:solidFill>
-                <a:latin typeface="Courier New"/>
-              </a:rPr>
-              <a:t>   db.books.findOne({}, {"_id" : 0})</a:t>
-            </a:r>
-          </a:p>
-          <a:p>
-            <a:pPr algn="l">
-              <a:lnSpc>
-                <a:spcPct val="100000"/>
-              </a:lnSpc>
-            </a:pPr>
-            <a:r>
-              <a:rPr sz="2800" b="0">
-                <a:solidFill>
-                  <a:srgbClr val="9FE0C9"/>
-                </a:solidFill>
-                <a:latin typeface="Courier New"/>
-              </a:rPr>
-              <a:t>{</a:t>
-            </a:r>
-          </a:p>
-          <a:p>
-            <a:pPr algn="l">
-              <a:lnSpc>
-                <a:spcPct val="100000"/>
-              </a:lnSpc>
-            </a:pPr>
-            <a:r>
-              <a:rPr sz="2800" b="0">
-                <a:solidFill>
-                  <a:srgbClr val="9FE0C9"/>
-                </a:solidFill>
-                <a:latin typeface="Courier New"/>
-              </a:rPr>
-              <a:t>  title: 'MongoDB-2019',</a:t>
-            </a:r>
-          </a:p>
-          <a:p>
-            <a:pPr algn="l">
-              <a:lnSpc>
-                <a:spcPct val="100000"/>
-              </a:lnSpc>
-            </a:pPr>
-            <a:r>
-              <a:rPr sz="2800" b="0">
-                <a:solidFill>
-                  <a:srgbClr val="9FE0C9"/>
-                </a:solidFill>
-                <a:latin typeface="Courier New"/>
-              </a:rPr>
-              <a:t>  author: {</a:t>
-            </a:r>
-          </a:p>
-          <a:p>
-            <a:pPr algn="l">
-              <a:lnSpc>
-                <a:spcPct val="100000"/>
-              </a:lnSpc>
-            </a:pPr>
-            <a:r>
-              <a:rPr sz="2800" b="0">
-                <a:solidFill>
-                  <a:srgbClr val="9FE0C9"/>
-                </a:solidFill>
-                <a:latin typeface="Courier New"/>
-              </a:rPr>
-              <a:t>    </a:t>
-            </a:r>
-            <a:r>
-              <a:rPr sz="2800" b="0" strike="sngStrike">
-                <a:solidFill>
-                  <a:srgbClr val="FFB4A8"/>
-                </a:solidFill>
-                <a:latin typeface="Courier New"/>
-              </a:rPr>
-              <a:t>name: 'Nicole'</a:t>
-            </a:r>
-            <a:r>
-              <a:rPr sz="2800" b="0">
-                <a:solidFill>
-                  <a:srgbClr val="9FE0C9"/>
-                </a:solidFill>
-                <a:latin typeface="Courier New"/>
-              </a:rPr>
-              <a:t>,</a:t>
-            </a:r>
-          </a:p>
-          <a:p>
-            <a:pPr algn="l">
-              <a:lnSpc>
-                <a:spcPct val="100000"/>
-              </a:lnSpc>
-            </a:pPr>
-            <a:r>
-              <a:rPr sz="2800" b="0">
-                <a:solidFill>
-                  <a:srgbClr val="9FE0C9"/>
-                </a:solidFill>
-                <a:latin typeface="Courier New"/>
-              </a:rPr>
-              <a:t>    email: 'Nic@example.com'</a:t>
-            </a:r>
-          </a:p>
-          <a:p>
-            <a:pPr algn="l">
-              <a:lnSpc>
-                <a:spcPct val="100000"/>
-              </a:lnSpc>
-            </a:pPr>
-            <a:r>
-              <a:rPr sz="2800" b="0">
-                <a:solidFill>
-                  <a:srgbClr val="9FE0C9"/>
-                </a:solidFill>
-                <a:latin typeface="Courier New"/>
-              </a:rPr>
-              <a:t>  }</a:t>
-            </a:r>
-          </a:p>
-          <a:p>
-            <a:pPr algn="l">
-              <a:lnSpc>
-                <a:spcPct val="100000"/>
-              </a:lnSpc>
-            </a:pPr>
-            <a:r>
-              <a:rPr sz="2800" b="0">
-                <a:solidFill>
-                  <a:srgbClr val="9FE0C9"/>
-                </a:solidFill>
-                <a:latin typeface="Courier New"/>
-              </a:rPr>
-              <a:t>}</a:t>
-            </a:r>
-          </a:p>
-        </p:txBody>
-      </p:sp>
-      <p:sp>
-        <p:nvSpPr>
-          <p:cNvPr id="6" name="EXEMPT_FOOTER"/>
+                  <a:srgbClr val="4A5868"/>
+                </a:solidFill>
+                <a:latin typeface="Arial"/>
+              </a:rPr>
+              <a:t>Next: 2  COMMAND → REPLY  →</a:t>
+            </a:r>
+          </a:p>
+        </p:txBody>
+      </p:sp>
+      <p:sp>
+        <p:nvSpPr>
+          <p:cNvPr id="7" name="EXEMPT_FOOTER"/>
           <p:cNvSpPr txBox="1"/>
           <p:nvPr/>
         </p:nvSpPr>
@@ -21104,7 +21455,7 @@
       </p:sp>
       <p:sp>
         <p:nvSpPr>
-          <p:cNvPr id="7" name="EXEMPT_FOOTER"/>
+          <p:cNvPr id="8" name="EXEMPT_FOOTER"/>
           <p:cNvSpPr txBox="1"/>
           <p:nvPr/>
         </p:nvSpPr>
@@ -21143,7 +21494,7 @@
       </p:sp>
       <p:sp>
         <p:nvSpPr>
-          <p:cNvPr id="8" name="EXEMPT_PROGRESS"/>
+          <p:cNvPr id="9" name="EXEMPT_PROGRESS"/>
           <p:cNvSpPr txBox="1"/>
           <p:nvPr/>
         </p:nvSpPr>
@@ -21298,7 +21649,7 @@
         <p:spPr>
           <a:xfrm>
             <a:off x="411480" y="1097280"/>
-            <a:ext cx="11368735" cy="2651760"/>
+            <a:ext cx="11368735" cy="2621280"/>
           </a:xfrm>
           <a:prstGeom prst="rect">
             <a:avLst/>
@@ -21342,7 +21693,7 @@
         <p:spPr>
           <a:xfrm>
             <a:off x="557784" y="1188720"/>
-            <a:ext cx="11149279" cy="2542032"/>
+            <a:ext cx="11149279" cy="2511552"/>
           </a:xfrm>
           <a:prstGeom prst="rect">
             <a:avLst/>
@@ -21357,104 +21708,143 @@
           <a:p>
             <a:pPr algn="l">
               <a:lnSpc>
+                <a:spcPts val="3200"/>
+              </a:lnSpc>
+            </a:pPr>
+            <a:r>
+              <a:rPr sz="2800" b="1">
+                <a:solidFill>
+                  <a:srgbClr val="F2B27A"/>
+                </a:solidFill>
+                <a:latin typeface="Arial"/>
+              </a:rPr>
+              <a:t>2  COMMAND → REPLY</a:t>
+            </a:r>
+          </a:p>
+          <a:p>
+            <a:pPr algn="l">
+              <a:lnSpc>
+                <a:spcPts val="3200"/>
+              </a:lnSpc>
+            </a:pPr>
+            <a:r>
+              <a:rPr sz="2800" b="0">
+                <a:solidFill>
+                  <a:srgbClr val="E6ECF2"/>
+                </a:solidFill>
+                <a:latin typeface="Courier New"/>
+              </a:rPr>
+              <a:t>db.books.updateOne({"author.name" : "Nicole"},</a:t>
+            </a:r>
+          </a:p>
+          <a:p>
+            <a:pPr algn="l">
+              <a:lnSpc>
+                <a:spcPts val="3200"/>
+              </a:lnSpc>
+            </a:pPr>
+            <a:r>
+              <a:rPr sz="2800" b="0">
+                <a:solidFill>
+                  <a:srgbClr val="E6ECF2"/>
+                </a:solidFill>
+                <a:latin typeface="Courier New"/>
+              </a:rPr>
+              <a:t>  {"$set" : {"author.name" : "Nicole Tagayon"}})</a:t>
+            </a:r>
+          </a:p>
+          <a:p>
+            <a:pPr algn="l">
+              <a:lnSpc>
+                <a:spcPts val="3200"/>
+              </a:lnSpc>
+            </a:pPr>
+            <a:r>
+              <a:rPr sz="2800" b="0">
+                <a:solidFill>
+                  <a:srgbClr val="9FE0C9"/>
+                </a:solidFill>
+                <a:latin typeface="Courier New"/>
+              </a:rPr>
+              <a:t>{ acknowledged: true, insertedId: null,</a:t>
+            </a:r>
+          </a:p>
+          <a:p>
+            <a:pPr algn="l">
+              <a:lnSpc>
+                <a:spcPts val="3200"/>
+              </a:lnSpc>
+            </a:pPr>
+            <a:r>
+              <a:rPr sz="2800" b="0">
+                <a:solidFill>
+                  <a:srgbClr val="9FE0C9"/>
+                </a:solidFill>
+                <a:latin typeface="Courier New"/>
+              </a:rPr>
+              <a:t>  matchedCount: 1, modifiedCount: 1,</a:t>
+            </a:r>
+          </a:p>
+          <a:p>
+            <a:pPr algn="l">
+              <a:lnSpc>
+                <a:spcPts val="3200"/>
+              </a:lnSpc>
+            </a:pPr>
+            <a:r>
+              <a:rPr sz="2800" b="0">
+                <a:solidFill>
+                  <a:srgbClr val="9FE0C9"/>
+                </a:solidFill>
+                <a:latin typeface="Courier New"/>
+              </a:rPr>
+              <a:t>  upsertedCount: 0 }</a:t>
+            </a:r>
+          </a:p>
+        </p:txBody>
+      </p:sp>
+      <p:sp>
+        <p:nvSpPr>
+          <p:cNvPr id="6" name="TextBox 5"/>
+          <p:cNvSpPr txBox="1"/>
+          <p:nvPr/>
+        </p:nvSpPr>
+        <p:spPr>
+          <a:xfrm>
+            <a:off x="411480" y="5696712"/>
+            <a:ext cx="11368735" cy="566928"/>
+          </a:xfrm>
+          <a:prstGeom prst="rect">
+            <a:avLst/>
+          </a:prstGeom>
+          <a:noFill/>
+        </p:spPr>
+        <p:txBody>
+          <a:bodyPr wrap="square" anchor="ctr" lIns="164592" rIns="164592" tIns="164592" bIns="164592">
+            <a:spAutoFit/>
+          </a:bodyPr>
+          <a:lstStyle/>
+          <a:p>
+            <a:pPr algn="r">
+              <a:lnSpc>
                 <a:spcPct val="100000"/>
               </a:lnSpc>
             </a:pPr>
             <a:r>
-              <a:rPr sz="2800" b="1">
-                <a:solidFill>
-                  <a:srgbClr val="F2B27A"/>
-                </a:solidFill>
-                <a:latin typeface="Arial"/>
-              </a:rPr>
-              <a:t>2  COMMAND → REPLY</a:t>
-            </a:r>
-          </a:p>
-          <a:p>
-            <a:pPr algn="l">
-              <a:lnSpc>
-                <a:spcPct val="100000"/>
-              </a:lnSpc>
-            </a:pPr>
-            <a:r>
               <a:rPr sz="2800" b="0">
                 <a:solidFill>
-                  <a:srgbClr val="E6ECF2"/>
-                </a:solidFill>
-                <a:latin typeface="Courier New"/>
-              </a:rPr>
-              <a:t>db.books.updateOne({"author.name" : "Nicole"},</a:t>
-            </a:r>
-          </a:p>
-          <a:p>
-            <a:pPr algn="l">
-              <a:lnSpc>
-                <a:spcPct val="100000"/>
-              </a:lnSpc>
-            </a:pPr>
-            <a:r>
-              <a:rPr sz="2800" b="0">
-                <a:solidFill>
-                  <a:srgbClr val="E6ECF2"/>
-                </a:solidFill>
-                <a:latin typeface="Courier New"/>
-              </a:rPr>
-              <a:t>  {"$set" : {"author.name" : "Nicole Tagayon"}})</a:t>
-            </a:r>
-          </a:p>
-          <a:p>
-            <a:pPr algn="l">
-              <a:lnSpc>
-                <a:spcPct val="100000"/>
-              </a:lnSpc>
-            </a:pPr>
-            <a:r>
-              <a:rPr sz="2800" b="0">
-                <a:solidFill>
-                  <a:srgbClr val="9FE0C9"/>
-                </a:solidFill>
-                <a:latin typeface="Courier New"/>
-              </a:rPr>
-              <a:t>{ acknowledged: true, insertedId: null,</a:t>
-            </a:r>
-          </a:p>
-          <a:p>
-            <a:pPr algn="l">
-              <a:lnSpc>
-                <a:spcPct val="100000"/>
-              </a:lnSpc>
-            </a:pPr>
-            <a:r>
-              <a:rPr sz="2800" b="0">
-                <a:solidFill>
-                  <a:srgbClr val="9FE0C9"/>
-                </a:solidFill>
-                <a:latin typeface="Courier New"/>
-              </a:rPr>
-              <a:t>  matchedCount: 1, modifiedCount: 1,</a:t>
-            </a:r>
-          </a:p>
-          <a:p>
-            <a:pPr algn="l">
-              <a:lnSpc>
-                <a:spcPct val="100000"/>
-              </a:lnSpc>
-            </a:pPr>
-            <a:r>
-              <a:rPr sz="2800" b="0">
-                <a:solidFill>
-                  <a:srgbClr val="9FE0C9"/>
-                </a:solidFill>
-                <a:latin typeface="Courier New"/>
-              </a:rPr>
-              <a:t>  upsertedCount: 0 }</a:t>
-            </a:r>
-          </a:p>
-        </p:txBody>
-      </p:sp>
-      <p:sp>
-        <p:nvSpPr>
-          <p:cNvPr id="6" name="EXEMPT_FOOTER"/>
+                  <a:srgbClr val="4A5868"/>
+                </a:solidFill>
+                <a:latin typeface="Arial"/>
+              </a:rPr>
+              <a:t>Next: 3  AFTER  →</a:t>
+            </a:r>
+          </a:p>
+        </p:txBody>
+      </p:sp>
+      <p:sp>
+        <p:nvSpPr>
+          <p:cNvPr id="7" name="EXEMPT_FOOTER"/>
           <p:cNvSpPr txBox="1"/>
           <p:nvPr/>
         </p:nvSpPr>
@@ -21493,7 +21883,7 @@
       </p:sp>
       <p:sp>
         <p:nvSpPr>
-          <p:cNvPr id="7" name="EXEMPT_FOOTER"/>
+          <p:cNvPr id="8" name="EXEMPT_FOOTER"/>
           <p:cNvSpPr txBox="1"/>
           <p:nvPr/>
         </p:nvSpPr>
@@ -21532,7 +21922,7 @@
       </p:sp>
       <p:sp>
         <p:nvSpPr>
-          <p:cNvPr id="8" name="EXEMPT_PROGRESS"/>
+          <p:cNvPr id="9" name="EXEMPT_PROGRESS"/>
           <p:cNvSpPr txBox="1"/>
           <p:nvPr/>
         </p:nvSpPr>
@@ -21687,7 +22077,7 @@
         <p:spPr>
           <a:xfrm>
             <a:off x="411480" y="1097280"/>
-            <a:ext cx="11368735" cy="3474720"/>
+            <a:ext cx="11368735" cy="3434080"/>
           </a:xfrm>
           <a:prstGeom prst="rect">
             <a:avLst/>
@@ -21731,7 +22121,7 @@
         <p:spPr>
           <a:xfrm>
             <a:off x="557784" y="1188720"/>
-            <a:ext cx="11149279" cy="3364992"/>
+            <a:ext cx="11149279" cy="3324352"/>
           </a:xfrm>
           <a:prstGeom prst="rect">
             <a:avLst/>
@@ -21746,7 +22136,7 @@
           <a:p>
             <a:pPr algn="l">
               <a:lnSpc>
-                <a:spcPct val="100000"/>
+                <a:spcPts val="3200"/>
               </a:lnSpc>
             </a:pPr>
             <a:r>
@@ -21771,7 +22161,7 @@
           <a:p>
             <a:pPr algn="l">
               <a:lnSpc>
-                <a:spcPct val="100000"/>
+                <a:spcPts val="3200"/>
               </a:lnSpc>
             </a:pPr>
             <a:r>
@@ -21787,7 +22177,7 @@
           <a:p>
             <a:pPr algn="l">
               <a:lnSpc>
-                <a:spcPct val="100000"/>
+                <a:spcPts val="3200"/>
               </a:lnSpc>
             </a:pPr>
             <a:r>
@@ -21803,7 +22193,7 @@
           <a:p>
             <a:pPr algn="l">
               <a:lnSpc>
-                <a:spcPct val="100000"/>
+                <a:spcPts val="3200"/>
               </a:lnSpc>
             </a:pPr>
             <a:r>
@@ -21819,7 +22209,7 @@
           <a:p>
             <a:pPr algn="l">
               <a:lnSpc>
-                <a:spcPct val="100000"/>
+                <a:spcPts val="3200"/>
               </a:lnSpc>
             </a:pPr>
             <a:r>
@@ -21853,7 +22243,7 @@
           <a:p>
             <a:pPr algn="l">
               <a:lnSpc>
-                <a:spcPct val="100000"/>
+                <a:spcPts val="3200"/>
               </a:lnSpc>
             </a:pPr>
             <a:r>
@@ -21869,7 +22259,7 @@
           <a:p>
             <a:pPr algn="l">
               <a:lnSpc>
-                <a:spcPct val="100000"/>
+                <a:spcPts val="3200"/>
               </a:lnSpc>
             </a:pPr>
             <a:r>
@@ -21885,7 +22275,7 @@
           <a:p>
             <a:pPr algn="l">
               <a:lnSpc>
-                <a:spcPct val="100000"/>
+                <a:spcPts val="3200"/>
               </a:lnSpc>
             </a:pPr>
             <a:r>
@@ -22192,7 +22582,7 @@
         <p:spPr>
           <a:xfrm>
             <a:off x="411480" y="1097280"/>
-            <a:ext cx="11368735" cy="3063240"/>
+            <a:ext cx="11368735" cy="3027680"/>
           </a:xfrm>
           <a:prstGeom prst="rect">
             <a:avLst/>
@@ -22236,7 +22626,7 @@
         <p:spPr>
           <a:xfrm>
             <a:off x="557784" y="1188720"/>
-            <a:ext cx="11149279" cy="2953512"/>
+            <a:ext cx="11149279" cy="2917951"/>
           </a:xfrm>
           <a:prstGeom prst="rect">
             <a:avLst/>
@@ -22251,120 +22641,159 @@
           <a:p>
             <a:pPr algn="l">
               <a:lnSpc>
+                <a:spcPts val="3200"/>
+              </a:lnSpc>
+            </a:pPr>
+            <a:r>
+              <a:rPr sz="2800" b="1">
+                <a:solidFill>
+                  <a:srgbClr val="F2B27A"/>
+                </a:solidFill>
+                <a:latin typeface="Arial"/>
+              </a:rPr>
+              <a:t>1  BEFORE</a:t>
+            </a:r>
+          </a:p>
+          <a:p>
+            <a:pPr algn="l">
+              <a:lnSpc>
+                <a:spcPts val="3200"/>
+              </a:lnSpc>
+            </a:pPr>
+            <a:r>
+              <a:rPr sz="2800" b="0">
+                <a:solidFill>
+                  <a:srgbClr val="8FA3B8"/>
+                </a:solidFill>
+                <a:latin typeface="Courier New"/>
+              </a:rPr>
+              <a:t>db.users.find({"birthday" : "10/13/1978"})</a:t>
+            </a:r>
+          </a:p>
+          <a:p>
+            <a:pPr algn="l">
+              <a:lnSpc>
+                <a:spcPts val="3200"/>
+              </a:lnSpc>
+            </a:pPr>
+            <a:r>
+              <a:rPr sz="2800" b="0">
+                <a:solidFill>
+                  <a:srgbClr val="9FE0C9"/>
+                </a:solidFill>
+                <a:latin typeface="Courier New"/>
+              </a:rPr>
+              <a:t>[</a:t>
+            </a:r>
+          </a:p>
+          <a:p>
+            <a:pPr algn="l">
+              <a:lnSpc>
+                <a:spcPts val="3200"/>
+              </a:lnSpc>
+            </a:pPr>
+            <a:r>
+              <a:rPr sz="2800" b="0">
+                <a:solidFill>
+                  <a:srgbClr val="9FE0C9"/>
+                </a:solidFill>
+                <a:latin typeface="Courier New"/>
+              </a:rPr>
+              <a:t>  { _id: 1, birthday: '10/13/1978' },</a:t>
+            </a:r>
+          </a:p>
+          <a:p>
+            <a:pPr algn="l">
+              <a:lnSpc>
+                <a:spcPts val="3200"/>
+              </a:lnSpc>
+            </a:pPr>
+            <a:r>
+              <a:rPr sz="2800" b="0">
+                <a:solidFill>
+                  <a:srgbClr val="9FE0C9"/>
+                </a:solidFill>
+                <a:latin typeface="Courier New"/>
+              </a:rPr>
+              <a:t>  { _id: 2, birthday: '10/13/1978' },</a:t>
+            </a:r>
+          </a:p>
+          <a:p>
+            <a:pPr algn="l">
+              <a:lnSpc>
+                <a:spcPts val="3200"/>
+              </a:lnSpc>
+            </a:pPr>
+            <a:r>
+              <a:rPr sz="2800" b="0">
+                <a:solidFill>
+                  <a:srgbClr val="9FE0C9"/>
+                </a:solidFill>
+                <a:latin typeface="Courier New"/>
+              </a:rPr>
+              <a:t>  { _id: 3, birthday: '10/13/1978' }</a:t>
+            </a:r>
+          </a:p>
+          <a:p>
+            <a:pPr algn="l">
+              <a:lnSpc>
+                <a:spcPts val="3200"/>
+              </a:lnSpc>
+            </a:pPr>
+            <a:r>
+              <a:rPr sz="2800" b="0">
+                <a:solidFill>
+                  <a:srgbClr val="9FE0C9"/>
+                </a:solidFill>
+                <a:latin typeface="Courier New"/>
+              </a:rPr>
+              <a:t>]</a:t>
+            </a:r>
+          </a:p>
+        </p:txBody>
+      </p:sp>
+      <p:sp>
+        <p:nvSpPr>
+          <p:cNvPr id="6" name="TextBox 5"/>
+          <p:cNvSpPr txBox="1"/>
+          <p:nvPr/>
+        </p:nvSpPr>
+        <p:spPr>
+          <a:xfrm>
+            <a:off x="411480" y="5696712"/>
+            <a:ext cx="11368735" cy="566928"/>
+          </a:xfrm>
+          <a:prstGeom prst="rect">
+            <a:avLst/>
+          </a:prstGeom>
+          <a:noFill/>
+        </p:spPr>
+        <p:txBody>
+          <a:bodyPr wrap="square" anchor="ctr" lIns="164592" rIns="164592" tIns="164592" bIns="164592">
+            <a:spAutoFit/>
+          </a:bodyPr>
+          <a:lstStyle/>
+          <a:p>
+            <a:pPr algn="r">
+              <a:lnSpc>
                 <a:spcPct val="100000"/>
               </a:lnSpc>
             </a:pPr>
             <a:r>
-              <a:rPr sz="2800" b="1">
-                <a:solidFill>
-                  <a:srgbClr val="F2B27A"/>
-                </a:solidFill>
-                <a:latin typeface="Arial"/>
-              </a:rPr>
-              <a:t>1  BEFORE</a:t>
-            </a:r>
-          </a:p>
-          <a:p>
-            <a:pPr algn="l">
-              <a:lnSpc>
-                <a:spcPct val="100000"/>
-              </a:lnSpc>
-            </a:pPr>
-            <a:r>
               <a:rPr sz="2800" b="0">
                 <a:solidFill>
-                  <a:srgbClr val="8FA3B8"/>
-                </a:solidFill>
-                <a:latin typeface="Courier New"/>
-              </a:rPr>
-              <a:t>db.users.find({"birthday" : "10/13/1978"})</a:t>
-            </a:r>
-          </a:p>
-          <a:p>
-            <a:pPr algn="l">
-              <a:lnSpc>
-                <a:spcPct val="100000"/>
-              </a:lnSpc>
-            </a:pPr>
-            <a:r>
-              <a:rPr sz="2800" b="0">
-                <a:solidFill>
-                  <a:srgbClr val="9FE0C9"/>
-                </a:solidFill>
-                <a:latin typeface="Courier New"/>
-              </a:rPr>
-              <a:t>[</a:t>
-            </a:r>
-          </a:p>
-          <a:p>
-            <a:pPr algn="l">
-              <a:lnSpc>
-                <a:spcPct val="100000"/>
-              </a:lnSpc>
-            </a:pPr>
-            <a:r>
-              <a:rPr sz="2800" b="0">
-                <a:solidFill>
-                  <a:srgbClr val="9FE0C9"/>
-                </a:solidFill>
-                <a:latin typeface="Courier New"/>
-              </a:rPr>
-              <a:t>  { _id: 1, birthday: '10/13/1978' },</a:t>
-            </a:r>
-          </a:p>
-          <a:p>
-            <a:pPr algn="l">
-              <a:lnSpc>
-                <a:spcPct val="100000"/>
-              </a:lnSpc>
-            </a:pPr>
-            <a:r>
-              <a:rPr sz="2800" b="0">
-                <a:solidFill>
-                  <a:srgbClr val="9FE0C9"/>
-                </a:solidFill>
-                <a:latin typeface="Courier New"/>
-              </a:rPr>
-              <a:t>  { _id: 2, birthday: '10/13/1978' },</a:t>
-            </a:r>
-          </a:p>
-          <a:p>
-            <a:pPr algn="l">
-              <a:lnSpc>
-                <a:spcPct val="100000"/>
-              </a:lnSpc>
-            </a:pPr>
-            <a:r>
-              <a:rPr sz="2800" b="0">
-                <a:solidFill>
-                  <a:srgbClr val="9FE0C9"/>
-                </a:solidFill>
-                <a:latin typeface="Courier New"/>
-              </a:rPr>
-              <a:t>  { _id: 3, birthday: '10/13/1978' }</a:t>
-            </a:r>
-          </a:p>
-          <a:p>
-            <a:pPr algn="l">
-              <a:lnSpc>
-                <a:spcPct val="100000"/>
-              </a:lnSpc>
-            </a:pPr>
-            <a:r>
-              <a:rPr sz="2800" b="0">
-                <a:solidFill>
-                  <a:srgbClr val="9FE0C9"/>
-                </a:solidFill>
-                <a:latin typeface="Courier New"/>
-              </a:rPr>
-              <a:t>]</a:t>
-            </a:r>
-          </a:p>
-        </p:txBody>
-      </p:sp>
-      <p:sp>
-        <p:nvSpPr>
-          <p:cNvPr id="6" name="EXEMPT_FOOTER"/>
+                  <a:srgbClr val="4A5868"/>
+                </a:solidFill>
+                <a:latin typeface="Arial"/>
+              </a:rPr>
+              <a:t>Next: 2  COMMAND → REPLY  →</a:t>
+            </a:r>
+          </a:p>
+        </p:txBody>
+      </p:sp>
+      <p:sp>
+        <p:nvSpPr>
+          <p:cNvPr id="7" name="EXEMPT_FOOTER"/>
           <p:cNvSpPr txBox="1"/>
           <p:nvPr/>
         </p:nvSpPr>
@@ -22403,7 +22832,7 @@
       </p:sp>
       <p:sp>
         <p:nvSpPr>
-          <p:cNvPr id="7" name="EXEMPT_FOOTER"/>
+          <p:cNvPr id="8" name="EXEMPT_FOOTER"/>
           <p:cNvSpPr txBox="1"/>
           <p:nvPr/>
         </p:nvSpPr>
@@ -22442,7 +22871,7 @@
       </p:sp>
       <p:sp>
         <p:nvSpPr>
-          <p:cNvPr id="8" name="EXEMPT_PROGRESS"/>
+          <p:cNvPr id="9" name="EXEMPT_PROGRESS"/>
           <p:cNvSpPr txBox="1"/>
           <p:nvPr/>
         </p:nvSpPr>
@@ -22597,7 +23026,7 @@
         <p:spPr>
           <a:xfrm>
             <a:off x="411480" y="1097280"/>
-            <a:ext cx="11368735" cy="2651760"/>
+            <a:ext cx="11368735" cy="2621280"/>
           </a:xfrm>
           <a:prstGeom prst="rect">
             <a:avLst/>
@@ -22641,7 +23070,7 @@
         <p:spPr>
           <a:xfrm>
             <a:off x="557784" y="1188720"/>
-            <a:ext cx="11149279" cy="2542032"/>
+            <a:ext cx="11149279" cy="2511552"/>
           </a:xfrm>
           <a:prstGeom prst="rect">
             <a:avLst/>
@@ -22656,104 +23085,143 @@
           <a:p>
             <a:pPr algn="l">
               <a:lnSpc>
+                <a:spcPts val="3200"/>
+              </a:lnSpc>
+            </a:pPr>
+            <a:r>
+              <a:rPr sz="2800" b="1">
+                <a:solidFill>
+                  <a:srgbClr val="F2B27A"/>
+                </a:solidFill>
+                <a:latin typeface="Arial"/>
+              </a:rPr>
+              <a:t>2  COMMAND → REPLY</a:t>
+            </a:r>
+          </a:p>
+          <a:p>
+            <a:pPr algn="l">
+              <a:lnSpc>
+                <a:spcPts val="3200"/>
+              </a:lnSpc>
+            </a:pPr>
+            <a:r>
+              <a:rPr sz="2800" b="0">
+                <a:solidFill>
+                  <a:srgbClr val="E6ECF2"/>
+                </a:solidFill>
+                <a:latin typeface="Courier New"/>
+              </a:rPr>
+              <a:t>db.users.updateMany({"birthday" : "10/13/1978"},</a:t>
+            </a:r>
+          </a:p>
+          <a:p>
+            <a:pPr algn="l">
+              <a:lnSpc>
+                <a:spcPts val="3200"/>
+              </a:lnSpc>
+            </a:pPr>
+            <a:r>
+              <a:rPr sz="2800" b="0">
+                <a:solidFill>
+                  <a:srgbClr val="E6ECF2"/>
+                </a:solidFill>
+                <a:latin typeface="Courier New"/>
+              </a:rPr>
+              <a:t>  {"$set" : {"gift" : "Happy Birthday!"}})</a:t>
+            </a:r>
+          </a:p>
+          <a:p>
+            <a:pPr algn="l">
+              <a:lnSpc>
+                <a:spcPts val="3200"/>
+              </a:lnSpc>
+            </a:pPr>
+            <a:r>
+              <a:rPr sz="2800" b="0">
+                <a:solidFill>
+                  <a:srgbClr val="9FE0C9"/>
+                </a:solidFill>
+                <a:latin typeface="Courier New"/>
+              </a:rPr>
+              <a:t>{ acknowledged: true, insertedId: null,</a:t>
+            </a:r>
+          </a:p>
+          <a:p>
+            <a:pPr algn="l">
+              <a:lnSpc>
+                <a:spcPts val="3200"/>
+              </a:lnSpc>
+            </a:pPr>
+            <a:r>
+              <a:rPr sz="2800" b="0">
+                <a:solidFill>
+                  <a:srgbClr val="9FE0C9"/>
+                </a:solidFill>
+                <a:latin typeface="Courier New"/>
+              </a:rPr>
+              <a:t>  matchedCount: 3, modifiedCount: 3,</a:t>
+            </a:r>
+          </a:p>
+          <a:p>
+            <a:pPr algn="l">
+              <a:lnSpc>
+                <a:spcPts val="3200"/>
+              </a:lnSpc>
+            </a:pPr>
+            <a:r>
+              <a:rPr sz="2800" b="0">
+                <a:solidFill>
+                  <a:srgbClr val="9FE0C9"/>
+                </a:solidFill>
+                <a:latin typeface="Courier New"/>
+              </a:rPr>
+              <a:t>  upsertedCount: 0 }</a:t>
+            </a:r>
+          </a:p>
+        </p:txBody>
+      </p:sp>
+      <p:sp>
+        <p:nvSpPr>
+          <p:cNvPr id="6" name="TextBox 5"/>
+          <p:cNvSpPr txBox="1"/>
+          <p:nvPr/>
+        </p:nvSpPr>
+        <p:spPr>
+          <a:xfrm>
+            <a:off x="411480" y="5696712"/>
+            <a:ext cx="11368735" cy="566928"/>
+          </a:xfrm>
+          <a:prstGeom prst="rect">
+            <a:avLst/>
+          </a:prstGeom>
+          <a:noFill/>
+        </p:spPr>
+        <p:txBody>
+          <a:bodyPr wrap="square" anchor="ctr" lIns="164592" rIns="164592" tIns="164592" bIns="164592">
+            <a:spAutoFit/>
+          </a:bodyPr>
+          <a:lstStyle/>
+          <a:p>
+            <a:pPr algn="r">
+              <a:lnSpc>
                 <a:spcPct val="100000"/>
               </a:lnSpc>
             </a:pPr>
             <a:r>
-              <a:rPr sz="2800" b="1">
-                <a:solidFill>
-                  <a:srgbClr val="F2B27A"/>
-                </a:solidFill>
-                <a:latin typeface="Arial"/>
-              </a:rPr>
-              <a:t>2  COMMAND → REPLY</a:t>
-            </a:r>
-          </a:p>
-          <a:p>
-            <a:pPr algn="l">
-              <a:lnSpc>
-                <a:spcPct val="100000"/>
-              </a:lnSpc>
-            </a:pPr>
-            <a:r>
               <a:rPr sz="2800" b="0">
                 <a:solidFill>
-                  <a:srgbClr val="E6ECF2"/>
-                </a:solidFill>
-                <a:latin typeface="Courier New"/>
-              </a:rPr>
-              <a:t>db.users.updateMany({"birthday" : "10/13/1978"},</a:t>
-            </a:r>
-          </a:p>
-          <a:p>
-            <a:pPr algn="l">
-              <a:lnSpc>
-                <a:spcPct val="100000"/>
-              </a:lnSpc>
-            </a:pPr>
-            <a:r>
-              <a:rPr sz="2800" b="0">
-                <a:solidFill>
-                  <a:srgbClr val="E6ECF2"/>
-                </a:solidFill>
-                <a:latin typeface="Courier New"/>
-              </a:rPr>
-              <a:t>  {"$set" : {"gift" : "Happy Birthday!"}})</a:t>
-            </a:r>
-          </a:p>
-          <a:p>
-            <a:pPr algn="l">
-              <a:lnSpc>
-                <a:spcPct val="100000"/>
-              </a:lnSpc>
-            </a:pPr>
-            <a:r>
-              <a:rPr sz="2800" b="0">
-                <a:solidFill>
-                  <a:srgbClr val="9FE0C9"/>
-                </a:solidFill>
-                <a:latin typeface="Courier New"/>
-              </a:rPr>
-              <a:t>{ acknowledged: true, insertedId: null,</a:t>
-            </a:r>
-          </a:p>
-          <a:p>
-            <a:pPr algn="l">
-              <a:lnSpc>
-                <a:spcPct val="100000"/>
-              </a:lnSpc>
-            </a:pPr>
-            <a:r>
-              <a:rPr sz="2800" b="0">
-                <a:solidFill>
-                  <a:srgbClr val="9FE0C9"/>
-                </a:solidFill>
-                <a:latin typeface="Courier New"/>
-              </a:rPr>
-              <a:t>  matchedCount: 3, modifiedCount: 3,</a:t>
-            </a:r>
-          </a:p>
-          <a:p>
-            <a:pPr algn="l">
-              <a:lnSpc>
-                <a:spcPct val="100000"/>
-              </a:lnSpc>
-            </a:pPr>
-            <a:r>
-              <a:rPr sz="2800" b="0">
-                <a:solidFill>
-                  <a:srgbClr val="9FE0C9"/>
-                </a:solidFill>
-                <a:latin typeface="Courier New"/>
-              </a:rPr>
-              <a:t>  upsertedCount: 0 }</a:t>
-            </a:r>
-          </a:p>
-        </p:txBody>
-      </p:sp>
-      <p:sp>
-        <p:nvSpPr>
-          <p:cNvPr id="6" name="EXEMPT_FOOTER"/>
+                  <a:srgbClr val="4A5868"/>
+                </a:solidFill>
+                <a:latin typeface="Arial"/>
+              </a:rPr>
+              <a:t>Next: 3  AFTER  →</a:t>
+            </a:r>
+          </a:p>
+        </p:txBody>
+      </p:sp>
+      <p:sp>
+        <p:nvSpPr>
+          <p:cNvPr id="7" name="EXEMPT_FOOTER"/>
           <p:cNvSpPr txBox="1"/>
           <p:nvPr/>
         </p:nvSpPr>
@@ -22792,7 +23260,7 @@
       </p:sp>
       <p:sp>
         <p:nvSpPr>
-          <p:cNvPr id="7" name="EXEMPT_FOOTER"/>
+          <p:cNvPr id="8" name="EXEMPT_FOOTER"/>
           <p:cNvSpPr txBox="1"/>
           <p:nvPr/>
         </p:nvSpPr>
@@ -22831,7 +23299,7 @@
       </p:sp>
       <p:sp>
         <p:nvSpPr>
-          <p:cNvPr id="8" name="EXEMPT_PROGRESS"/>
+          <p:cNvPr id="9" name="EXEMPT_PROGRESS"/>
           <p:cNvSpPr txBox="1"/>
           <p:nvPr/>
         </p:nvSpPr>
@@ -22986,7 +23454,7 @@
         <p:spPr>
           <a:xfrm>
             <a:off x="411480" y="1097280"/>
-            <a:ext cx="11368735" cy="4297680"/>
+            <a:ext cx="11368735" cy="4246880"/>
           </a:xfrm>
           <a:prstGeom prst="rect">
             <a:avLst/>
@@ -23030,7 +23498,7 @@
         <p:spPr>
           <a:xfrm>
             <a:off x="557784" y="1188720"/>
-            <a:ext cx="11149279" cy="4187952"/>
+            <a:ext cx="11149279" cy="4137152"/>
           </a:xfrm>
           <a:prstGeom prst="rect">
             <a:avLst/>
@@ -23045,7 +23513,7 @@
           <a:p>
             <a:pPr algn="l">
               <a:lnSpc>
-                <a:spcPct val="100000"/>
+                <a:spcPts val="3200"/>
               </a:lnSpc>
             </a:pPr>
             <a:r>
@@ -23061,7 +23529,7 @@
           <a:p>
             <a:pPr algn="l">
               <a:lnSpc>
-                <a:spcPct val="100000"/>
+                <a:spcPts val="3200"/>
               </a:lnSpc>
             </a:pPr>
             <a:r>
@@ -23077,7 +23545,7 @@
           <a:p>
             <a:pPr algn="l">
               <a:lnSpc>
-                <a:spcPct val="100000"/>
+                <a:spcPts val="3200"/>
               </a:lnSpc>
             </a:pPr>
             <a:r>
@@ -23093,7 +23561,7 @@
           <a:p>
             <a:pPr algn="l">
               <a:lnSpc>
-                <a:spcPct val="100000"/>
+                <a:spcPts val="3200"/>
               </a:lnSpc>
             </a:pPr>
             <a:r>
@@ -23109,7 +23577,7 @@
           <a:p>
             <a:pPr algn="l">
               <a:lnSpc>
-                <a:spcPct val="100000"/>
+                <a:spcPts val="3200"/>
               </a:lnSpc>
             </a:pPr>
             <a:r>
@@ -23143,7 +23611,7 @@
           <a:p>
             <a:pPr algn="l">
               <a:lnSpc>
-                <a:spcPct val="100000"/>
+                <a:spcPts val="3200"/>
               </a:lnSpc>
             </a:pPr>
             <a:r>
@@ -23159,7 +23627,7 @@
           <a:p>
             <a:pPr algn="l">
               <a:lnSpc>
-                <a:spcPct val="100000"/>
+                <a:spcPts val="3200"/>
               </a:lnSpc>
             </a:pPr>
             <a:r>
@@ -23193,7 +23661,7 @@
           <a:p>
             <a:pPr algn="l">
               <a:lnSpc>
-                <a:spcPct val="100000"/>
+                <a:spcPts val="3200"/>
               </a:lnSpc>
             </a:pPr>
             <a:r>
@@ -23209,7 +23677,7 @@
           <a:p>
             <a:pPr algn="l">
               <a:lnSpc>
-                <a:spcPct val="100000"/>
+                <a:spcPts val="3200"/>
               </a:lnSpc>
             </a:pPr>
             <a:r>
@@ -23243,7 +23711,7 @@
           <a:p>
             <a:pPr algn="l">
               <a:lnSpc>
-                <a:spcPct val="100000"/>
+                <a:spcPts val="3200"/>
               </a:lnSpc>
             </a:pPr>
             <a:r>
@@ -23772,7 +24240,7 @@
         </p:nvGraphicFramePr>
         <p:xfrm>
           <a:off x="411480" y="1234439"/>
-          <a:ext cx="11368735" cy="3566160"/>
+          <a:ext cx="11368735" cy="4352540"/>
         </p:xfrm>
         <a:graphic>
           <a:graphicData uri="http://schemas.openxmlformats.org/drawingml/2006/table">
@@ -23785,7 +24253,7 @@
                 <a:gridCol w="5882335"/>
                 <a:gridCol w="2743200"/>
               </a:tblGrid>
-              <a:tr h="713232">
+              <a:tr h="870508">
                 <a:tc>
                   <a:txBody>
                     <a:bodyPr wrap="square" anchor="ctr" lIns="109728" rIns="109728" tIns="109728" bIns="109728"/>
@@ -23868,7 +24336,7 @@
                   </a:tcPr>
                 </a:tc>
               </a:tr>
-              <a:tr h="713232">
+              <a:tr h="870508">
                 <a:tc>
                   <a:txBody>
                     <a:bodyPr wrap="square" anchor="ctr" lIns="109728" rIns="109728" tIns="109728" bIns="109728"/>
@@ -23951,7 +24419,7 @@
                   </a:tcPr>
                 </a:tc>
               </a:tr>
-              <a:tr h="713232">
+              <a:tr h="870508">
                 <a:tc>
                   <a:txBody>
                     <a:bodyPr wrap="square" anchor="ctr" lIns="109728" rIns="109728" tIns="109728" bIns="109728"/>
@@ -24034,7 +24502,7 @@
                   </a:tcPr>
                 </a:tc>
               </a:tr>
-              <a:tr h="713232">
+              <a:tr h="870508">
                 <a:tc>
                   <a:txBody>
                     <a:bodyPr wrap="square" anchor="ctr" lIns="109728" rIns="109728" tIns="109728" bIns="109728"/>
@@ -24117,7 +24585,7 @@
                   </a:tcPr>
                 </a:tc>
               </a:tr>
-              <a:tr h="713232">
+              <a:tr h="870508">
                 <a:tc>
                   <a:txBody>
                     <a:bodyPr wrap="square" anchor="ctr" lIns="109728" rIns="109728" tIns="109728" bIns="109728"/>
@@ -24457,7 +24925,7 @@
         <p:spPr>
           <a:xfrm>
             <a:off x="411480" y="1097280"/>
-            <a:ext cx="11368735" cy="3886200"/>
+            <a:ext cx="11368735" cy="3840480"/>
           </a:xfrm>
           <a:prstGeom prst="rect">
             <a:avLst/>
@@ -24501,7 +24969,7 @@
         <p:spPr>
           <a:xfrm>
             <a:off x="557784" y="1188720"/>
-            <a:ext cx="11149279" cy="3776472"/>
+            <a:ext cx="11149279" cy="3730752"/>
           </a:xfrm>
           <a:prstGeom prst="rect">
             <a:avLst/>
@@ -24516,7 +24984,7 @@
           <a:p>
             <a:pPr algn="l">
               <a:lnSpc>
-                <a:spcPct val="100000"/>
+                <a:spcPts val="3200"/>
               </a:lnSpc>
             </a:pPr>
             <a:r>
@@ -24532,7 +25000,7 @@
           <a:p>
             <a:pPr algn="l">
               <a:lnSpc>
-                <a:spcPct val="100000"/>
+                <a:spcPts val="3200"/>
               </a:lnSpc>
             </a:pPr>
             <a:r>
@@ -24548,7 +25016,7 @@
           <a:p>
             <a:pPr algn="l">
               <a:lnSpc>
-                <a:spcPct val="100000"/>
+                <a:spcPts val="3200"/>
               </a:lnSpc>
             </a:pPr>
             <a:r>
@@ -24564,7 +25032,7 @@
           <a:p>
             <a:pPr algn="l">
               <a:lnSpc>
-                <a:spcPct val="100000"/>
+                <a:spcPts val="3200"/>
               </a:lnSpc>
             </a:pPr>
             <a:r>
@@ -24580,7 +25048,7 @@
           <a:p>
             <a:pPr algn="l">
               <a:lnSpc>
-                <a:spcPct val="100000"/>
+                <a:spcPts val="3200"/>
               </a:lnSpc>
             </a:pPr>
             <a:r>
@@ -24596,7 +25064,7 @@
           <a:p>
             <a:pPr algn="l">
               <a:lnSpc>
-                <a:spcPct val="100000"/>
+                <a:spcPts val="3200"/>
               </a:lnSpc>
             </a:pPr>
             <a:r>
@@ -24612,7 +25080,7 @@
           <a:p>
             <a:pPr algn="l">
               <a:lnSpc>
-                <a:spcPct val="100000"/>
+                <a:spcPts val="3200"/>
               </a:lnSpc>
             </a:pPr>
             <a:r>
@@ -24628,7 +25096,7 @@
           <a:p>
             <a:pPr algn="l">
               <a:lnSpc>
-                <a:spcPct val="100000"/>
+                <a:spcPts val="3200"/>
               </a:lnSpc>
             </a:pPr>
             <a:r>
@@ -24644,7 +25112,7 @@
           <a:p>
             <a:pPr algn="l">
               <a:lnSpc>
-                <a:spcPct val="100000"/>
+                <a:spcPts val="3200"/>
               </a:lnSpc>
             </a:pPr>
             <a:r>
@@ -24951,7 +25419,7 @@
         <p:spPr>
           <a:xfrm>
             <a:off x="411480" y="1097280"/>
-            <a:ext cx="11368735" cy="1005840"/>
+            <a:ext cx="11368735" cy="995679"/>
           </a:xfrm>
           <a:prstGeom prst="rect">
             <a:avLst/>
@@ -24995,7 +25463,7 @@
         <p:spPr>
           <a:xfrm>
             <a:off x="557784" y="1188720"/>
-            <a:ext cx="11149279" cy="896112"/>
+            <a:ext cx="11149279" cy="885951"/>
           </a:xfrm>
           <a:prstGeom prst="rect">
             <a:avLst/>
@@ -25010,7 +25478,7 @@
           <a:p>
             <a:pPr algn="l">
               <a:lnSpc>
-                <a:spcPct val="100000"/>
+                <a:spcPts val="3200"/>
               </a:lnSpc>
             </a:pPr>
             <a:r>
@@ -25035,7 +25503,7 @@
           <a:p>
             <a:pPr algn="l">
               <a:lnSpc>
-                <a:spcPct val="100000"/>
+                <a:spcPts val="3200"/>
               </a:lnSpc>
             </a:pPr>
             <a:r>
@@ -25058,8 +25526,8 @@
         </p:nvSpPr>
         <p:spPr>
           <a:xfrm>
-            <a:off x="411480" y="2212848"/>
-            <a:ext cx="11368735" cy="1828800"/>
+            <a:off x="411480" y="2202688"/>
+            <a:ext cx="11368735" cy="1808479"/>
           </a:xfrm>
           <a:prstGeom prst="rect">
             <a:avLst/>
@@ -25102,8 +25570,8 @@
         </p:nvSpPr>
         <p:spPr>
           <a:xfrm>
-            <a:off x="557784" y="2304288"/>
-            <a:ext cx="11149279" cy="1719072"/>
+            <a:off x="557784" y="2294128"/>
+            <a:ext cx="11149279" cy="1698752"/>
           </a:xfrm>
           <a:prstGeom prst="rect">
             <a:avLst/>
@@ -25118,7 +25586,7 @@
           <a:p>
             <a:pPr algn="l">
               <a:lnSpc>
-                <a:spcPct val="100000"/>
+                <a:spcPts val="3200"/>
               </a:lnSpc>
             </a:pPr>
             <a:r>
@@ -25134,7 +25602,7 @@
           <a:p>
             <a:pPr algn="l">
               <a:lnSpc>
-                <a:spcPct val="100000"/>
+                <a:spcPts val="3200"/>
               </a:lnSpc>
             </a:pPr>
             <a:r>
@@ -25150,7 +25618,7 @@
           <a:p>
             <a:pPr algn="l">
               <a:lnSpc>
-                <a:spcPct val="100000"/>
+                <a:spcPts val="3200"/>
               </a:lnSpc>
             </a:pPr>
             <a:r>
@@ -25166,7 +25634,7 @@
           <a:p>
             <a:pPr algn="l">
               <a:lnSpc>
-                <a:spcPct val="100000"/>
+                <a:spcPts val="3200"/>
               </a:lnSpc>
             </a:pPr>
             <a:r>
@@ -25189,8 +25657,8 @@
         </p:nvSpPr>
         <p:spPr>
           <a:xfrm>
-            <a:off x="411480" y="4151376"/>
-            <a:ext cx="11368735" cy="1005840"/>
+            <a:off x="411480" y="4120895"/>
+            <a:ext cx="11368735" cy="995679"/>
           </a:xfrm>
           <a:prstGeom prst="rect">
             <a:avLst/>
@@ -25233,8 +25701,8 @@
         </p:nvSpPr>
         <p:spPr>
           <a:xfrm>
-            <a:off x="557784" y="4242816"/>
-            <a:ext cx="11149279" cy="896112"/>
+            <a:off x="557784" y="4212335"/>
+            <a:ext cx="11149279" cy="885951"/>
           </a:xfrm>
           <a:prstGeom prst="rect">
             <a:avLst/>
@@ -25249,7 +25717,7 @@
           <a:p>
             <a:pPr algn="l">
               <a:lnSpc>
-                <a:spcPct val="100000"/>
+                <a:spcPts val="3200"/>
               </a:lnSpc>
             </a:pPr>
             <a:r>
@@ -25274,7 +25742,7 @@
           <a:p>
             <a:pPr algn="l">
               <a:lnSpc>
-                <a:spcPct val="100000"/>
+                <a:spcPts val="3200"/>
               </a:lnSpc>
             </a:pPr>
             <a:r>
@@ -25599,7 +26067,7 @@
         <p:spPr>
           <a:xfrm>
             <a:off x="411480" y="1097280"/>
-            <a:ext cx="11368735" cy="1417320"/>
+            <a:ext cx="11368735" cy="1402080"/>
           </a:xfrm>
           <a:prstGeom prst="rect">
             <a:avLst/>
@@ -25643,7 +26111,7 @@
         <p:spPr>
           <a:xfrm>
             <a:off x="557784" y="1188720"/>
-            <a:ext cx="11149279" cy="1307592"/>
+            <a:ext cx="11149279" cy="1292351"/>
           </a:xfrm>
           <a:prstGeom prst="rect">
             <a:avLst/>
@@ -25658,7 +26126,7 @@
           <a:p>
             <a:pPr algn="l">
               <a:lnSpc>
-                <a:spcPct val="100000"/>
+                <a:spcPts val="3200"/>
               </a:lnSpc>
             </a:pPr>
             <a:r>
@@ -25674,7 +26142,7 @@
           <a:p>
             <a:pPr algn="l">
               <a:lnSpc>
-                <a:spcPct val="100000"/>
+                <a:spcPts val="3200"/>
               </a:lnSpc>
             </a:pPr>
             <a:r>
@@ -25690,7 +26158,7 @@
           <a:p>
             <a:pPr algn="l">
               <a:lnSpc>
-                <a:spcPct val="100000"/>
+                <a:spcPts val="3200"/>
               </a:lnSpc>
             </a:pPr>
             <a:r>
@@ -25713,8 +26181,8 @@
         </p:nvSpPr>
         <p:spPr>
           <a:xfrm>
-            <a:off x="411480" y="2624328"/>
-            <a:ext cx="11368735" cy="2651760"/>
+            <a:off x="411480" y="2609088"/>
+            <a:ext cx="11368735" cy="2621280"/>
           </a:xfrm>
           <a:prstGeom prst="rect">
             <a:avLst/>
@@ -25757,8 +26225,8 @@
         </p:nvSpPr>
         <p:spPr>
           <a:xfrm>
-            <a:off x="557784" y="2715768"/>
-            <a:ext cx="11149279" cy="2542032"/>
+            <a:off x="557784" y="2700528"/>
+            <a:ext cx="11149279" cy="2511552"/>
           </a:xfrm>
           <a:prstGeom prst="rect">
             <a:avLst/>
@@ -25773,7 +26241,7 @@
           <a:p>
             <a:pPr algn="l">
               <a:lnSpc>
-                <a:spcPct val="100000"/>
+                <a:spcPts val="3200"/>
               </a:lnSpc>
             </a:pPr>
             <a:r>
@@ -25789,7 +26257,7 @@
           <a:p>
             <a:pPr algn="l">
               <a:lnSpc>
-                <a:spcPct val="100000"/>
+                <a:spcPts val="3200"/>
               </a:lnSpc>
             </a:pPr>
             <a:r>
@@ -25805,7 +26273,7 @@
           <a:p>
             <a:pPr algn="l">
               <a:lnSpc>
-                <a:spcPct val="100000"/>
+                <a:spcPts val="3200"/>
               </a:lnSpc>
             </a:pPr>
             <a:r>
@@ -25821,7 +26289,7 @@
           <a:p>
             <a:pPr algn="l">
               <a:lnSpc>
-                <a:spcPct val="100000"/>
+                <a:spcPts val="3200"/>
               </a:lnSpc>
             </a:pPr>
             <a:r>
@@ -25837,7 +26305,7 @@
           <a:p>
             <a:pPr algn="l">
               <a:lnSpc>
-                <a:spcPct val="100000"/>
+                <a:spcPts val="3200"/>
               </a:lnSpc>
             </a:pPr>
             <a:r>
@@ -25853,7 +26321,7 @@
           <a:p>
             <a:pPr algn="l">
               <a:lnSpc>
-                <a:spcPct val="100000"/>
+                <a:spcPts val="3200"/>
               </a:lnSpc>
             </a:pPr>
             <a:r>
@@ -26160,7 +26628,7 @@
         <p:spPr>
           <a:xfrm>
             <a:off x="411480" y="1097280"/>
-            <a:ext cx="11368735" cy="1417320"/>
+            <a:ext cx="11368735" cy="1402080"/>
           </a:xfrm>
           <a:prstGeom prst="rect">
             <a:avLst/>
@@ -26204,7 +26672,7 @@
         <p:spPr>
           <a:xfrm>
             <a:off x="557784" y="1188720"/>
-            <a:ext cx="11149279" cy="1307592"/>
+            <a:ext cx="11149279" cy="1292351"/>
           </a:xfrm>
           <a:prstGeom prst="rect">
             <a:avLst/>
@@ -26219,7 +26687,7 @@
           <a:p>
             <a:pPr algn="l">
               <a:lnSpc>
-                <a:spcPct val="100000"/>
+                <a:spcPts val="3200"/>
               </a:lnSpc>
             </a:pPr>
             <a:r>
@@ -26235,7 +26703,7 @@
           <a:p>
             <a:pPr algn="l">
               <a:lnSpc>
-                <a:spcPct val="100000"/>
+                <a:spcPts val="3200"/>
               </a:lnSpc>
             </a:pPr>
             <a:r>
@@ -26251,7 +26719,7 @@
           <a:p>
             <a:pPr algn="l">
               <a:lnSpc>
-                <a:spcPct val="100000"/>
+                <a:spcPts val="3200"/>
               </a:lnSpc>
             </a:pPr>
             <a:r>
@@ -26274,8 +26742,8 @@
         </p:nvSpPr>
         <p:spPr>
           <a:xfrm>
-            <a:off x="411480" y="2624328"/>
-            <a:ext cx="11368735" cy="2651760"/>
+            <a:off x="411480" y="2609088"/>
+            <a:ext cx="11368735" cy="2621280"/>
           </a:xfrm>
           <a:prstGeom prst="rect">
             <a:avLst/>
@@ -26318,8 +26786,8 @@
         </p:nvSpPr>
         <p:spPr>
           <a:xfrm>
-            <a:off x="557784" y="2715768"/>
-            <a:ext cx="11149279" cy="2542032"/>
+            <a:off x="557784" y="2700528"/>
+            <a:ext cx="11149279" cy="2511552"/>
           </a:xfrm>
           <a:prstGeom prst="rect">
             <a:avLst/>
@@ -26334,7 +26802,7 @@
           <a:p>
             <a:pPr algn="l">
               <a:lnSpc>
-                <a:spcPct val="100000"/>
+                <a:spcPts val="3200"/>
               </a:lnSpc>
             </a:pPr>
             <a:r>
@@ -26350,7 +26818,7 @@
           <a:p>
             <a:pPr algn="l">
               <a:lnSpc>
-                <a:spcPct val="100000"/>
+                <a:spcPts val="3200"/>
               </a:lnSpc>
             </a:pPr>
             <a:r>
@@ -26366,7 +26834,7 @@
           <a:p>
             <a:pPr algn="l">
               <a:lnSpc>
-                <a:spcPct val="100000"/>
+                <a:spcPts val="3200"/>
               </a:lnSpc>
             </a:pPr>
             <a:r>
@@ -26382,7 +26850,7 @@
           <a:p>
             <a:pPr algn="l">
               <a:lnSpc>
-                <a:spcPct val="100000"/>
+                <a:spcPts val="3200"/>
               </a:lnSpc>
             </a:pPr>
             <a:r>
@@ -26398,7 +26866,7 @@
           <a:p>
             <a:pPr algn="l">
               <a:lnSpc>
-                <a:spcPct val="100000"/>
+                <a:spcPts val="3200"/>
               </a:lnSpc>
             </a:pPr>
             <a:r>
@@ -26414,7 +26882,7 @@
           <a:p>
             <a:pPr algn="l">
               <a:lnSpc>
-                <a:spcPct val="100000"/>
+                <a:spcPts val="3200"/>
               </a:lnSpc>
             </a:pPr>
             <a:r>
@@ -26721,7 +27189,7 @@
         <p:spPr>
           <a:xfrm>
             <a:off x="411480" y="1097280"/>
-            <a:ext cx="11368735" cy="3063240"/>
+            <a:ext cx="11368735" cy="3027680"/>
           </a:xfrm>
           <a:prstGeom prst="rect">
             <a:avLst/>
@@ -26765,7 +27233,7 @@
         <p:spPr>
           <a:xfrm>
             <a:off x="557784" y="1188720"/>
-            <a:ext cx="11149279" cy="2953512"/>
+            <a:ext cx="11149279" cy="2917951"/>
           </a:xfrm>
           <a:prstGeom prst="rect">
             <a:avLst/>
@@ -26780,7 +27248,7 @@
           <a:p>
             <a:pPr algn="l">
               <a:lnSpc>
-                <a:spcPct val="100000"/>
+                <a:spcPts val="3200"/>
               </a:lnSpc>
             </a:pPr>
             <a:r>
@@ -26796,7 +27264,7 @@
           <a:p>
             <a:pPr algn="l">
               <a:lnSpc>
-                <a:spcPct val="100000"/>
+                <a:spcPts val="3200"/>
               </a:lnSpc>
             </a:pPr>
             <a:r>
@@ -26812,7 +27280,7 @@
           <a:p>
             <a:pPr algn="l">
               <a:lnSpc>
-                <a:spcPct val="100000"/>
+                <a:spcPts val="3200"/>
               </a:lnSpc>
             </a:pPr>
             <a:r>
@@ -26828,7 +27296,7 @@
           <a:p>
             <a:pPr algn="l">
               <a:lnSpc>
-                <a:spcPct val="100000"/>
+                <a:spcPts val="3200"/>
               </a:lnSpc>
             </a:pPr>
             <a:r>
@@ -26844,7 +27312,7 @@
           <a:p>
             <a:pPr algn="l">
               <a:lnSpc>
-                <a:spcPct val="100000"/>
+                <a:spcPts val="3200"/>
               </a:lnSpc>
             </a:pPr>
             <a:r>
@@ -26860,7 +27328,7 @@
           <a:p>
             <a:pPr algn="l">
               <a:lnSpc>
-                <a:spcPct val="100000"/>
+                <a:spcPts val="3200"/>
               </a:lnSpc>
             </a:pPr>
             <a:r>
@@ -26876,7 +27344,7 @@
           <a:p>
             <a:pPr algn="l">
               <a:lnSpc>
-                <a:spcPct val="100000"/>
+                <a:spcPts val="3200"/>
               </a:lnSpc>
             </a:pPr>
             <a:r>
@@ -27404,7 +27872,7 @@
         <p:spPr>
           <a:xfrm>
             <a:off x="411480" y="1097280"/>
-            <a:ext cx="11368735" cy="3886200"/>
+            <a:ext cx="11368735" cy="3840480"/>
           </a:xfrm>
           <a:prstGeom prst="rect">
             <a:avLst/>
@@ -27448,7 +27916,7 @@
         <p:spPr>
           <a:xfrm>
             <a:off x="557784" y="1188720"/>
-            <a:ext cx="11149279" cy="3776472"/>
+            <a:ext cx="11149279" cy="3730752"/>
           </a:xfrm>
           <a:prstGeom prst="rect">
             <a:avLst/>
@@ -27463,7 +27931,7 @@
           <a:p>
             <a:pPr algn="l">
               <a:lnSpc>
-                <a:spcPct val="100000"/>
+                <a:spcPts val="3200"/>
               </a:lnSpc>
             </a:pPr>
             <a:r>
@@ -27479,7 +27947,7 @@
           <a:p>
             <a:pPr algn="l">
               <a:lnSpc>
-                <a:spcPct val="100000"/>
+                <a:spcPts val="3200"/>
               </a:lnSpc>
             </a:pPr>
             <a:r>
@@ -27495,7 +27963,7 @@
           <a:p>
             <a:pPr algn="l">
               <a:lnSpc>
-                <a:spcPct val="100000"/>
+                <a:spcPts val="3200"/>
               </a:lnSpc>
             </a:pPr>
             <a:r>
@@ -27511,7 +27979,7 @@
           <a:p>
             <a:pPr algn="l">
               <a:lnSpc>
-                <a:spcPct val="100000"/>
+                <a:spcPts val="3200"/>
               </a:lnSpc>
             </a:pPr>
             <a:r>
@@ -27527,7 +27995,7 @@
           <a:p>
             <a:pPr algn="l">
               <a:lnSpc>
-                <a:spcPct val="100000"/>
+                <a:spcPts val="3200"/>
               </a:lnSpc>
             </a:pPr>
             <a:r>
@@ -27543,7 +28011,7 @@
           <a:p>
             <a:pPr algn="l">
               <a:lnSpc>
-                <a:spcPct val="100000"/>
+                <a:spcPts val="3200"/>
               </a:lnSpc>
             </a:pPr>
             <a:r>
@@ -27559,7 +28027,7 @@
           <a:p>
             <a:pPr algn="l">
               <a:lnSpc>
-                <a:spcPct val="100000"/>
+                <a:spcPts val="3200"/>
               </a:lnSpc>
             </a:pPr>
             <a:r>
@@ -27575,7 +28043,7 @@
           <a:p>
             <a:pPr algn="l">
               <a:lnSpc>
-                <a:spcPct val="100000"/>
+                <a:spcPts val="3200"/>
               </a:lnSpc>
             </a:pPr>
             <a:r>
@@ -27591,7 +28059,7 @@
           <a:p>
             <a:pPr algn="l">
               <a:lnSpc>
-                <a:spcPct val="100000"/>
+                <a:spcPts val="3200"/>
               </a:lnSpc>
             </a:pPr>
             <a:r>
@@ -27898,7 +28366,7 @@
         <p:spPr>
           <a:xfrm>
             <a:off x="411480" y="1097280"/>
-            <a:ext cx="11368735" cy="3474720"/>
+            <a:ext cx="11368735" cy="3434080"/>
           </a:xfrm>
           <a:prstGeom prst="rect">
             <a:avLst/>
@@ -27942,7 +28410,7 @@
         <p:spPr>
           <a:xfrm>
             <a:off x="557784" y="1188720"/>
-            <a:ext cx="11149279" cy="3364992"/>
+            <a:ext cx="11149279" cy="3324352"/>
           </a:xfrm>
           <a:prstGeom prst="rect">
             <a:avLst/>
@@ -27957,7 +28425,7 @@
           <a:p>
             <a:pPr algn="l">
               <a:lnSpc>
-                <a:spcPct val="100000"/>
+                <a:spcPts val="3200"/>
               </a:lnSpc>
             </a:pPr>
             <a:r>
@@ -27973,7 +28441,7 @@
           <a:p>
             <a:pPr algn="l">
               <a:lnSpc>
-                <a:spcPct val="100000"/>
+                <a:spcPts val="3200"/>
               </a:lnSpc>
             </a:pPr>
             <a:r>
@@ -27989,7 +28457,7 @@
           <a:p>
             <a:pPr algn="l">
               <a:lnSpc>
-                <a:spcPct val="100000"/>
+                <a:spcPts val="3200"/>
               </a:lnSpc>
             </a:pPr>
             <a:r>
@@ -28005,7 +28473,7 @@
           <a:p>
             <a:pPr algn="l">
               <a:lnSpc>
-                <a:spcPct val="100000"/>
+                <a:spcPts val="3200"/>
               </a:lnSpc>
             </a:pPr>
             <a:r>
@@ -28021,7 +28489,7 @@
           <a:p>
             <a:pPr algn="l">
               <a:lnSpc>
-                <a:spcPct val="100000"/>
+                <a:spcPts val="3200"/>
               </a:lnSpc>
             </a:pPr>
             <a:r>
@@ -28037,7 +28505,7 @@
           <a:p>
             <a:pPr algn="l">
               <a:lnSpc>
-                <a:spcPct val="100000"/>
+                <a:spcPts val="3200"/>
               </a:lnSpc>
             </a:pPr>
             <a:r>
@@ -28053,7 +28521,7 @@
           <a:p>
             <a:pPr algn="l">
               <a:lnSpc>
-                <a:spcPct val="100000"/>
+                <a:spcPts val="3200"/>
               </a:lnSpc>
             </a:pPr>
             <a:r>
@@ -28069,7 +28537,7 @@
           <a:p>
             <a:pPr algn="l">
               <a:lnSpc>
-                <a:spcPct val="100000"/>
+                <a:spcPts val="3200"/>
               </a:lnSpc>
             </a:pPr>
             <a:r>
@@ -28376,7 +28844,7 @@
         <p:spPr>
           <a:xfrm>
             <a:off x="411480" y="1097280"/>
-            <a:ext cx="11368735" cy="3063240"/>
+            <a:ext cx="11368735" cy="3027680"/>
           </a:xfrm>
           <a:prstGeom prst="rect">
             <a:avLst/>
@@ -28420,7 +28888,7 @@
         <p:spPr>
           <a:xfrm>
             <a:off x="557784" y="1188720"/>
-            <a:ext cx="11149279" cy="2953512"/>
+            <a:ext cx="11149279" cy="2917951"/>
           </a:xfrm>
           <a:prstGeom prst="rect">
             <a:avLst/>
@@ -28435,7 +28903,7 @@
           <a:p>
             <a:pPr algn="l">
               <a:lnSpc>
-                <a:spcPct val="100000"/>
+                <a:spcPts val="3200"/>
               </a:lnSpc>
             </a:pPr>
             <a:r>
@@ -28451,7 +28919,7 @@
           <a:p>
             <a:pPr algn="l">
               <a:lnSpc>
-                <a:spcPct val="100000"/>
+                <a:spcPts val="3200"/>
               </a:lnSpc>
             </a:pPr>
             <a:r>
@@ -28467,7 +28935,7 @@
           <a:p>
             <a:pPr algn="l">
               <a:lnSpc>
-                <a:spcPct val="100000"/>
+                <a:spcPts val="3200"/>
               </a:lnSpc>
             </a:pPr>
             <a:r>
@@ -28483,7 +28951,7 @@
           <a:p>
             <a:pPr algn="l">
               <a:lnSpc>
-                <a:spcPct val="100000"/>
+                <a:spcPts val="3200"/>
               </a:lnSpc>
             </a:pPr>
             <a:r>
@@ -28499,7 +28967,7 @@
           <a:p>
             <a:pPr algn="l">
               <a:lnSpc>
-                <a:spcPct val="100000"/>
+                <a:spcPts val="3200"/>
               </a:lnSpc>
             </a:pPr>
             <a:r>
@@ -28515,7 +28983,7 @@
           <a:p>
             <a:pPr algn="l">
               <a:lnSpc>
-                <a:spcPct val="100000"/>
+                <a:spcPts val="3200"/>
               </a:lnSpc>
             </a:pPr>
             <a:r>
@@ -28531,7 +28999,7 @@
           <a:p>
             <a:pPr algn="l">
               <a:lnSpc>
-                <a:spcPct val="100000"/>
+                <a:spcPts val="3200"/>
               </a:lnSpc>
             </a:pPr>
             <a:r>
@@ -28838,7 +29306,7 @@
         <p:spPr>
           <a:xfrm>
             <a:off x="411480" y="1097280"/>
-            <a:ext cx="11368735" cy="3063240"/>
+            <a:ext cx="11368735" cy="3027680"/>
           </a:xfrm>
           <a:prstGeom prst="rect">
             <a:avLst/>
@@ -28882,7 +29350,7 @@
         <p:spPr>
           <a:xfrm>
             <a:off x="557784" y="1188720"/>
-            <a:ext cx="11149279" cy="2953512"/>
+            <a:ext cx="11149279" cy="2917951"/>
           </a:xfrm>
           <a:prstGeom prst="rect">
             <a:avLst/>
@@ -28897,7 +29365,7 @@
           <a:p>
             <a:pPr algn="l">
               <a:lnSpc>
-                <a:spcPct val="100000"/>
+                <a:spcPts val="3200"/>
               </a:lnSpc>
             </a:pPr>
             <a:r>
@@ -28913,7 +29381,7 @@
           <a:p>
             <a:pPr algn="l">
               <a:lnSpc>
-                <a:spcPct val="100000"/>
+                <a:spcPts val="3200"/>
               </a:lnSpc>
             </a:pPr>
             <a:r>
@@ -28929,7 +29397,7 @@
           <a:p>
             <a:pPr algn="l">
               <a:lnSpc>
-                <a:spcPct val="100000"/>
+                <a:spcPts val="3200"/>
               </a:lnSpc>
             </a:pPr>
             <a:r>
@@ -28945,7 +29413,7 @@
           <a:p>
             <a:pPr algn="l">
               <a:lnSpc>
-                <a:spcPct val="100000"/>
+                <a:spcPts val="3200"/>
               </a:lnSpc>
             </a:pPr>
             <a:r>
@@ -28961,7 +29429,7 @@
           <a:p>
             <a:pPr algn="l">
               <a:lnSpc>
-                <a:spcPct val="100000"/>
+                <a:spcPts val="3200"/>
               </a:lnSpc>
             </a:pPr>
             <a:r>
@@ -28977,7 +29445,7 @@
           <a:p>
             <a:pPr algn="l">
               <a:lnSpc>
-                <a:spcPct val="100000"/>
+                <a:spcPts val="3200"/>
               </a:lnSpc>
             </a:pPr>
             <a:r>
@@ -28993,7 +29461,7 @@
           <a:p>
             <a:pPr algn="l">
               <a:lnSpc>
-                <a:spcPct val="100000"/>
+                <a:spcPts val="3200"/>
               </a:lnSpc>
             </a:pPr>
             <a:r>
@@ -29300,7 +29768,7 @@
         <p:spPr>
           <a:xfrm>
             <a:off x="411480" y="1097280"/>
-            <a:ext cx="11368735" cy="3063240"/>
+            <a:ext cx="11368735" cy="3027680"/>
           </a:xfrm>
           <a:prstGeom prst="rect">
             <a:avLst/>
@@ -29344,7 +29812,7 @@
         <p:spPr>
           <a:xfrm>
             <a:off x="557784" y="1188720"/>
-            <a:ext cx="11149279" cy="2953512"/>
+            <a:ext cx="11149279" cy="2917951"/>
           </a:xfrm>
           <a:prstGeom prst="rect">
             <a:avLst/>
@@ -29359,7 +29827,7 @@
           <a:p>
             <a:pPr algn="l">
               <a:lnSpc>
-                <a:spcPct val="100000"/>
+                <a:spcPts val="3200"/>
               </a:lnSpc>
             </a:pPr>
             <a:r>
@@ -29375,7 +29843,7 @@
           <a:p>
             <a:pPr algn="l">
               <a:lnSpc>
-                <a:spcPct val="100000"/>
+                <a:spcPts val="3200"/>
               </a:lnSpc>
             </a:pPr>
             <a:r>
@@ -29391,7 +29859,7 @@
           <a:p>
             <a:pPr algn="l">
               <a:lnSpc>
-                <a:spcPct val="100000"/>
+                <a:spcPts val="3200"/>
               </a:lnSpc>
             </a:pPr>
             <a:r>
@@ -29407,7 +29875,7 @@
           <a:p>
             <a:pPr algn="l">
               <a:lnSpc>
-                <a:spcPct val="100000"/>
+                <a:spcPts val="3200"/>
               </a:lnSpc>
             </a:pPr>
             <a:r>
@@ -29423,7 +29891,7 @@
           <a:p>
             <a:pPr algn="l">
               <a:lnSpc>
-                <a:spcPct val="100000"/>
+                <a:spcPts val="3200"/>
               </a:lnSpc>
             </a:pPr>
             <a:r>
@@ -29439,7 +29907,7 @@
           <a:p>
             <a:pPr algn="l">
               <a:lnSpc>
-                <a:spcPct val="100000"/>
+                <a:spcPts val="3200"/>
               </a:lnSpc>
             </a:pPr>
             <a:r>
@@ -29455,7 +29923,7 @@
           <a:p>
             <a:pPr algn="l">
               <a:lnSpc>
-                <a:spcPct val="100000"/>
+                <a:spcPts val="3200"/>
               </a:lnSpc>
             </a:pPr>
             <a:r>
@@ -29983,7 +30451,7 @@
         <p:spPr>
           <a:xfrm>
             <a:off x="411480" y="1097280"/>
-            <a:ext cx="11368735" cy="1005840"/>
+            <a:ext cx="11368735" cy="995679"/>
           </a:xfrm>
           <a:prstGeom prst="rect">
             <a:avLst/>
@@ -30027,7 +30495,7 @@
         <p:spPr>
           <a:xfrm>
             <a:off x="557784" y="1188720"/>
-            <a:ext cx="11149279" cy="896112"/>
+            <a:ext cx="11149279" cy="885951"/>
           </a:xfrm>
           <a:prstGeom prst="rect">
             <a:avLst/>
@@ -30042,49 +30510,88 @@
           <a:p>
             <a:pPr algn="l">
               <a:lnSpc>
+                <a:spcPts val="3200"/>
+              </a:lnSpc>
+            </a:pPr>
+            <a:r>
+              <a:rPr sz="2800" b="1">
+                <a:solidFill>
+                  <a:srgbClr val="F2B27A"/>
+                </a:solidFill>
+                <a:latin typeface="Arial"/>
+              </a:rPr>
+              <a:t>1  BEFORE</a:t>
+            </a:r>
+            <a:r>
+              <a:rPr sz="2800" b="0">
+                <a:solidFill>
+                  <a:srgbClr val="8FA3B8"/>
+                </a:solidFill>
+                <a:latin typeface="Courier New"/>
+              </a:rPr>
+              <a:t>   db.movies.find({}, {"_id" : 0})</a:t>
+            </a:r>
+          </a:p>
+          <a:p>
+            <a:pPr algn="l">
+              <a:lnSpc>
+                <a:spcPts val="3200"/>
+              </a:lnSpc>
+            </a:pPr>
+            <a:r>
+              <a:rPr sz="2800" b="0">
+                <a:solidFill>
+                  <a:srgbClr val="9FE0C9"/>
+                </a:solidFill>
+                <a:latin typeface="Courier New"/>
+              </a:rPr>
+              <a:t>[ { title: 'Stand by Me' } ]</a:t>
+            </a:r>
+          </a:p>
+        </p:txBody>
+      </p:sp>
+      <p:sp>
+        <p:nvSpPr>
+          <p:cNvPr id="6" name="TextBox 5"/>
+          <p:cNvSpPr txBox="1"/>
+          <p:nvPr/>
+        </p:nvSpPr>
+        <p:spPr>
+          <a:xfrm>
+            <a:off x="411480" y="5696712"/>
+            <a:ext cx="11368735" cy="566928"/>
+          </a:xfrm>
+          <a:prstGeom prst="rect">
+            <a:avLst/>
+          </a:prstGeom>
+          <a:noFill/>
+        </p:spPr>
+        <p:txBody>
+          <a:bodyPr wrap="square" anchor="ctr" lIns="164592" rIns="164592" tIns="164592" bIns="164592">
+            <a:spAutoFit/>
+          </a:bodyPr>
+          <a:lstStyle/>
+          <a:p>
+            <a:pPr algn="r">
+              <a:lnSpc>
                 <a:spcPct val="100000"/>
               </a:lnSpc>
             </a:pPr>
             <a:r>
-              <a:rPr sz="2800" b="1">
-                <a:solidFill>
-                  <a:srgbClr val="F2B27A"/>
-                </a:solidFill>
-                <a:latin typeface="Arial"/>
-              </a:rPr>
-              <a:t>1  BEFORE</a:t>
-            </a:r>
-            <a:r>
               <a:rPr sz="2800" b="0">
                 <a:solidFill>
-                  <a:srgbClr val="8FA3B8"/>
-                </a:solidFill>
-                <a:latin typeface="Courier New"/>
-              </a:rPr>
-              <a:t>   db.movies.find({}, {"_id" : 0})</a:t>
-            </a:r>
-          </a:p>
-          <a:p>
-            <a:pPr algn="l">
-              <a:lnSpc>
-                <a:spcPct val="100000"/>
-              </a:lnSpc>
-            </a:pPr>
-            <a:r>
-              <a:rPr sz="2800" b="0">
-                <a:solidFill>
-                  <a:srgbClr val="9FE0C9"/>
-                </a:solidFill>
-                <a:latin typeface="Courier New"/>
-              </a:rPr>
-              <a:t>[ { title: 'Stand by Me' } ]</a:t>
-            </a:r>
-          </a:p>
-        </p:txBody>
-      </p:sp>
-      <p:sp>
-        <p:nvSpPr>
-          <p:cNvPr id="6" name="EXEMPT_FOOTER"/>
+                  <a:srgbClr val="4A5868"/>
+                </a:solidFill>
+                <a:latin typeface="Arial"/>
+              </a:rPr>
+              <a:t>Next: 2  COMMAND → REPLY  →</a:t>
+            </a:r>
+          </a:p>
+        </p:txBody>
+      </p:sp>
+      <p:sp>
+        <p:nvSpPr>
+          <p:cNvPr id="7" name="EXEMPT_FOOTER"/>
           <p:cNvSpPr txBox="1"/>
           <p:nvPr/>
         </p:nvSpPr>
@@ -30123,7 +30630,7 @@
       </p:sp>
       <p:sp>
         <p:nvSpPr>
-          <p:cNvPr id="7" name="EXEMPT_FOOTER"/>
+          <p:cNvPr id="8" name="EXEMPT_FOOTER"/>
           <p:cNvSpPr txBox="1"/>
           <p:nvPr/>
         </p:nvSpPr>
@@ -30162,7 +30669,7 @@
       </p:sp>
       <p:sp>
         <p:nvSpPr>
-          <p:cNvPr id="8" name="EXEMPT_PROGRESS"/>
+          <p:cNvPr id="9" name="EXEMPT_PROGRESS"/>
           <p:cNvSpPr txBox="1"/>
           <p:nvPr/>
         </p:nvSpPr>
@@ -30317,7 +30824,7 @@
         <p:spPr>
           <a:xfrm>
             <a:off x="411480" y="1097280"/>
-            <a:ext cx="11368735" cy="1005840"/>
+            <a:ext cx="11368735" cy="995679"/>
           </a:xfrm>
           <a:prstGeom prst="rect">
             <a:avLst/>
@@ -30361,7 +30868,7 @@
         <p:spPr>
           <a:xfrm>
             <a:off x="557784" y="1188720"/>
-            <a:ext cx="11149279" cy="896112"/>
+            <a:ext cx="11149279" cy="885951"/>
           </a:xfrm>
           <a:prstGeom prst="rect">
             <a:avLst/>
@@ -30376,7 +30883,7 @@
           <a:p>
             <a:pPr algn="l">
               <a:lnSpc>
-                <a:spcPct val="100000"/>
+                <a:spcPts val="3200"/>
               </a:lnSpc>
             </a:pPr>
             <a:r>
@@ -30401,7 +30908,7 @@
           <a:p>
             <a:pPr algn="l">
               <a:lnSpc>
-                <a:spcPct val="100000"/>
+                <a:spcPts val="3200"/>
               </a:lnSpc>
             </a:pPr>
             <a:r>
@@ -30424,8 +30931,8 @@
         </p:nvSpPr>
         <p:spPr>
           <a:xfrm>
-            <a:off x="411480" y="2212848"/>
-            <a:ext cx="11368735" cy="3886200"/>
+            <a:off x="411480" y="2202688"/>
+            <a:ext cx="11368735" cy="3840480"/>
           </a:xfrm>
           <a:prstGeom prst="rect">
             <a:avLst/>
@@ -30468,8 +30975,8 @@
         </p:nvSpPr>
         <p:spPr>
           <a:xfrm>
-            <a:off x="557784" y="2304288"/>
-            <a:ext cx="11149279" cy="3776472"/>
+            <a:off x="557784" y="2294128"/>
+            <a:ext cx="11149279" cy="3730752"/>
           </a:xfrm>
           <a:prstGeom prst="rect">
             <a:avLst/>
@@ -30484,7 +30991,7 @@
           <a:p>
             <a:pPr algn="l">
               <a:lnSpc>
-                <a:spcPct val="100000"/>
+                <a:spcPts val="3200"/>
               </a:lnSpc>
             </a:pPr>
             <a:r>
@@ -30500,7 +31007,7 @@
           <a:p>
             <a:pPr algn="l">
               <a:lnSpc>
-                <a:spcPct val="100000"/>
+                <a:spcPts val="3200"/>
               </a:lnSpc>
             </a:pPr>
             <a:r>
@@ -30516,7 +31023,7 @@
           <a:p>
             <a:pPr algn="l">
               <a:lnSpc>
-                <a:spcPct val="100000"/>
+                <a:spcPts val="3200"/>
               </a:lnSpc>
             </a:pPr>
             <a:r>
@@ -30532,7 +31039,7 @@
           <a:p>
             <a:pPr algn="l">
               <a:lnSpc>
-                <a:spcPct val="100000"/>
+                <a:spcPts val="3200"/>
               </a:lnSpc>
             </a:pPr>
             <a:r>
@@ -30548,7 +31055,7 @@
           <a:p>
             <a:pPr algn="l">
               <a:lnSpc>
-                <a:spcPct val="100000"/>
+                <a:spcPts val="3200"/>
               </a:lnSpc>
             </a:pPr>
             <a:r>
@@ -30564,7 +31071,7 @@
           <a:p>
             <a:pPr algn="l">
               <a:lnSpc>
-                <a:spcPct val="100000"/>
+                <a:spcPts val="3200"/>
               </a:lnSpc>
             </a:pPr>
             <a:r>
@@ -30580,7 +31087,7 @@
           <a:p>
             <a:pPr algn="l">
               <a:lnSpc>
-                <a:spcPct val="100000"/>
+                <a:spcPts val="3200"/>
               </a:lnSpc>
             </a:pPr>
             <a:r>
@@ -30596,7 +31103,7 @@
           <a:p>
             <a:pPr algn="l">
               <a:lnSpc>
-                <a:spcPct val="100000"/>
+                <a:spcPts val="3200"/>
               </a:lnSpc>
             </a:pPr>
             <a:r>
@@ -30612,7 +31119,7 @@
           <a:p>
             <a:pPr algn="l">
               <a:lnSpc>
-                <a:spcPct val="100000"/>
+                <a:spcPts val="3200"/>
               </a:lnSpc>
             </a:pPr>
             <a:r>
@@ -30862,7 +31369,7 @@
         <p:spPr>
           <a:xfrm>
             <a:off x="411480" y="1097280"/>
-            <a:ext cx="11368735" cy="3886200"/>
+            <a:ext cx="11368735" cy="3840480"/>
           </a:xfrm>
           <a:prstGeom prst="rect">
             <a:avLst/>
@@ -30906,7 +31413,7 @@
         <p:spPr>
           <a:xfrm>
             <a:off x="557784" y="1188720"/>
-            <a:ext cx="11149279" cy="3776472"/>
+            <a:ext cx="11149279" cy="3730752"/>
           </a:xfrm>
           <a:prstGeom prst="rect">
             <a:avLst/>
@@ -30921,7 +31428,7 @@
           <a:p>
             <a:pPr algn="l">
               <a:lnSpc>
-                <a:spcPct val="100000"/>
+                <a:spcPts val="3200"/>
               </a:lnSpc>
             </a:pPr>
             <a:r>
@@ -30946,7 +31453,7 @@
           <a:p>
             <a:pPr algn="l">
               <a:lnSpc>
-                <a:spcPct val="100000"/>
+                <a:spcPts val="3200"/>
               </a:lnSpc>
             </a:pPr>
             <a:r>
@@ -30962,7 +31469,7 @@
           <a:p>
             <a:pPr algn="l">
               <a:lnSpc>
-                <a:spcPct val="100000"/>
+                <a:spcPts val="3200"/>
               </a:lnSpc>
             </a:pPr>
             <a:r>
@@ -30996,7 +31503,7 @@
           <a:p>
             <a:pPr algn="l">
               <a:lnSpc>
-                <a:spcPct val="100000"/>
+                <a:spcPts val="3200"/>
               </a:lnSpc>
             </a:pPr>
             <a:r>
@@ -31012,7 +31519,7 @@
           <a:p>
             <a:pPr algn="l">
               <a:lnSpc>
-                <a:spcPct val="100000"/>
+                <a:spcPts val="3200"/>
               </a:lnSpc>
             </a:pPr>
             <a:r>
@@ -31028,7 +31535,7 @@
           <a:p>
             <a:pPr algn="l">
               <a:lnSpc>
-                <a:spcPct val="100000"/>
+                <a:spcPts val="3200"/>
               </a:lnSpc>
             </a:pPr>
             <a:r>
@@ -31053,7 +31560,7 @@
           <a:p>
             <a:pPr algn="l">
               <a:lnSpc>
-                <a:spcPct val="100000"/>
+                <a:spcPts val="3200"/>
               </a:lnSpc>
             </a:pPr>
             <a:r>
@@ -31069,7 +31576,7 @@
           <a:p>
             <a:pPr algn="l">
               <a:lnSpc>
-                <a:spcPct val="100000"/>
+                <a:spcPts val="3200"/>
               </a:lnSpc>
             </a:pPr>
             <a:r>
@@ -31103,7 +31610,7 @@
           <a:p>
             <a:pPr algn="l">
               <a:lnSpc>
-                <a:spcPct val="100000"/>
+                <a:spcPts val="3200"/>
               </a:lnSpc>
             </a:pPr>
             <a:r>
@@ -31410,7 +31917,7 @@
         <p:spPr>
           <a:xfrm>
             <a:off x="411480" y="1097280"/>
-            <a:ext cx="11368735" cy="2651760"/>
+            <a:ext cx="11368735" cy="2621280"/>
           </a:xfrm>
           <a:prstGeom prst="rect">
             <a:avLst/>
@@ -31454,7 +31961,7 @@
         <p:spPr>
           <a:xfrm>
             <a:off x="557784" y="1188720"/>
-            <a:ext cx="11149279" cy="2542032"/>
+            <a:ext cx="11149279" cy="2511552"/>
           </a:xfrm>
           <a:prstGeom prst="rect">
             <a:avLst/>
@@ -31469,7 +31976,7 @@
           <a:p>
             <a:pPr algn="l">
               <a:lnSpc>
-                <a:spcPct val="100000"/>
+                <a:spcPts val="3200"/>
               </a:lnSpc>
             </a:pPr>
             <a:r>
@@ -31485,7 +31992,7 @@
           <a:p>
             <a:pPr algn="l">
               <a:lnSpc>
-                <a:spcPct val="100000"/>
+                <a:spcPts val="3200"/>
               </a:lnSpc>
             </a:pPr>
             <a:r>
@@ -31501,7 +32008,7 @@
           <a:p>
             <a:pPr algn="l">
               <a:lnSpc>
-                <a:spcPct val="100000"/>
+                <a:spcPts val="3200"/>
               </a:lnSpc>
             </a:pPr>
             <a:r>
@@ -31517,7 +32024,7 @@
           <a:p>
             <a:pPr algn="l">
               <a:lnSpc>
-                <a:spcPct val="100000"/>
+                <a:spcPts val="3200"/>
               </a:lnSpc>
             </a:pPr>
             <a:r>
@@ -31533,7 +32040,7 @@
           <a:p>
             <a:pPr algn="l">
               <a:lnSpc>
-                <a:spcPct val="100000"/>
+                <a:spcPts val="3200"/>
               </a:lnSpc>
             </a:pPr>
             <a:r>
@@ -31549,7 +32056,7 @@
           <a:p>
             <a:pPr algn="l">
               <a:lnSpc>
-                <a:spcPct val="100000"/>
+                <a:spcPts val="3200"/>
               </a:lnSpc>
             </a:pPr>
             <a:r>
@@ -31856,7 +32363,7 @@
         <p:spPr>
           <a:xfrm>
             <a:off x="411480" y="1097280"/>
-            <a:ext cx="11368735" cy="2651760"/>
+            <a:ext cx="11368735" cy="2621280"/>
           </a:xfrm>
           <a:prstGeom prst="rect">
             <a:avLst/>
@@ -31900,7 +32407,7 @@
         <p:spPr>
           <a:xfrm>
             <a:off x="557784" y="1188720"/>
-            <a:ext cx="11149279" cy="2542032"/>
+            <a:ext cx="11149279" cy="2511552"/>
           </a:xfrm>
           <a:prstGeom prst="rect">
             <a:avLst/>
@@ -31915,7 +32422,7 @@
           <a:p>
             <a:pPr algn="l">
               <a:lnSpc>
-                <a:spcPct val="100000"/>
+                <a:spcPts val="3200"/>
               </a:lnSpc>
             </a:pPr>
             <a:r>
@@ -31931,7 +32438,7 @@
           <a:p>
             <a:pPr algn="l">
               <a:lnSpc>
-                <a:spcPct val="100000"/>
+                <a:spcPts val="3200"/>
               </a:lnSpc>
             </a:pPr>
             <a:r>
@@ -31947,7 +32454,7 @@
           <a:p>
             <a:pPr algn="l">
               <a:lnSpc>
-                <a:spcPct val="100000"/>
+                <a:spcPts val="3200"/>
               </a:lnSpc>
             </a:pPr>
             <a:r>
@@ -31963,7 +32470,7 @@
           <a:p>
             <a:pPr algn="l">
               <a:lnSpc>
-                <a:spcPct val="100000"/>
+                <a:spcPts val="3200"/>
               </a:lnSpc>
             </a:pPr>
             <a:r>
@@ -31979,7 +32486,7 @@
           <a:p>
             <a:pPr algn="l">
               <a:lnSpc>
-                <a:spcPct val="100000"/>
+                <a:spcPts val="3200"/>
               </a:lnSpc>
             </a:pPr>
             <a:r>
@@ -31995,7 +32502,7 @@
           <a:p>
             <a:pPr algn="l">
               <a:lnSpc>
-                <a:spcPct val="100000"/>
+                <a:spcPts val="3200"/>
               </a:lnSpc>
             </a:pPr>
             <a:r>
@@ -32302,7 +32809,7 @@
         <p:spPr>
           <a:xfrm>
             <a:off x="411480" y="1097280"/>
-            <a:ext cx="11368735" cy="2240280"/>
+            <a:ext cx="11368735" cy="2214880"/>
           </a:xfrm>
           <a:prstGeom prst="rect">
             <a:avLst/>
@@ -32346,7 +32853,7 @@
         <p:spPr>
           <a:xfrm>
             <a:off x="557784" y="1188720"/>
-            <a:ext cx="11149279" cy="2130552"/>
+            <a:ext cx="11149279" cy="2105152"/>
           </a:xfrm>
           <a:prstGeom prst="rect">
             <a:avLst/>
@@ -32361,7 +32868,7 @@
           <a:p>
             <a:pPr algn="l">
               <a:lnSpc>
-                <a:spcPct val="100000"/>
+                <a:spcPts val="3200"/>
               </a:lnSpc>
             </a:pPr>
             <a:r>
@@ -32377,7 +32884,7 @@
           <a:p>
             <a:pPr algn="l">
               <a:lnSpc>
-                <a:spcPct val="100000"/>
+                <a:spcPts val="3200"/>
               </a:lnSpc>
             </a:pPr>
             <a:r>
@@ -32393,7 +32900,7 @@
           <a:p>
             <a:pPr algn="l">
               <a:lnSpc>
-                <a:spcPct val="100000"/>
+                <a:spcPts val="3200"/>
               </a:lnSpc>
             </a:pPr>
             <a:r>
@@ -32409,7 +32916,7 @@
           <a:p>
             <a:pPr algn="l">
               <a:lnSpc>
-                <a:spcPct val="100000"/>
+                <a:spcPts val="3200"/>
               </a:lnSpc>
             </a:pPr>
             <a:r>
@@ -32425,7 +32932,7 @@
           <a:p>
             <a:pPr algn="l">
               <a:lnSpc>
-                <a:spcPct val="100000"/>
+                <a:spcPts val="3200"/>
               </a:lnSpc>
             </a:pPr>
             <a:r>
@@ -32732,7 +33239,7 @@
         <p:spPr>
           <a:xfrm>
             <a:off x="411480" y="1097280"/>
-            <a:ext cx="11368735" cy="4297680"/>
+            <a:ext cx="11368735" cy="4246880"/>
           </a:xfrm>
           <a:prstGeom prst="rect">
             <a:avLst/>
@@ -32776,7 +33283,7 @@
         <p:spPr>
           <a:xfrm>
             <a:off x="557784" y="1188720"/>
-            <a:ext cx="11149279" cy="4187952"/>
+            <a:ext cx="11149279" cy="4137152"/>
           </a:xfrm>
           <a:prstGeom prst="rect">
             <a:avLst/>
@@ -32791,7 +33298,7 @@
           <a:p>
             <a:pPr algn="l">
               <a:lnSpc>
-                <a:spcPct val="100000"/>
+                <a:spcPts val="3200"/>
               </a:lnSpc>
             </a:pPr>
             <a:r>
@@ -32807,7 +33314,7 @@
           <a:p>
             <a:pPr algn="l">
               <a:lnSpc>
-                <a:spcPct val="100000"/>
+                <a:spcPts val="3200"/>
               </a:lnSpc>
             </a:pPr>
             <a:r>
@@ -32823,7 +33330,7 @@
           <a:p>
             <a:pPr algn="l">
               <a:lnSpc>
-                <a:spcPct val="100000"/>
+                <a:spcPts val="3200"/>
               </a:lnSpc>
             </a:pPr>
             <a:r>
@@ -32839,7 +33346,7 @@
           <a:p>
             <a:pPr algn="l">
               <a:lnSpc>
-                <a:spcPct val="100000"/>
+                <a:spcPts val="3200"/>
               </a:lnSpc>
             </a:pPr>
             <a:r>
@@ -32855,7 +33362,7 @@
           <a:p>
             <a:pPr algn="l">
               <a:lnSpc>
-                <a:spcPct val="100000"/>
+                <a:spcPts val="3200"/>
               </a:lnSpc>
             </a:pPr>
             <a:r>
@@ -32871,7 +33378,7 @@
           <a:p>
             <a:pPr algn="l">
               <a:lnSpc>
-                <a:spcPct val="100000"/>
+                <a:spcPts val="3200"/>
               </a:lnSpc>
             </a:pPr>
             <a:r>
@@ -32887,7 +33394,7 @@
           <a:p>
             <a:pPr algn="l">
               <a:lnSpc>
-                <a:spcPct val="100000"/>
+                <a:spcPts val="3200"/>
               </a:lnSpc>
             </a:pPr>
             <a:r>
@@ -32903,7 +33410,7 @@
           <a:p>
             <a:pPr algn="l">
               <a:lnSpc>
-                <a:spcPct val="100000"/>
+                <a:spcPts val="3200"/>
               </a:lnSpc>
             </a:pPr>
             <a:r>
@@ -32919,7 +33426,7 @@
           <a:p>
             <a:pPr algn="l">
               <a:lnSpc>
-                <a:spcPct val="100000"/>
+                <a:spcPts val="3200"/>
               </a:lnSpc>
             </a:pPr>
             <a:r>
@@ -32935,7 +33442,7 @@
           <a:p>
             <a:pPr algn="l">
               <a:lnSpc>
-                <a:spcPct val="100000"/>
+                <a:spcPts val="3200"/>
               </a:lnSpc>
             </a:pPr>
             <a:r>
@@ -33463,7 +33970,7 @@
         <p:spPr>
           <a:xfrm>
             <a:off x="411480" y="1097280"/>
-            <a:ext cx="11368735" cy="4297680"/>
+            <a:ext cx="11368735" cy="4246880"/>
           </a:xfrm>
           <a:prstGeom prst="rect">
             <a:avLst/>
@@ -33507,7 +34014,7 @@
         <p:spPr>
           <a:xfrm>
             <a:off x="557784" y="1188720"/>
-            <a:ext cx="11149279" cy="4187952"/>
+            <a:ext cx="11149279" cy="4137152"/>
           </a:xfrm>
           <a:prstGeom prst="rect">
             <a:avLst/>
@@ -33522,7 +34029,7 @@
           <a:p>
             <a:pPr algn="l">
               <a:lnSpc>
-                <a:spcPct val="100000"/>
+                <a:spcPts val="3200"/>
               </a:lnSpc>
             </a:pPr>
             <a:r>
@@ -33538,7 +34045,7 @@
           <a:p>
             <a:pPr algn="l">
               <a:lnSpc>
-                <a:spcPct val="100000"/>
+                <a:spcPts val="3200"/>
               </a:lnSpc>
             </a:pPr>
             <a:r>
@@ -33554,7 +34061,7 @@
           <a:p>
             <a:pPr algn="l">
               <a:lnSpc>
-                <a:spcPct val="100000"/>
+                <a:spcPts val="3200"/>
               </a:lnSpc>
             </a:pPr>
             <a:r>
@@ -33570,7 +34077,7 @@
           <a:p>
             <a:pPr algn="l">
               <a:lnSpc>
-                <a:spcPct val="100000"/>
+                <a:spcPts val="3200"/>
               </a:lnSpc>
             </a:pPr>
             <a:r>
@@ -33586,7 +34093,7 @@
           <a:p>
             <a:pPr algn="l">
               <a:lnSpc>
-                <a:spcPct val="100000"/>
+                <a:spcPts val="3200"/>
               </a:lnSpc>
             </a:pPr>
             <a:r>
@@ -33602,7 +34109,7 @@
           <a:p>
             <a:pPr algn="l">
               <a:lnSpc>
-                <a:spcPct val="100000"/>
+                <a:spcPts val="3200"/>
               </a:lnSpc>
             </a:pPr>
             <a:r>
@@ -33618,7 +34125,7 @@
           <a:p>
             <a:pPr algn="l">
               <a:lnSpc>
-                <a:spcPct val="100000"/>
+                <a:spcPts val="3200"/>
               </a:lnSpc>
             </a:pPr>
             <a:r>
@@ -33634,7 +34141,7 @@
           <a:p>
             <a:pPr algn="l">
               <a:lnSpc>
-                <a:spcPct val="100000"/>
+                <a:spcPts val="3200"/>
               </a:lnSpc>
             </a:pPr>
             <a:r>
@@ -33650,7 +34157,7 @@
           <a:p>
             <a:pPr algn="l">
               <a:lnSpc>
-                <a:spcPct val="100000"/>
+                <a:spcPts val="3200"/>
               </a:lnSpc>
             </a:pPr>
             <a:r>
@@ -33666,7 +34173,7 @@
           <a:p>
             <a:pPr algn="l">
               <a:lnSpc>
-                <a:spcPct val="100000"/>
+                <a:spcPts val="3200"/>
               </a:lnSpc>
             </a:pPr>
             <a:r>
@@ -33973,7 +34480,7 @@
         <p:spPr>
           <a:xfrm>
             <a:off x="411480" y="1097280"/>
-            <a:ext cx="11368735" cy="3886200"/>
+            <a:ext cx="11368735" cy="3840480"/>
           </a:xfrm>
           <a:prstGeom prst="rect">
             <a:avLst/>
@@ -34017,7 +34524,7 @@
         <p:spPr>
           <a:xfrm>
             <a:off x="557784" y="1188720"/>
-            <a:ext cx="11149279" cy="3776472"/>
+            <a:ext cx="11149279" cy="3730752"/>
           </a:xfrm>
           <a:prstGeom prst="rect">
             <a:avLst/>
@@ -34032,7 +34539,7 @@
           <a:p>
             <a:pPr algn="l">
               <a:lnSpc>
-                <a:spcPct val="100000"/>
+                <a:spcPts val="3200"/>
               </a:lnSpc>
             </a:pPr>
             <a:r>
@@ -34048,7 +34555,7 @@
           <a:p>
             <a:pPr algn="l">
               <a:lnSpc>
-                <a:spcPct val="100000"/>
+                <a:spcPts val="3200"/>
               </a:lnSpc>
             </a:pPr>
             <a:r>
@@ -34064,7 +34571,7 @@
           <a:p>
             <a:pPr algn="l">
               <a:lnSpc>
-                <a:spcPct val="100000"/>
+                <a:spcPts val="3200"/>
               </a:lnSpc>
             </a:pPr>
             <a:r>
@@ -34080,7 +34587,7 @@
           <a:p>
             <a:pPr algn="l">
               <a:lnSpc>
-                <a:spcPct val="100000"/>
+                <a:spcPts val="3200"/>
               </a:lnSpc>
             </a:pPr>
             <a:r>
@@ -34096,7 +34603,7 @@
           <a:p>
             <a:pPr algn="l">
               <a:lnSpc>
-                <a:spcPct val="100000"/>
+                <a:spcPts val="3200"/>
               </a:lnSpc>
             </a:pPr>
             <a:r>
@@ -34112,7 +34619,7 @@
           <a:p>
             <a:pPr algn="l">
               <a:lnSpc>
-                <a:spcPct val="100000"/>
+                <a:spcPts val="3200"/>
               </a:lnSpc>
             </a:pPr>
             <a:r>
@@ -34128,7 +34635,7 @@
           <a:p>
             <a:pPr algn="l">
               <a:lnSpc>
-                <a:spcPct val="100000"/>
+                <a:spcPts val="3200"/>
               </a:lnSpc>
             </a:pPr>
             <a:r>
@@ -34144,7 +34651,7 @@
           <a:p>
             <a:pPr algn="l">
               <a:lnSpc>
-                <a:spcPct val="100000"/>
+                <a:spcPts val="3200"/>
               </a:lnSpc>
             </a:pPr>
             <a:r>
@@ -34160,7 +34667,7 @@
           <a:p>
             <a:pPr algn="l">
               <a:lnSpc>
-                <a:spcPct val="100000"/>
+                <a:spcPts val="3200"/>
               </a:lnSpc>
             </a:pPr>
             <a:r>
@@ -34467,7 +34974,7 @@
         <p:spPr>
           <a:xfrm>
             <a:off x="411480" y="1097280"/>
-            <a:ext cx="11368735" cy="3886200"/>
+            <a:ext cx="11368735" cy="3840480"/>
           </a:xfrm>
           <a:prstGeom prst="rect">
             <a:avLst/>
@@ -34511,7 +35018,7 @@
         <p:spPr>
           <a:xfrm>
             <a:off x="557784" y="1188720"/>
-            <a:ext cx="11149279" cy="3776472"/>
+            <a:ext cx="11149279" cy="3730752"/>
           </a:xfrm>
           <a:prstGeom prst="rect">
             <a:avLst/>
@@ -34526,7 +35033,7 @@
           <a:p>
             <a:pPr algn="l">
               <a:lnSpc>
-                <a:spcPct val="100000"/>
+                <a:spcPts val="3200"/>
               </a:lnSpc>
             </a:pPr>
             <a:r>
@@ -34542,7 +35049,7 @@
           <a:p>
             <a:pPr algn="l">
               <a:lnSpc>
-                <a:spcPct val="100000"/>
+                <a:spcPts val="3200"/>
               </a:lnSpc>
             </a:pPr>
             <a:r>
@@ -34558,7 +35065,7 @@
           <a:p>
             <a:pPr algn="l">
               <a:lnSpc>
-                <a:spcPct val="100000"/>
+                <a:spcPts val="3200"/>
               </a:lnSpc>
             </a:pPr>
             <a:r>
@@ -34574,7 +35081,7 @@
           <a:p>
             <a:pPr algn="l">
               <a:lnSpc>
-                <a:spcPct val="100000"/>
+                <a:spcPts val="3200"/>
               </a:lnSpc>
             </a:pPr>
             <a:r>
@@ -34590,7 +35097,7 @@
           <a:p>
             <a:pPr algn="l">
               <a:lnSpc>
-                <a:spcPct val="100000"/>
+                <a:spcPts val="3200"/>
               </a:lnSpc>
             </a:pPr>
             <a:r>
@@ -34606,7 +35113,7 @@
           <a:p>
             <a:pPr algn="l">
               <a:lnSpc>
-                <a:spcPct val="100000"/>
+                <a:spcPts val="3200"/>
               </a:lnSpc>
             </a:pPr>
             <a:r>
@@ -34622,7 +35129,7 @@
           <a:p>
             <a:pPr algn="l">
               <a:lnSpc>
-                <a:spcPct val="100000"/>
+                <a:spcPts val="3200"/>
               </a:lnSpc>
             </a:pPr>
             <a:r>
@@ -34638,7 +35145,7 @@
           <a:p>
             <a:pPr algn="l">
               <a:lnSpc>
-                <a:spcPct val="100000"/>
+                <a:spcPts val="3200"/>
               </a:lnSpc>
             </a:pPr>
             <a:r>
@@ -34654,7 +35161,7 @@
           <a:p>
             <a:pPr algn="l">
               <a:lnSpc>
-                <a:spcPct val="100000"/>
+                <a:spcPts val="3200"/>
               </a:lnSpc>
             </a:pPr>
             <a:r>
@@ -34961,7 +35468,7 @@
         <p:spPr>
           <a:xfrm>
             <a:off x="411480" y="1097280"/>
-            <a:ext cx="11368735" cy="5120640"/>
+            <a:ext cx="11368735" cy="5059680"/>
           </a:xfrm>
           <a:prstGeom prst="rect">
             <a:avLst/>
@@ -35005,7 +35512,7 @@
         <p:spPr>
           <a:xfrm>
             <a:off x="557784" y="1188720"/>
-            <a:ext cx="11149279" cy="5010912"/>
+            <a:ext cx="11149279" cy="4949952"/>
           </a:xfrm>
           <a:prstGeom prst="rect">
             <a:avLst/>
@@ -35020,7 +35527,7 @@
           <a:p>
             <a:pPr algn="l">
               <a:lnSpc>
-                <a:spcPct val="100000"/>
+                <a:spcPts val="3200"/>
               </a:lnSpc>
             </a:pPr>
             <a:r>
@@ -35036,7 +35543,7 @@
           <a:p>
             <a:pPr algn="l">
               <a:lnSpc>
-                <a:spcPct val="100000"/>
+                <a:spcPts val="3200"/>
               </a:lnSpc>
             </a:pPr>
             <a:r>
@@ -35052,7 +35559,7 @@
           <a:p>
             <a:pPr algn="l">
               <a:lnSpc>
-                <a:spcPct val="100000"/>
+                <a:spcPts val="3200"/>
               </a:lnSpc>
             </a:pPr>
             <a:r>
@@ -35068,7 +35575,7 @@
           <a:p>
             <a:pPr algn="l">
               <a:lnSpc>
-                <a:spcPct val="100000"/>
+                <a:spcPts val="3200"/>
               </a:lnSpc>
             </a:pPr>
             <a:r>
@@ -35084,7 +35591,7 @@
           <a:p>
             <a:pPr algn="l">
               <a:lnSpc>
-                <a:spcPct val="100000"/>
+                <a:spcPts val="3200"/>
               </a:lnSpc>
             </a:pPr>
             <a:r>
@@ -35100,7 +35607,7 @@
           <a:p>
             <a:pPr algn="l">
               <a:lnSpc>
-                <a:spcPct val="100000"/>
+                <a:spcPts val="3200"/>
               </a:lnSpc>
             </a:pPr>
             <a:r>
@@ -35116,7 +35623,7 @@
           <a:p>
             <a:pPr algn="l">
               <a:lnSpc>
-                <a:spcPct val="100000"/>
+                <a:spcPts val="3200"/>
               </a:lnSpc>
             </a:pPr>
             <a:r>
@@ -35132,7 +35639,7 @@
           <a:p>
             <a:pPr algn="l">
               <a:lnSpc>
-                <a:spcPct val="100000"/>
+                <a:spcPts val="3200"/>
               </a:lnSpc>
             </a:pPr>
             <a:r>
@@ -35148,7 +35655,7 @@
           <a:p>
             <a:pPr algn="l">
               <a:lnSpc>
-                <a:spcPct val="100000"/>
+                <a:spcPts val="3200"/>
               </a:lnSpc>
             </a:pPr>
             <a:r>
@@ -35164,7 +35671,7 @@
           <a:p>
             <a:pPr algn="l">
               <a:lnSpc>
-                <a:spcPct val="100000"/>
+                <a:spcPts val="3200"/>
               </a:lnSpc>
             </a:pPr>
             <a:r>
@@ -35180,7 +35687,7 @@
           <a:p>
             <a:pPr algn="l">
               <a:lnSpc>
-                <a:spcPct val="100000"/>
+                <a:spcPts val="3200"/>
               </a:lnSpc>
             </a:pPr>
             <a:r>
@@ -35196,7 +35703,7 @@
           <a:p>
             <a:pPr algn="l">
               <a:lnSpc>
-                <a:spcPct val="100000"/>
+                <a:spcPts val="3200"/>
               </a:lnSpc>
             </a:pPr>
             <a:r>
@@ -35446,7 +35953,7 @@
         <p:spPr>
           <a:xfrm>
             <a:off x="411480" y="1097280"/>
-            <a:ext cx="11368735" cy="4297680"/>
+            <a:ext cx="11368735" cy="4246880"/>
           </a:xfrm>
           <a:prstGeom prst="rect">
             <a:avLst/>
@@ -35490,7 +35997,7 @@
         <p:spPr>
           <a:xfrm>
             <a:off x="557784" y="1188720"/>
-            <a:ext cx="11149279" cy="4187952"/>
+            <a:ext cx="11149279" cy="4137152"/>
           </a:xfrm>
           <a:prstGeom prst="rect">
             <a:avLst/>
@@ -35505,7 +36012,7 @@
           <a:p>
             <a:pPr algn="l">
               <a:lnSpc>
-                <a:spcPct val="100000"/>
+                <a:spcPts val="3200"/>
               </a:lnSpc>
             </a:pPr>
             <a:r>
@@ -35521,7 +36028,7 @@
           <a:p>
             <a:pPr algn="l">
               <a:lnSpc>
-                <a:spcPct val="100000"/>
+                <a:spcPts val="3200"/>
               </a:lnSpc>
             </a:pPr>
             <a:r>
@@ -35537,7 +36044,7 @@
           <a:p>
             <a:pPr algn="l">
               <a:lnSpc>
-                <a:spcPct val="100000"/>
+                <a:spcPts val="3200"/>
               </a:lnSpc>
             </a:pPr>
             <a:r>
@@ -35553,7 +36060,7 @@
           <a:p>
             <a:pPr algn="l">
               <a:lnSpc>
-                <a:spcPct val="100000"/>
+                <a:spcPts val="3200"/>
               </a:lnSpc>
             </a:pPr>
             <a:r>
@@ -35569,7 +36076,7 @@
           <a:p>
             <a:pPr algn="l">
               <a:lnSpc>
-                <a:spcPct val="100000"/>
+                <a:spcPts val="3200"/>
               </a:lnSpc>
             </a:pPr>
             <a:r>
@@ -35585,7 +36092,7 @@
           <a:p>
             <a:pPr algn="l">
               <a:lnSpc>
-                <a:spcPct val="100000"/>
+                <a:spcPts val="3200"/>
               </a:lnSpc>
             </a:pPr>
             <a:r>
@@ -35601,7 +36108,7 @@
           <a:p>
             <a:pPr algn="l">
               <a:lnSpc>
-                <a:spcPct val="100000"/>
+                <a:spcPts val="3200"/>
               </a:lnSpc>
             </a:pPr>
             <a:r>
@@ -35617,7 +36124,7 @@
           <a:p>
             <a:pPr algn="l">
               <a:lnSpc>
-                <a:spcPct val="100000"/>
+                <a:spcPts val="3200"/>
               </a:lnSpc>
             </a:pPr>
             <a:r>
@@ -35633,7 +36140,7 @@
           <a:p>
             <a:pPr algn="l">
               <a:lnSpc>
-                <a:spcPct val="100000"/>
+                <a:spcPts val="3200"/>
               </a:lnSpc>
             </a:pPr>
             <a:r>
@@ -35649,7 +36156,7 @@
           <a:p>
             <a:pPr algn="l">
               <a:lnSpc>
-                <a:spcPct val="100000"/>
+                <a:spcPts val="3200"/>
               </a:lnSpc>
             </a:pPr>
             <a:r>
@@ -36520,7 +37027,7 @@
         </p:nvGraphicFramePr>
         <p:xfrm>
           <a:off x="411480" y="1234439"/>
-          <a:ext cx="11368735" cy="2852928"/>
+          <a:ext cx="11368735" cy="3657600"/>
         </p:xfrm>
         <a:graphic>
           <a:graphicData uri="http://schemas.openxmlformats.org/drawingml/2006/table">
@@ -36532,7 +37039,7 @@
                 <a:gridCol w="3291840"/>
                 <a:gridCol w="8076895"/>
               </a:tblGrid>
-              <a:tr h="713232">
+              <a:tr h="914400">
                 <a:tc>
                   <a:txBody>
                     <a:bodyPr wrap="square" anchor="ctr" lIns="109728" rIns="109728" tIns="109728" bIns="109728"/>
@@ -36588,7 +37095,7 @@
                   </a:tcPr>
                 </a:tc>
               </a:tr>
-              <a:tr h="713232">
+              <a:tr h="914400">
                 <a:tc>
                   <a:txBody>
                     <a:bodyPr wrap="square" anchor="ctr" lIns="109728" rIns="109728" tIns="109728" bIns="109728"/>
@@ -36644,7 +37151,7 @@
                   </a:tcPr>
                 </a:tc>
               </a:tr>
-              <a:tr h="713232">
+              <a:tr h="914400">
                 <a:tc>
                   <a:txBody>
                     <a:bodyPr wrap="square" anchor="ctr" lIns="109728" rIns="109728" tIns="109728" bIns="109728"/>
@@ -36700,7 +37207,7 @@
                   </a:tcPr>
                 </a:tc>
               </a:tr>
-              <a:tr h="713232">
+              <a:tr h="914400">
                 <a:tc>
                   <a:txBody>
                     <a:bodyPr wrap="square" anchor="ctr" lIns="109728" rIns="109728" tIns="109728" bIns="109728"/>
@@ -39331,7 +39838,7 @@
         </p:nvGraphicFramePr>
         <p:xfrm>
           <a:off x="411480" y="1234439"/>
-          <a:ext cx="11368735" cy="2852928"/>
+          <a:ext cx="11368735" cy="3657600"/>
         </p:xfrm>
         <a:graphic>
           <a:graphicData uri="http://schemas.openxmlformats.org/drawingml/2006/table">
@@ -39343,7 +39850,7 @@
                 <a:gridCol w="3291840"/>
                 <a:gridCol w="8076895"/>
               </a:tblGrid>
-              <a:tr h="713232">
+              <a:tr h="914400">
                 <a:tc>
                   <a:txBody>
                     <a:bodyPr wrap="square" anchor="ctr" lIns="109728" rIns="109728" tIns="109728" bIns="109728"/>
@@ -39399,7 +39906,7 @@
                   </a:tcPr>
                 </a:tc>
               </a:tr>
-              <a:tr h="713232">
+              <a:tr h="914400">
                 <a:tc>
                   <a:txBody>
                     <a:bodyPr wrap="square" anchor="ctr" lIns="109728" rIns="109728" tIns="109728" bIns="109728"/>
@@ -39455,7 +39962,7 @@
                   </a:tcPr>
                 </a:tc>
               </a:tr>
-              <a:tr h="713232">
+              <a:tr h="914400">
                 <a:tc>
                   <a:txBody>
                     <a:bodyPr wrap="square" anchor="ctr" lIns="109728" rIns="109728" tIns="109728" bIns="109728"/>
@@ -39511,7 +40018,7 @@
                   </a:tcPr>
                 </a:tc>
               </a:tr>
-              <a:tr h="713232">
+              <a:tr h="914400">
                 <a:tc>
                   <a:txBody>
                     <a:bodyPr wrap="square" anchor="ctr" lIns="109728" rIns="109728" tIns="109728" bIns="109728"/>
@@ -40440,7 +40947,7 @@
         <p:spPr>
           <a:xfrm>
             <a:off x="411480" y="1097280"/>
-            <a:ext cx="11368735" cy="3063240"/>
+            <a:ext cx="11368735" cy="3027680"/>
           </a:xfrm>
           <a:prstGeom prst="rect">
             <a:avLst/>
@@ -40484,7 +40991,7 @@
         <p:spPr>
           <a:xfrm>
             <a:off x="557784" y="1188720"/>
-            <a:ext cx="11149279" cy="2953512"/>
+            <a:ext cx="11149279" cy="2917951"/>
           </a:xfrm>
           <a:prstGeom prst="rect">
             <a:avLst/>
@@ -40499,7 +41006,7 @@
           <a:p>
             <a:pPr algn="l">
               <a:lnSpc>
-                <a:spcPct val="100000"/>
+                <a:spcPts val="3200"/>
               </a:lnSpc>
             </a:pPr>
             <a:r>
@@ -40524,7 +41031,7 @@
           <a:p>
             <a:pPr algn="l">
               <a:lnSpc>
-                <a:spcPct val="100000"/>
+                <a:spcPts val="3200"/>
               </a:lnSpc>
             </a:pPr>
             <a:r>
@@ -40540,7 +41047,7 @@
           <a:p>
             <a:pPr algn="l">
               <a:lnSpc>
-                <a:spcPct val="100000"/>
+                <a:spcPts val="3200"/>
               </a:lnSpc>
             </a:pPr>
             <a:r>
@@ -40556,7 +41063,7 @@
           <a:p>
             <a:pPr algn="l">
               <a:lnSpc>
-                <a:spcPct val="100000"/>
+                <a:spcPts val="3200"/>
               </a:lnSpc>
             </a:pPr>
             <a:r>
@@ -40590,7 +41097,7 @@
           <a:p>
             <a:pPr algn="l">
               <a:lnSpc>
-                <a:spcPct val="100000"/>
+                <a:spcPts val="3200"/>
               </a:lnSpc>
             </a:pPr>
             <a:r>
@@ -40624,7 +41131,7 @@
           <a:p>
             <a:pPr algn="l">
               <a:lnSpc>
-                <a:spcPct val="100000"/>
+                <a:spcPts val="3200"/>
               </a:lnSpc>
             </a:pPr>
             <a:r>
@@ -40658,7 +41165,7 @@
           <a:p>
             <a:pPr algn="l">
               <a:lnSpc>
-                <a:spcPct val="100000"/>
+                <a:spcPts val="3200"/>
               </a:lnSpc>
             </a:pPr>
             <a:r>
@@ -44832,7 +45339,7 @@
         <p:spPr>
           <a:xfrm>
             <a:off x="411480" y="1097280"/>
-            <a:ext cx="11368735" cy="1417320"/>
+            <a:ext cx="11368735" cy="1402080"/>
           </a:xfrm>
           <a:prstGeom prst="rect">
             <a:avLst/>
@@ -44876,7 +45383,7 @@
         <p:spPr>
           <a:xfrm>
             <a:off x="557784" y="1188720"/>
-            <a:ext cx="11149279" cy="1307592"/>
+            <a:ext cx="11149279" cy="1292351"/>
           </a:xfrm>
           <a:prstGeom prst="rect">
             <a:avLst/>
@@ -44891,56 +45398,95 @@
           <a:p>
             <a:pPr algn="l">
               <a:lnSpc>
+                <a:spcPts val="3200"/>
+              </a:lnSpc>
+            </a:pPr>
+            <a:r>
+              <a:rPr sz="2800" b="1">
+                <a:solidFill>
+                  <a:srgbClr val="F2B27A"/>
+                </a:solidFill>
+                <a:latin typeface="Arial"/>
+              </a:rPr>
+              <a:t>1  BEFORE</a:t>
+            </a:r>
+          </a:p>
+          <a:p>
+            <a:pPr algn="l">
+              <a:lnSpc>
+                <a:spcPts val="3200"/>
+              </a:lnSpc>
+            </a:pPr>
+            <a:r>
+              <a:rPr sz="2800" b="0">
+                <a:solidFill>
+                  <a:srgbClr val="8FA3B8"/>
+                </a:solidFill>
+                <a:latin typeface="Courier New"/>
+              </a:rPr>
+              <a:t>db.movies.find({"_id" : {"$in" : [3, 4, 5]}})</a:t>
+            </a:r>
+          </a:p>
+          <a:p>
+            <a:pPr algn="l">
+              <a:lnSpc>
+                <a:spcPts val="3200"/>
+              </a:lnSpc>
+            </a:pPr>
+            <a:r>
+              <a:rPr sz="2800" b="0">
+                <a:solidFill>
+                  <a:srgbClr val="8FA3B8"/>
+                </a:solidFill>
+                <a:latin typeface="Courier New"/>
+              </a:rPr>
+              <a:t>// no output: the collection is empty</a:t>
+            </a:r>
+          </a:p>
+        </p:txBody>
+      </p:sp>
+      <p:sp>
+        <p:nvSpPr>
+          <p:cNvPr id="6" name="TextBox 5"/>
+          <p:cNvSpPr txBox="1"/>
+          <p:nvPr/>
+        </p:nvSpPr>
+        <p:spPr>
+          <a:xfrm>
+            <a:off x="411480" y="5696712"/>
+            <a:ext cx="11368735" cy="566928"/>
+          </a:xfrm>
+          <a:prstGeom prst="rect">
+            <a:avLst/>
+          </a:prstGeom>
+          <a:noFill/>
+        </p:spPr>
+        <p:txBody>
+          <a:bodyPr wrap="square" anchor="ctr" lIns="164592" rIns="164592" tIns="164592" bIns="164592">
+            <a:spAutoFit/>
+          </a:bodyPr>
+          <a:lstStyle/>
+          <a:p>
+            <a:pPr algn="r">
+              <a:lnSpc>
                 <a:spcPct val="100000"/>
               </a:lnSpc>
             </a:pPr>
             <a:r>
-              <a:rPr sz="2800" b="1">
-                <a:solidFill>
-                  <a:srgbClr val="F2B27A"/>
-                </a:solidFill>
-                <a:latin typeface="Arial"/>
-              </a:rPr>
-              <a:t>1  BEFORE</a:t>
-            </a:r>
-          </a:p>
-          <a:p>
-            <a:pPr algn="l">
-              <a:lnSpc>
-                <a:spcPct val="100000"/>
-              </a:lnSpc>
-            </a:pPr>
-            <a:r>
               <a:rPr sz="2800" b="0">
                 <a:solidFill>
-                  <a:srgbClr val="8FA3B8"/>
-                </a:solidFill>
-                <a:latin typeface="Courier New"/>
-              </a:rPr>
-              <a:t>db.movies.find({"_id" : {"$in" : [3, 4, 5]}})</a:t>
-            </a:r>
-          </a:p>
-          <a:p>
-            <a:pPr algn="l">
-              <a:lnSpc>
-                <a:spcPct val="100000"/>
-              </a:lnSpc>
-            </a:pPr>
-            <a:r>
-              <a:rPr sz="2800" b="0">
-                <a:solidFill>
-                  <a:srgbClr val="8FA3B8"/>
-                </a:solidFill>
-                <a:latin typeface="Courier New"/>
-              </a:rPr>
-              <a:t>// no output: the collection is empty</a:t>
-            </a:r>
-          </a:p>
-        </p:txBody>
-      </p:sp>
-      <p:sp>
-        <p:nvSpPr>
-          <p:cNvPr id="6" name="EXEMPT_FOOTER"/>
+                  <a:srgbClr val="4A5868"/>
+                </a:solidFill>
+                <a:latin typeface="Arial"/>
+              </a:rPr>
+              <a:t>Next: 2  COMMAND → REPLY  →</a:t>
+            </a:r>
+          </a:p>
+        </p:txBody>
+      </p:sp>
+      <p:sp>
+        <p:nvSpPr>
+          <p:cNvPr id="7" name="EXEMPT_FOOTER"/>
           <p:cNvSpPr txBox="1"/>
           <p:nvPr/>
         </p:nvSpPr>
@@ -44979,7 +45525,7 @@
       </p:sp>
       <p:sp>
         <p:nvSpPr>
-          <p:cNvPr id="7" name="EXEMPT_FOOTER"/>
+          <p:cNvPr id="8" name="EXEMPT_FOOTER"/>
           <p:cNvSpPr txBox="1"/>
           <p:nvPr/>
         </p:nvSpPr>
@@ -45018,7 +45564,7 @@
       </p:sp>
       <p:sp>
         <p:nvSpPr>
-          <p:cNvPr id="8" name="EXEMPT_PROGRESS"/>
+          <p:cNvPr id="9" name="EXEMPT_PROGRESS"/>
           <p:cNvSpPr txBox="1"/>
           <p:nvPr/>
         </p:nvSpPr>
@@ -45173,7 +45719,7 @@
         <p:spPr>
           <a:xfrm>
             <a:off x="411480" y="1097280"/>
-            <a:ext cx="11368735" cy="4297680"/>
+            <a:ext cx="11368735" cy="4246880"/>
           </a:xfrm>
           <a:prstGeom prst="rect">
             <a:avLst/>
@@ -45217,7 +45763,7 @@
         <p:spPr>
           <a:xfrm>
             <a:off x="557784" y="1188720"/>
-            <a:ext cx="11149279" cy="4187952"/>
+            <a:ext cx="11149279" cy="4137152"/>
           </a:xfrm>
           <a:prstGeom prst="rect">
             <a:avLst/>
@@ -45232,168 +45778,207 @@
           <a:p>
             <a:pPr algn="l">
               <a:lnSpc>
+                <a:spcPts val="3200"/>
+              </a:lnSpc>
+            </a:pPr>
+            <a:r>
+              <a:rPr sz="2800" b="1">
+                <a:solidFill>
+                  <a:srgbClr val="F2B27A"/>
+                </a:solidFill>
+                <a:latin typeface="Arial"/>
+              </a:rPr>
+              <a:t>2  COMMAND → REPLY</a:t>
+            </a:r>
+          </a:p>
+          <a:p>
+            <a:pPr algn="l">
+              <a:lnSpc>
+                <a:spcPts val="3200"/>
+              </a:lnSpc>
+            </a:pPr>
+            <a:r>
+              <a:rPr sz="2800" b="0">
+                <a:solidFill>
+                  <a:srgbClr val="E6ECF2"/>
+                </a:solidFill>
+                <a:latin typeface="Courier New"/>
+              </a:rPr>
+              <a:t>db.movies.insertMany([</a:t>
+            </a:r>
+          </a:p>
+          <a:p>
+            <a:pPr algn="l">
+              <a:lnSpc>
+                <a:spcPts val="3200"/>
+              </a:lnSpc>
+            </a:pPr>
+            <a:r>
+              <a:rPr sz="2800" b="0">
+                <a:solidFill>
+                  <a:srgbClr val="E6ECF2"/>
+                </a:solidFill>
+                <a:latin typeface="Courier New"/>
+              </a:rPr>
+              <a:t>  {"_id" : 3, "title" : "Sixteen Candles"},</a:t>
+            </a:r>
+          </a:p>
+          <a:p>
+            <a:pPr algn="l">
+              <a:lnSpc>
+                <a:spcPts val="3200"/>
+              </a:lnSpc>
+            </a:pPr>
+            <a:r>
+              <a:rPr sz="2800" b="0">
+                <a:solidFill>
+                  <a:srgbClr val="E6ECF2"/>
+                </a:solidFill>
+                <a:latin typeface="Courier New"/>
+              </a:rPr>
+              <a:t>  {"_id" : 4, "title" : "The Terminator"},</a:t>
+            </a:r>
+          </a:p>
+          <a:p>
+            <a:pPr algn="l">
+              <a:lnSpc>
+                <a:spcPts val="3200"/>
+              </a:lnSpc>
+            </a:pPr>
+            <a:r>
+              <a:rPr sz="2800" b="0">
+                <a:solidFill>
+                  <a:srgbClr val="E6ECF2"/>
+                </a:solidFill>
+                <a:latin typeface="Courier New"/>
+              </a:rPr>
+              <a:t>  {"_id" : 4, "title" : "The Princess Bride"},</a:t>
+            </a:r>
+          </a:p>
+          <a:p>
+            <a:pPr algn="l">
+              <a:lnSpc>
+                <a:spcPts val="3200"/>
+              </a:lnSpc>
+            </a:pPr>
+            <a:r>
+              <a:rPr sz="2800" b="0">
+                <a:solidFill>
+                  <a:srgbClr val="E6ECF2"/>
+                </a:solidFill>
+                <a:latin typeface="Courier New"/>
+              </a:rPr>
+              <a:t>  {"_id" : 5, "title" : "Scarface"}],</a:t>
+            </a:r>
+          </a:p>
+          <a:p>
+            <a:pPr algn="l">
+              <a:lnSpc>
+                <a:spcPts val="3200"/>
+              </a:lnSpc>
+            </a:pPr>
+            <a:r>
+              <a:rPr sz="2800" b="0">
+                <a:solidFill>
+                  <a:srgbClr val="E6ECF2"/>
+                </a:solidFill>
+                <a:latin typeface="Courier New"/>
+              </a:rPr>
+              <a:t>  {"ordered" : false})</a:t>
+            </a:r>
+          </a:p>
+          <a:p>
+            <a:pPr algn="l">
+              <a:lnSpc>
+                <a:spcPts val="3200"/>
+              </a:lnSpc>
+            </a:pPr>
+            <a:r>
+              <a:rPr sz="2800" b="0">
+                <a:solidFill>
+                  <a:srgbClr val="FFB4A8"/>
+                </a:solidFill>
+                <a:latin typeface="Courier New"/>
+              </a:rPr>
+              <a:t>MongoBulkWriteError: E11000 duplicate key error</a:t>
+            </a:r>
+          </a:p>
+          <a:p>
+            <a:pPr algn="l">
+              <a:lnSpc>
+                <a:spcPts val="3200"/>
+              </a:lnSpc>
+            </a:pPr>
+            <a:r>
+              <a:rPr sz="2800" b="0">
+                <a:solidFill>
+                  <a:srgbClr val="FFB4A8"/>
+                </a:solidFill>
+                <a:latin typeface="Courier New"/>
+              </a:rPr>
+              <a:t>collection: adbs_part1.movies index: _id_ dup key: {</a:t>
+            </a:r>
+          </a:p>
+          <a:p>
+            <a:pPr algn="l">
+              <a:lnSpc>
+                <a:spcPts val="3200"/>
+              </a:lnSpc>
+            </a:pPr>
+            <a:r>
+              <a:rPr sz="2800" b="0">
+                <a:solidFill>
+                  <a:srgbClr val="FFB4A8"/>
+                </a:solidFill>
+                <a:latin typeface="Courier New"/>
+              </a:rPr>
+              <a:t>_id: 4 }</a:t>
+            </a:r>
+          </a:p>
+        </p:txBody>
+      </p:sp>
+      <p:sp>
+        <p:nvSpPr>
+          <p:cNvPr id="6" name="TextBox 5"/>
+          <p:cNvSpPr txBox="1"/>
+          <p:nvPr/>
+        </p:nvSpPr>
+        <p:spPr>
+          <a:xfrm>
+            <a:off x="411480" y="5696712"/>
+            <a:ext cx="11368735" cy="566928"/>
+          </a:xfrm>
+          <a:prstGeom prst="rect">
+            <a:avLst/>
+          </a:prstGeom>
+          <a:noFill/>
+        </p:spPr>
+        <p:txBody>
+          <a:bodyPr wrap="square" anchor="ctr" lIns="164592" rIns="164592" tIns="164592" bIns="164592">
+            <a:spAutoFit/>
+          </a:bodyPr>
+          <a:lstStyle/>
+          <a:p>
+            <a:pPr algn="r">
+              <a:lnSpc>
                 <a:spcPct val="100000"/>
               </a:lnSpc>
             </a:pPr>
             <a:r>
-              <a:rPr sz="2800" b="1">
-                <a:solidFill>
-                  <a:srgbClr val="F2B27A"/>
-                </a:solidFill>
-                <a:latin typeface="Arial"/>
-              </a:rPr>
-              <a:t>2  COMMAND → REPLY</a:t>
-            </a:r>
-          </a:p>
-          <a:p>
-            <a:pPr algn="l">
-              <a:lnSpc>
-                <a:spcPct val="100000"/>
-              </a:lnSpc>
-            </a:pPr>
-            <a:r>
               <a:rPr sz="2800" b="0">
                 <a:solidFill>
-                  <a:srgbClr val="E6ECF2"/>
-                </a:solidFill>
-                <a:latin typeface="Courier New"/>
-              </a:rPr>
-              <a:t>db.movies.insertMany([</a:t>
-            </a:r>
-          </a:p>
-          <a:p>
-            <a:pPr algn="l">
-              <a:lnSpc>
-                <a:spcPct val="100000"/>
-              </a:lnSpc>
-            </a:pPr>
-            <a:r>
-              <a:rPr sz="2800" b="0">
-                <a:solidFill>
-                  <a:srgbClr val="E6ECF2"/>
-                </a:solidFill>
-                <a:latin typeface="Courier New"/>
-              </a:rPr>
-              <a:t>  {"_id" : 3, "title" : "Sixteen Candles"},</a:t>
-            </a:r>
-          </a:p>
-          <a:p>
-            <a:pPr algn="l">
-              <a:lnSpc>
-                <a:spcPct val="100000"/>
-              </a:lnSpc>
-            </a:pPr>
-            <a:r>
-              <a:rPr sz="2800" b="0">
-                <a:solidFill>
-                  <a:srgbClr val="E6ECF2"/>
-                </a:solidFill>
-                <a:latin typeface="Courier New"/>
-              </a:rPr>
-              <a:t>  {"_id" : 4, "title" : "The Terminator"},</a:t>
-            </a:r>
-          </a:p>
-          <a:p>
-            <a:pPr algn="l">
-              <a:lnSpc>
-                <a:spcPct val="100000"/>
-              </a:lnSpc>
-            </a:pPr>
-            <a:r>
-              <a:rPr sz="2800" b="0">
-                <a:solidFill>
-                  <a:srgbClr val="E6ECF2"/>
-                </a:solidFill>
-                <a:latin typeface="Courier New"/>
-              </a:rPr>
-              <a:t>  {"_id" : 4, "title" : "The Princess Bride"},</a:t>
-            </a:r>
-          </a:p>
-          <a:p>
-            <a:pPr algn="l">
-              <a:lnSpc>
-                <a:spcPct val="100000"/>
-              </a:lnSpc>
-            </a:pPr>
-            <a:r>
-              <a:rPr sz="2800" b="0">
-                <a:solidFill>
-                  <a:srgbClr val="E6ECF2"/>
-                </a:solidFill>
-                <a:latin typeface="Courier New"/>
-              </a:rPr>
-              <a:t>  {"_id" : 5, "title" : "Scarface"}],</a:t>
-            </a:r>
-          </a:p>
-          <a:p>
-            <a:pPr algn="l">
-              <a:lnSpc>
-                <a:spcPct val="100000"/>
-              </a:lnSpc>
-            </a:pPr>
-            <a:r>
-              <a:rPr sz="2800" b="0">
-                <a:solidFill>
-                  <a:srgbClr val="E6ECF2"/>
-                </a:solidFill>
-                <a:latin typeface="Courier New"/>
-              </a:rPr>
-              <a:t>  {"ordered" : false})</a:t>
-            </a:r>
-          </a:p>
-          <a:p>
-            <a:pPr algn="l">
-              <a:lnSpc>
-                <a:spcPct val="100000"/>
-              </a:lnSpc>
-            </a:pPr>
-            <a:r>
-              <a:rPr sz="2800" b="0">
-                <a:solidFill>
-                  <a:srgbClr val="FFB4A8"/>
-                </a:solidFill>
-                <a:latin typeface="Courier New"/>
-              </a:rPr>
-              <a:t>MongoBulkWriteError: E11000 duplicate key error</a:t>
-            </a:r>
-          </a:p>
-          <a:p>
-            <a:pPr algn="l">
-              <a:lnSpc>
-                <a:spcPct val="100000"/>
-              </a:lnSpc>
-            </a:pPr>
-            <a:r>
-              <a:rPr sz="2800" b="0">
-                <a:solidFill>
-                  <a:srgbClr val="FFB4A8"/>
-                </a:solidFill>
-                <a:latin typeface="Courier New"/>
-              </a:rPr>
-              <a:t>collection: adbs_part1.movies index: _id_ dup key: {</a:t>
-            </a:r>
-          </a:p>
-          <a:p>
-            <a:pPr algn="l">
-              <a:lnSpc>
-                <a:spcPct val="100000"/>
-              </a:lnSpc>
-            </a:pPr>
-            <a:r>
-              <a:rPr sz="2800" b="0">
-                <a:solidFill>
-                  <a:srgbClr val="FFB4A8"/>
-                </a:solidFill>
-                <a:latin typeface="Courier New"/>
-              </a:rPr>
-              <a:t>_id: 4 }</a:t>
-            </a:r>
-          </a:p>
-        </p:txBody>
-      </p:sp>
-      <p:sp>
-        <p:nvSpPr>
-          <p:cNvPr id="6" name="EXEMPT_FOOTER"/>
+                  <a:srgbClr val="4A5868"/>
+                </a:solidFill>
+                <a:latin typeface="Arial"/>
+              </a:rPr>
+              <a:t>Next: 3  AFTER  →</a:t>
+            </a:r>
+          </a:p>
+        </p:txBody>
+      </p:sp>
+      <p:sp>
+        <p:nvSpPr>
+          <p:cNvPr id="7" name="EXEMPT_FOOTER"/>
           <p:cNvSpPr txBox="1"/>
           <p:nvPr/>
         </p:nvSpPr>
@@ -45432,7 +46017,7 @@
       </p:sp>
       <p:sp>
         <p:nvSpPr>
-          <p:cNvPr id="7" name="EXEMPT_FOOTER"/>
+          <p:cNvPr id="8" name="EXEMPT_FOOTER"/>
           <p:cNvSpPr txBox="1"/>
           <p:nvPr/>
         </p:nvSpPr>
@@ -45471,7 +46056,7 @@
       </p:sp>
       <p:sp>
         <p:nvSpPr>
-          <p:cNvPr id="8" name="EXEMPT_PROGRESS"/>
+          <p:cNvPr id="9" name="EXEMPT_PROGRESS"/>
           <p:cNvSpPr txBox="1"/>
           <p:nvPr/>
         </p:nvSpPr>

--- a/01_FULL_DECK/ADBS_FULL_answer_key.pptx
+++ b/01_FULL_DECK/ADBS_FULL_answer_key.pptx
@@ -14193,14 +14193,190 @@
       <p:grpSpPr/>
       <p:sp>
         <p:nvSpPr>
-          <p:cNvPr id="2" name="TextBox 1"/>
+          <p:cNvPr id="2" name="Rectangle 1"/>
+          <p:cNvSpPr/>
+          <p:nvPr/>
+        </p:nvSpPr>
+        <p:spPr>
+          <a:xfrm>
+            <a:off x="0" y="0"/>
+            <a:ext cx="3657600" cy="6858000"/>
+          </a:xfrm>
+          <a:prstGeom prst="rect">
+            <a:avLst/>
+          </a:prstGeom>
+          <a:solidFill>
+            <a:srgbClr val="222C5E"/>
+          </a:solidFill>
+          <a:ln>
+            <a:noFill/>
+          </a:ln>
+          <a:effectLst/>
+        </p:spPr>
+        <p:style>
+          <a:lnRef idx="1">
+            <a:schemeClr val="accent1"/>
+          </a:lnRef>
+          <a:fillRef idx="3">
+            <a:schemeClr val="accent1"/>
+          </a:fillRef>
+          <a:effectRef idx="2">
+            <a:schemeClr val="accent1"/>
+          </a:effectRef>
+          <a:fontRef idx="minor">
+            <a:schemeClr val="lt1"/>
+          </a:fontRef>
+        </p:style>
+        <p:txBody>
+          <a:bodyPr rtlCol="0" anchor="ctr"/>
+          <a:lstStyle/>
+          <a:p>
+            <a:pPr algn="ctr"/>
+          </a:p>
+        </p:txBody>
+      </p:sp>
+      <p:sp>
+        <p:nvSpPr>
+          <p:cNvPr id="3" name="Rectangle 2"/>
+          <p:cNvSpPr/>
+          <p:nvPr/>
+        </p:nvSpPr>
+        <p:spPr>
+          <a:xfrm>
+            <a:off x="3657600" y="0"/>
+            <a:ext cx="146304" cy="6858000"/>
+          </a:xfrm>
+          <a:prstGeom prst="rect">
+            <a:avLst/>
+          </a:prstGeom>
+          <a:solidFill>
+            <a:srgbClr val="E1D8DE"/>
+          </a:solidFill>
+          <a:ln>
+            <a:noFill/>
+          </a:ln>
+          <a:effectLst/>
+        </p:spPr>
+        <p:style>
+          <a:lnRef idx="1">
+            <a:schemeClr val="accent1"/>
+          </a:lnRef>
+          <a:fillRef idx="3">
+            <a:schemeClr val="accent1"/>
+          </a:fillRef>
+          <a:effectRef idx="2">
+            <a:schemeClr val="accent1"/>
+          </a:effectRef>
+          <a:fontRef idx="minor">
+            <a:schemeClr val="lt1"/>
+          </a:fontRef>
+        </p:style>
+        <p:txBody>
+          <a:bodyPr rtlCol="0" anchor="ctr"/>
+          <a:lstStyle/>
+          <a:p>
+            <a:pPr algn="ctr"/>
+          </a:p>
+        </p:txBody>
+      </p:sp>
+      <p:sp>
+        <p:nvSpPr>
+          <p:cNvPr id="4" name="Rectangle 3"/>
+          <p:cNvSpPr/>
+          <p:nvPr/>
+        </p:nvSpPr>
+        <p:spPr>
+          <a:xfrm>
+            <a:off x="3803904" y="5989320"/>
+            <a:ext cx="8387791" cy="201168"/>
+          </a:xfrm>
+          <a:prstGeom prst="rect">
+            <a:avLst/>
+          </a:prstGeom>
+          <a:solidFill>
+            <a:srgbClr val="4C7F8C"/>
+          </a:solidFill>
+          <a:ln>
+            <a:noFill/>
+          </a:ln>
+          <a:effectLst/>
+        </p:spPr>
+        <p:style>
+          <a:lnRef idx="1">
+            <a:schemeClr val="accent1"/>
+          </a:lnRef>
+          <a:fillRef idx="3">
+            <a:schemeClr val="accent1"/>
+          </a:fillRef>
+          <a:effectRef idx="2">
+            <a:schemeClr val="accent1"/>
+          </a:effectRef>
+          <a:fontRef idx="minor">
+            <a:schemeClr val="lt1"/>
+          </a:fontRef>
+        </p:style>
+        <p:txBody>
+          <a:bodyPr rtlCol="0" anchor="ctr"/>
+          <a:lstStyle/>
+          <a:p>
+            <a:pPr algn="ctr"/>
+          </a:p>
+        </p:txBody>
+      </p:sp>
+      <p:sp>
+        <p:nvSpPr>
+          <p:cNvPr id="5" name="Rectangle 4"/>
+          <p:cNvSpPr/>
+          <p:nvPr/>
+        </p:nvSpPr>
+        <p:spPr>
+          <a:xfrm>
+            <a:off x="3803904" y="6190488"/>
+            <a:ext cx="8387791" cy="54864"/>
+          </a:xfrm>
+          <a:prstGeom prst="rect">
+            <a:avLst/>
+          </a:prstGeom>
+          <a:solidFill>
+            <a:srgbClr val="E1D8DE"/>
+          </a:solidFill>
+          <a:ln>
+            <a:noFill/>
+          </a:ln>
+          <a:effectLst/>
+        </p:spPr>
+        <p:style>
+          <a:lnRef idx="1">
+            <a:schemeClr val="accent1"/>
+          </a:lnRef>
+          <a:fillRef idx="3">
+            <a:schemeClr val="accent1"/>
+          </a:fillRef>
+          <a:effectRef idx="2">
+            <a:schemeClr val="accent1"/>
+          </a:effectRef>
+          <a:fontRef idx="minor">
+            <a:schemeClr val="lt1"/>
+          </a:fontRef>
+        </p:style>
+        <p:txBody>
+          <a:bodyPr rtlCol="0" anchor="ctr"/>
+          <a:lstStyle/>
+          <a:p>
+            <a:pPr algn="ctr"/>
+          </a:p>
+        </p:txBody>
+      </p:sp>
+      <p:sp>
+        <p:nvSpPr>
+          <p:cNvPr id="6" name="TextBox 5"/>
           <p:cNvSpPr txBox="1"/>
           <p:nvPr/>
         </p:nvSpPr>
         <p:spPr>
           <a:xfrm>
-            <a:off x="411480" y="914400"/>
-            <a:ext cx="3291840" cy="2743200"/>
+            <a:off x="320040" y="320040"/>
+            <a:ext cx="3108960" cy="457200"/>
           </a:xfrm>
           <a:prstGeom prst="rect">
             <a:avLst/>
@@ -14219,9 +14395,48 @@
               </a:lnSpc>
             </a:pPr>
             <a:r>
-              <a:rPr sz="18000" b="1">
-                <a:solidFill>
-                  <a:srgbClr val="F2B27A"/>
+              <a:rPr sz="2800" b="1">
+                <a:solidFill>
+                  <a:srgbClr val="FFFFFF"/>
+                </a:solidFill>
+                <a:latin typeface="Arial"/>
+              </a:rPr>
+              <a:t>PART</a:t>
+            </a:r>
+          </a:p>
+        </p:txBody>
+      </p:sp>
+      <p:sp>
+        <p:nvSpPr>
+          <p:cNvPr id="7" name="TextBox 6"/>
+          <p:cNvSpPr txBox="1"/>
+          <p:nvPr/>
+        </p:nvSpPr>
+        <p:spPr>
+          <a:xfrm>
+            <a:off x="182880" y="731520"/>
+            <a:ext cx="3383280" cy="3108960"/>
+          </a:xfrm>
+          <a:prstGeom prst="rect">
+            <a:avLst/>
+          </a:prstGeom>
+          <a:noFill/>
+        </p:spPr>
+        <p:txBody>
+          <a:bodyPr wrap="square" anchor="t" lIns="0" rIns="0" tIns="0" bIns="0">
+            <a:spAutoFit/>
+          </a:bodyPr>
+          <a:lstStyle/>
+          <a:p>
+            <a:pPr algn="l">
+              <a:lnSpc>
+                <a:spcPct val="100000"/>
+              </a:lnSpc>
+            </a:pPr>
+            <a:r>
+              <a:rPr sz="22000" b="1">
+                <a:solidFill>
+                  <a:srgbClr val="FFFFFF"/>
                 </a:solidFill>
                 <a:latin typeface="Arial"/>
               </a:rPr>
@@ -14232,14 +14447,14 @@
       </p:sp>
       <p:sp>
         <p:nvSpPr>
-          <p:cNvPr id="3" name="TextBox 2"/>
+          <p:cNvPr id="8" name="TextBox 7"/>
           <p:cNvSpPr txBox="1"/>
           <p:nvPr/>
         </p:nvSpPr>
         <p:spPr>
           <a:xfrm>
-            <a:off x="3840480" y="548640"/>
-            <a:ext cx="7863840" cy="2103120"/>
+            <a:off x="4206240" y="502920"/>
+            <a:ext cx="7589520" cy="2103120"/>
           </a:xfrm>
           <a:prstGeom prst="rect">
             <a:avLst/>
@@ -14271,14 +14486,14 @@
       </p:sp>
       <p:sp>
         <p:nvSpPr>
-          <p:cNvPr id="4" name="TextBox 3"/>
+          <p:cNvPr id="9" name="TextBox 8"/>
           <p:cNvSpPr txBox="1"/>
           <p:nvPr/>
         </p:nvSpPr>
         <p:spPr>
           <a:xfrm>
-            <a:off x="3840480" y="2743200"/>
-            <a:ext cx="7863840" cy="914400"/>
+            <a:off x="4206240" y="2697480"/>
+            <a:ext cx="7589520" cy="914400"/>
           </a:xfrm>
           <a:prstGeom prst="rect">
             <a:avLst/>
@@ -14310,14 +14525,14 @@
       </p:sp>
       <p:sp>
         <p:nvSpPr>
-          <p:cNvPr id="5" name="TextBox 4"/>
+          <p:cNvPr id="10" name="TextBox 9"/>
           <p:cNvSpPr txBox="1"/>
           <p:nvPr/>
         </p:nvSpPr>
         <p:spPr>
           <a:xfrm>
-            <a:off x="3840480" y="3794760"/>
-            <a:ext cx="7863840" cy="1005840"/>
+            <a:off x="4206240" y="3703320"/>
+            <a:ext cx="7589520" cy="1005840"/>
           </a:xfrm>
           <a:prstGeom prst="rect">
             <a:avLst/>
@@ -14349,14 +14564,14 @@
       </p:sp>
       <p:sp>
         <p:nvSpPr>
-          <p:cNvPr id="6" name="EXEMPT_PROGRESS"/>
+          <p:cNvPr id="11" name="EXEMPT_PROGRESS"/>
           <p:cNvSpPr txBox="1"/>
           <p:nvPr/>
         </p:nvSpPr>
         <p:spPr>
           <a:xfrm>
-            <a:off x="3840480" y="5074920"/>
-            <a:ext cx="7863840" cy="457200"/>
+            <a:off x="4206240" y="4983480"/>
+            <a:ext cx="7589520" cy="457200"/>
           </a:xfrm>
           <a:prstGeom prst="rect">
             <a:avLst/>
@@ -20673,14 +20888,190 @@
       <p:grpSpPr/>
       <p:sp>
         <p:nvSpPr>
-          <p:cNvPr id="2" name="TextBox 1"/>
+          <p:cNvPr id="2" name="Rectangle 1"/>
+          <p:cNvSpPr/>
+          <p:nvPr/>
+        </p:nvSpPr>
+        <p:spPr>
+          <a:xfrm>
+            <a:off x="0" y="0"/>
+            <a:ext cx="3657600" cy="6858000"/>
+          </a:xfrm>
+          <a:prstGeom prst="rect">
+            <a:avLst/>
+          </a:prstGeom>
+          <a:solidFill>
+            <a:srgbClr val="951C1D"/>
+          </a:solidFill>
+          <a:ln>
+            <a:noFill/>
+          </a:ln>
+          <a:effectLst/>
+        </p:spPr>
+        <p:style>
+          <a:lnRef idx="1">
+            <a:schemeClr val="accent1"/>
+          </a:lnRef>
+          <a:fillRef idx="3">
+            <a:schemeClr val="accent1"/>
+          </a:fillRef>
+          <a:effectRef idx="2">
+            <a:schemeClr val="accent1"/>
+          </a:effectRef>
+          <a:fontRef idx="minor">
+            <a:schemeClr val="lt1"/>
+          </a:fontRef>
+        </p:style>
+        <p:txBody>
+          <a:bodyPr rtlCol="0" anchor="ctr"/>
+          <a:lstStyle/>
+          <a:p>
+            <a:pPr algn="ctr"/>
+          </a:p>
+        </p:txBody>
+      </p:sp>
+      <p:sp>
+        <p:nvSpPr>
+          <p:cNvPr id="3" name="Rectangle 2"/>
+          <p:cNvSpPr/>
+          <p:nvPr/>
+        </p:nvSpPr>
+        <p:spPr>
+          <a:xfrm>
+            <a:off x="3657600" y="0"/>
+            <a:ext cx="146304" cy="6858000"/>
+          </a:xfrm>
+          <a:prstGeom prst="rect">
+            <a:avLst/>
+          </a:prstGeom>
+          <a:solidFill>
+            <a:srgbClr val="E1D8DE"/>
+          </a:solidFill>
+          <a:ln>
+            <a:noFill/>
+          </a:ln>
+          <a:effectLst/>
+        </p:spPr>
+        <p:style>
+          <a:lnRef idx="1">
+            <a:schemeClr val="accent1"/>
+          </a:lnRef>
+          <a:fillRef idx="3">
+            <a:schemeClr val="accent1"/>
+          </a:fillRef>
+          <a:effectRef idx="2">
+            <a:schemeClr val="accent1"/>
+          </a:effectRef>
+          <a:fontRef idx="minor">
+            <a:schemeClr val="lt1"/>
+          </a:fontRef>
+        </p:style>
+        <p:txBody>
+          <a:bodyPr rtlCol="0" anchor="ctr"/>
+          <a:lstStyle/>
+          <a:p>
+            <a:pPr algn="ctr"/>
+          </a:p>
+        </p:txBody>
+      </p:sp>
+      <p:sp>
+        <p:nvSpPr>
+          <p:cNvPr id="4" name="Rectangle 3"/>
+          <p:cNvSpPr/>
+          <p:nvPr/>
+        </p:nvSpPr>
+        <p:spPr>
+          <a:xfrm>
+            <a:off x="3803904" y="5989320"/>
+            <a:ext cx="8387791" cy="201168"/>
+          </a:xfrm>
+          <a:prstGeom prst="rect">
+            <a:avLst/>
+          </a:prstGeom>
+          <a:solidFill>
+            <a:srgbClr val="4C7F8C"/>
+          </a:solidFill>
+          <a:ln>
+            <a:noFill/>
+          </a:ln>
+          <a:effectLst/>
+        </p:spPr>
+        <p:style>
+          <a:lnRef idx="1">
+            <a:schemeClr val="accent1"/>
+          </a:lnRef>
+          <a:fillRef idx="3">
+            <a:schemeClr val="accent1"/>
+          </a:fillRef>
+          <a:effectRef idx="2">
+            <a:schemeClr val="accent1"/>
+          </a:effectRef>
+          <a:fontRef idx="minor">
+            <a:schemeClr val="lt1"/>
+          </a:fontRef>
+        </p:style>
+        <p:txBody>
+          <a:bodyPr rtlCol="0" anchor="ctr"/>
+          <a:lstStyle/>
+          <a:p>
+            <a:pPr algn="ctr"/>
+          </a:p>
+        </p:txBody>
+      </p:sp>
+      <p:sp>
+        <p:nvSpPr>
+          <p:cNvPr id="5" name="Rectangle 4"/>
+          <p:cNvSpPr/>
+          <p:nvPr/>
+        </p:nvSpPr>
+        <p:spPr>
+          <a:xfrm>
+            <a:off x="3803904" y="6190488"/>
+            <a:ext cx="8387791" cy="54864"/>
+          </a:xfrm>
+          <a:prstGeom prst="rect">
+            <a:avLst/>
+          </a:prstGeom>
+          <a:solidFill>
+            <a:srgbClr val="E1D8DE"/>
+          </a:solidFill>
+          <a:ln>
+            <a:noFill/>
+          </a:ln>
+          <a:effectLst/>
+        </p:spPr>
+        <p:style>
+          <a:lnRef idx="1">
+            <a:schemeClr val="accent1"/>
+          </a:lnRef>
+          <a:fillRef idx="3">
+            <a:schemeClr val="accent1"/>
+          </a:fillRef>
+          <a:effectRef idx="2">
+            <a:schemeClr val="accent1"/>
+          </a:effectRef>
+          <a:fontRef idx="minor">
+            <a:schemeClr val="lt1"/>
+          </a:fontRef>
+        </p:style>
+        <p:txBody>
+          <a:bodyPr rtlCol="0" anchor="ctr"/>
+          <a:lstStyle/>
+          <a:p>
+            <a:pPr algn="ctr"/>
+          </a:p>
+        </p:txBody>
+      </p:sp>
+      <p:sp>
+        <p:nvSpPr>
+          <p:cNvPr id="6" name="TextBox 5"/>
           <p:cNvSpPr txBox="1"/>
           <p:nvPr/>
         </p:nvSpPr>
         <p:spPr>
           <a:xfrm>
-            <a:off x="411480" y="914400"/>
-            <a:ext cx="3291840" cy="2743200"/>
+            <a:off x="320040" y="320040"/>
+            <a:ext cx="3108960" cy="457200"/>
           </a:xfrm>
           <a:prstGeom prst="rect">
             <a:avLst/>
@@ -20699,9 +21090,48 @@
               </a:lnSpc>
             </a:pPr>
             <a:r>
-              <a:rPr sz="18000" b="1">
-                <a:solidFill>
-                  <a:srgbClr val="F2B27A"/>
+              <a:rPr sz="2800" b="1">
+                <a:solidFill>
+                  <a:srgbClr val="FFFFFF"/>
+                </a:solidFill>
+                <a:latin typeface="Arial"/>
+              </a:rPr>
+              <a:t>PART</a:t>
+            </a:r>
+          </a:p>
+        </p:txBody>
+      </p:sp>
+      <p:sp>
+        <p:nvSpPr>
+          <p:cNvPr id="7" name="TextBox 6"/>
+          <p:cNvSpPr txBox="1"/>
+          <p:nvPr/>
+        </p:nvSpPr>
+        <p:spPr>
+          <a:xfrm>
+            <a:off x="182880" y="731520"/>
+            <a:ext cx="3383280" cy="3108960"/>
+          </a:xfrm>
+          <a:prstGeom prst="rect">
+            <a:avLst/>
+          </a:prstGeom>
+          <a:noFill/>
+        </p:spPr>
+        <p:txBody>
+          <a:bodyPr wrap="square" anchor="t" lIns="0" rIns="0" tIns="0" bIns="0">
+            <a:spAutoFit/>
+          </a:bodyPr>
+          <a:lstStyle/>
+          <a:p>
+            <a:pPr algn="l">
+              <a:lnSpc>
+                <a:spcPct val="100000"/>
+              </a:lnSpc>
+            </a:pPr>
+            <a:r>
+              <a:rPr sz="22000" b="1">
+                <a:solidFill>
+                  <a:srgbClr val="FFFFFF"/>
                 </a:solidFill>
                 <a:latin typeface="Arial"/>
               </a:rPr>
@@ -20712,14 +21142,14 @@
       </p:sp>
       <p:sp>
         <p:nvSpPr>
-          <p:cNvPr id="3" name="TextBox 2"/>
+          <p:cNvPr id="8" name="TextBox 7"/>
           <p:cNvSpPr txBox="1"/>
           <p:nvPr/>
         </p:nvSpPr>
         <p:spPr>
           <a:xfrm>
-            <a:off x="3840480" y="548640"/>
-            <a:ext cx="7863840" cy="2103120"/>
+            <a:off x="4206240" y="502920"/>
+            <a:ext cx="7589520" cy="2103120"/>
           </a:xfrm>
           <a:prstGeom prst="rect">
             <a:avLst/>
@@ -20751,14 +21181,14 @@
       </p:sp>
       <p:sp>
         <p:nvSpPr>
-          <p:cNvPr id="4" name="TextBox 3"/>
+          <p:cNvPr id="9" name="TextBox 8"/>
           <p:cNvSpPr txBox="1"/>
           <p:nvPr/>
         </p:nvSpPr>
         <p:spPr>
           <a:xfrm>
-            <a:off x="3840480" y="2743200"/>
-            <a:ext cx="7863840" cy="914400"/>
+            <a:off x="4206240" y="2697480"/>
+            <a:ext cx="7589520" cy="914400"/>
           </a:xfrm>
           <a:prstGeom prst="rect">
             <a:avLst/>
@@ -20790,14 +21220,14 @@
       </p:sp>
       <p:sp>
         <p:nvSpPr>
-          <p:cNvPr id="5" name="TextBox 4"/>
+          <p:cNvPr id="10" name="TextBox 9"/>
           <p:cNvSpPr txBox="1"/>
           <p:nvPr/>
         </p:nvSpPr>
         <p:spPr>
           <a:xfrm>
-            <a:off x="3840480" y="3794760"/>
-            <a:ext cx="7863840" cy="1005840"/>
+            <a:off x="4206240" y="3703320"/>
+            <a:ext cx="7589520" cy="1005840"/>
           </a:xfrm>
           <a:prstGeom prst="rect">
             <a:avLst/>
@@ -20829,14 +21259,14 @@
       </p:sp>
       <p:sp>
         <p:nvSpPr>
-          <p:cNvPr id="6" name="EXEMPT_PROGRESS"/>
+          <p:cNvPr id="11" name="EXEMPT_PROGRESS"/>
           <p:cNvSpPr txBox="1"/>
           <p:nvPr/>
         </p:nvSpPr>
         <p:spPr>
           <a:xfrm>
-            <a:off x="3840480" y="5074920"/>
-            <a:ext cx="7863840" cy="457200"/>
+            <a:off x="4206240" y="4983480"/>
+            <a:ext cx="7589520" cy="457200"/>
           </a:xfrm>
           <a:prstGeom prst="rect">
             <a:avLst/>
@@ -24845,14 +25275,190 @@
       <p:grpSpPr/>
       <p:sp>
         <p:nvSpPr>
-          <p:cNvPr id="2" name="TextBox 1"/>
+          <p:cNvPr id="2" name="Rectangle 1"/>
+          <p:cNvSpPr/>
+          <p:nvPr/>
+        </p:nvSpPr>
+        <p:spPr>
+          <a:xfrm>
+            <a:off x="0" y="0"/>
+            <a:ext cx="3657600" cy="6858000"/>
+          </a:xfrm>
+          <a:prstGeom prst="rect">
+            <a:avLst/>
+          </a:prstGeom>
+          <a:solidFill>
+            <a:srgbClr val="AF9510"/>
+          </a:solidFill>
+          <a:ln>
+            <a:noFill/>
+          </a:ln>
+          <a:effectLst/>
+        </p:spPr>
+        <p:style>
+          <a:lnRef idx="1">
+            <a:schemeClr val="accent1"/>
+          </a:lnRef>
+          <a:fillRef idx="3">
+            <a:schemeClr val="accent1"/>
+          </a:fillRef>
+          <a:effectRef idx="2">
+            <a:schemeClr val="accent1"/>
+          </a:effectRef>
+          <a:fontRef idx="minor">
+            <a:schemeClr val="lt1"/>
+          </a:fontRef>
+        </p:style>
+        <p:txBody>
+          <a:bodyPr rtlCol="0" anchor="ctr"/>
+          <a:lstStyle/>
+          <a:p>
+            <a:pPr algn="ctr"/>
+          </a:p>
+        </p:txBody>
+      </p:sp>
+      <p:sp>
+        <p:nvSpPr>
+          <p:cNvPr id="3" name="Rectangle 2"/>
+          <p:cNvSpPr/>
+          <p:nvPr/>
+        </p:nvSpPr>
+        <p:spPr>
+          <a:xfrm>
+            <a:off x="3657600" y="0"/>
+            <a:ext cx="146304" cy="6858000"/>
+          </a:xfrm>
+          <a:prstGeom prst="rect">
+            <a:avLst/>
+          </a:prstGeom>
+          <a:solidFill>
+            <a:srgbClr val="E1D8DE"/>
+          </a:solidFill>
+          <a:ln>
+            <a:noFill/>
+          </a:ln>
+          <a:effectLst/>
+        </p:spPr>
+        <p:style>
+          <a:lnRef idx="1">
+            <a:schemeClr val="accent1"/>
+          </a:lnRef>
+          <a:fillRef idx="3">
+            <a:schemeClr val="accent1"/>
+          </a:fillRef>
+          <a:effectRef idx="2">
+            <a:schemeClr val="accent1"/>
+          </a:effectRef>
+          <a:fontRef idx="minor">
+            <a:schemeClr val="lt1"/>
+          </a:fontRef>
+        </p:style>
+        <p:txBody>
+          <a:bodyPr rtlCol="0" anchor="ctr"/>
+          <a:lstStyle/>
+          <a:p>
+            <a:pPr algn="ctr"/>
+          </a:p>
+        </p:txBody>
+      </p:sp>
+      <p:sp>
+        <p:nvSpPr>
+          <p:cNvPr id="4" name="Rectangle 3"/>
+          <p:cNvSpPr/>
+          <p:nvPr/>
+        </p:nvSpPr>
+        <p:spPr>
+          <a:xfrm>
+            <a:off x="3803904" y="5989320"/>
+            <a:ext cx="8387791" cy="201168"/>
+          </a:xfrm>
+          <a:prstGeom prst="rect">
+            <a:avLst/>
+          </a:prstGeom>
+          <a:solidFill>
+            <a:srgbClr val="4C7F8C"/>
+          </a:solidFill>
+          <a:ln>
+            <a:noFill/>
+          </a:ln>
+          <a:effectLst/>
+        </p:spPr>
+        <p:style>
+          <a:lnRef idx="1">
+            <a:schemeClr val="accent1"/>
+          </a:lnRef>
+          <a:fillRef idx="3">
+            <a:schemeClr val="accent1"/>
+          </a:fillRef>
+          <a:effectRef idx="2">
+            <a:schemeClr val="accent1"/>
+          </a:effectRef>
+          <a:fontRef idx="minor">
+            <a:schemeClr val="lt1"/>
+          </a:fontRef>
+        </p:style>
+        <p:txBody>
+          <a:bodyPr rtlCol="0" anchor="ctr"/>
+          <a:lstStyle/>
+          <a:p>
+            <a:pPr algn="ctr"/>
+          </a:p>
+        </p:txBody>
+      </p:sp>
+      <p:sp>
+        <p:nvSpPr>
+          <p:cNvPr id="5" name="Rectangle 4"/>
+          <p:cNvSpPr/>
+          <p:nvPr/>
+        </p:nvSpPr>
+        <p:spPr>
+          <a:xfrm>
+            <a:off x="3803904" y="6190488"/>
+            <a:ext cx="8387791" cy="54864"/>
+          </a:xfrm>
+          <a:prstGeom prst="rect">
+            <a:avLst/>
+          </a:prstGeom>
+          <a:solidFill>
+            <a:srgbClr val="E1D8DE"/>
+          </a:solidFill>
+          <a:ln>
+            <a:noFill/>
+          </a:ln>
+          <a:effectLst/>
+        </p:spPr>
+        <p:style>
+          <a:lnRef idx="1">
+            <a:schemeClr val="accent1"/>
+          </a:lnRef>
+          <a:fillRef idx="3">
+            <a:schemeClr val="accent1"/>
+          </a:fillRef>
+          <a:effectRef idx="2">
+            <a:schemeClr val="accent1"/>
+          </a:effectRef>
+          <a:fontRef idx="minor">
+            <a:schemeClr val="lt1"/>
+          </a:fontRef>
+        </p:style>
+        <p:txBody>
+          <a:bodyPr rtlCol="0" anchor="ctr"/>
+          <a:lstStyle/>
+          <a:p>
+            <a:pPr algn="ctr"/>
+          </a:p>
+        </p:txBody>
+      </p:sp>
+      <p:sp>
+        <p:nvSpPr>
+          <p:cNvPr id="6" name="TextBox 5"/>
           <p:cNvSpPr txBox="1"/>
           <p:nvPr/>
         </p:nvSpPr>
         <p:spPr>
           <a:xfrm>
-            <a:off x="411480" y="914400"/>
-            <a:ext cx="3291840" cy="2743200"/>
+            <a:off x="320040" y="320040"/>
+            <a:ext cx="3108960" cy="457200"/>
           </a:xfrm>
           <a:prstGeom prst="rect">
             <a:avLst/>
@@ -24871,9 +25477,48 @@
               </a:lnSpc>
             </a:pPr>
             <a:r>
-              <a:rPr sz="18000" b="1">
-                <a:solidFill>
-                  <a:srgbClr val="F2B27A"/>
+              <a:rPr sz="2800" b="1">
+                <a:solidFill>
+                  <a:srgbClr val="14202E"/>
+                </a:solidFill>
+                <a:latin typeface="Arial"/>
+              </a:rPr>
+              <a:t>PART</a:t>
+            </a:r>
+          </a:p>
+        </p:txBody>
+      </p:sp>
+      <p:sp>
+        <p:nvSpPr>
+          <p:cNvPr id="7" name="TextBox 6"/>
+          <p:cNvSpPr txBox="1"/>
+          <p:nvPr/>
+        </p:nvSpPr>
+        <p:spPr>
+          <a:xfrm>
+            <a:off x="182880" y="731520"/>
+            <a:ext cx="3383280" cy="3108960"/>
+          </a:xfrm>
+          <a:prstGeom prst="rect">
+            <a:avLst/>
+          </a:prstGeom>
+          <a:noFill/>
+        </p:spPr>
+        <p:txBody>
+          <a:bodyPr wrap="square" anchor="t" lIns="0" rIns="0" tIns="0" bIns="0">
+            <a:spAutoFit/>
+          </a:bodyPr>
+          <a:lstStyle/>
+          <a:p>
+            <a:pPr algn="l">
+              <a:lnSpc>
+                <a:spcPct val="100000"/>
+              </a:lnSpc>
+            </a:pPr>
+            <a:r>
+              <a:rPr sz="22000" b="1">
+                <a:solidFill>
+                  <a:srgbClr val="14202E"/>
                 </a:solidFill>
                 <a:latin typeface="Arial"/>
               </a:rPr>
@@ -24884,14 +25529,14 @@
       </p:sp>
       <p:sp>
         <p:nvSpPr>
-          <p:cNvPr id="3" name="TextBox 2"/>
+          <p:cNvPr id="8" name="TextBox 7"/>
           <p:cNvSpPr txBox="1"/>
           <p:nvPr/>
         </p:nvSpPr>
         <p:spPr>
           <a:xfrm>
-            <a:off x="3840480" y="548640"/>
-            <a:ext cx="7863840" cy="2103120"/>
+            <a:off x="4206240" y="502920"/>
+            <a:ext cx="7589520" cy="2103120"/>
           </a:xfrm>
           <a:prstGeom prst="rect">
             <a:avLst/>
@@ -24923,14 +25568,14 @@
       </p:sp>
       <p:sp>
         <p:nvSpPr>
-          <p:cNvPr id="4" name="TextBox 3"/>
+          <p:cNvPr id="9" name="TextBox 8"/>
           <p:cNvSpPr txBox="1"/>
           <p:nvPr/>
         </p:nvSpPr>
         <p:spPr>
           <a:xfrm>
-            <a:off x="3840480" y="2743200"/>
-            <a:ext cx="7863840" cy="914400"/>
+            <a:off x="4206240" y="2697480"/>
+            <a:ext cx="7589520" cy="914400"/>
           </a:xfrm>
           <a:prstGeom prst="rect">
             <a:avLst/>
@@ -24962,14 +25607,14 @@
       </p:sp>
       <p:sp>
         <p:nvSpPr>
-          <p:cNvPr id="5" name="TextBox 4"/>
+          <p:cNvPr id="10" name="TextBox 9"/>
           <p:cNvSpPr txBox="1"/>
           <p:nvPr/>
         </p:nvSpPr>
         <p:spPr>
           <a:xfrm>
-            <a:off x="3840480" y="3794760"/>
-            <a:ext cx="7863840" cy="1005840"/>
+            <a:off x="4206240" y="3703320"/>
+            <a:ext cx="7589520" cy="1005840"/>
           </a:xfrm>
           <a:prstGeom prst="rect">
             <a:avLst/>
@@ -25001,14 +25646,14 @@
       </p:sp>
       <p:sp>
         <p:nvSpPr>
-          <p:cNvPr id="6" name="EXEMPT_PROGRESS"/>
+          <p:cNvPr id="11" name="EXEMPT_PROGRESS"/>
           <p:cNvSpPr txBox="1"/>
           <p:nvPr/>
         </p:nvSpPr>
         <p:spPr>
           <a:xfrm>
-            <a:off x="3840480" y="5074920"/>
-            <a:ext cx="7863840" cy="457200"/>
+            <a:off x="4206240" y="4983480"/>
+            <a:ext cx="7589520" cy="457200"/>
           </a:xfrm>
           <a:prstGeom prst="rect">
             <a:avLst/>
@@ -28478,14 +29123,190 @@
       <p:grpSpPr/>
       <p:sp>
         <p:nvSpPr>
-          <p:cNvPr id="2" name="TextBox 1"/>
+          <p:cNvPr id="2" name="Rectangle 1"/>
+          <p:cNvSpPr/>
+          <p:nvPr/>
+        </p:nvSpPr>
+        <p:spPr>
+          <a:xfrm>
+            <a:off x="0" y="0"/>
+            <a:ext cx="3657600" cy="6858000"/>
+          </a:xfrm>
+          <a:prstGeom prst="rect">
+            <a:avLst/>
+          </a:prstGeom>
+          <a:solidFill>
+            <a:srgbClr val="951C1D"/>
+          </a:solidFill>
+          <a:ln>
+            <a:noFill/>
+          </a:ln>
+          <a:effectLst/>
+        </p:spPr>
+        <p:style>
+          <a:lnRef idx="1">
+            <a:schemeClr val="accent1"/>
+          </a:lnRef>
+          <a:fillRef idx="3">
+            <a:schemeClr val="accent1"/>
+          </a:fillRef>
+          <a:effectRef idx="2">
+            <a:schemeClr val="accent1"/>
+          </a:effectRef>
+          <a:fontRef idx="minor">
+            <a:schemeClr val="lt1"/>
+          </a:fontRef>
+        </p:style>
+        <p:txBody>
+          <a:bodyPr rtlCol="0" anchor="ctr"/>
+          <a:lstStyle/>
+          <a:p>
+            <a:pPr algn="ctr"/>
+          </a:p>
+        </p:txBody>
+      </p:sp>
+      <p:sp>
+        <p:nvSpPr>
+          <p:cNvPr id="3" name="Rectangle 2"/>
+          <p:cNvSpPr/>
+          <p:nvPr/>
+        </p:nvSpPr>
+        <p:spPr>
+          <a:xfrm>
+            <a:off x="3657600" y="0"/>
+            <a:ext cx="146304" cy="6858000"/>
+          </a:xfrm>
+          <a:prstGeom prst="rect">
+            <a:avLst/>
+          </a:prstGeom>
+          <a:solidFill>
+            <a:srgbClr val="E1D8DE"/>
+          </a:solidFill>
+          <a:ln>
+            <a:noFill/>
+          </a:ln>
+          <a:effectLst/>
+        </p:spPr>
+        <p:style>
+          <a:lnRef idx="1">
+            <a:schemeClr val="accent1"/>
+          </a:lnRef>
+          <a:fillRef idx="3">
+            <a:schemeClr val="accent1"/>
+          </a:fillRef>
+          <a:effectRef idx="2">
+            <a:schemeClr val="accent1"/>
+          </a:effectRef>
+          <a:fontRef idx="minor">
+            <a:schemeClr val="lt1"/>
+          </a:fontRef>
+        </p:style>
+        <p:txBody>
+          <a:bodyPr rtlCol="0" anchor="ctr"/>
+          <a:lstStyle/>
+          <a:p>
+            <a:pPr algn="ctr"/>
+          </a:p>
+        </p:txBody>
+      </p:sp>
+      <p:sp>
+        <p:nvSpPr>
+          <p:cNvPr id="4" name="Rectangle 3"/>
+          <p:cNvSpPr/>
+          <p:nvPr/>
+        </p:nvSpPr>
+        <p:spPr>
+          <a:xfrm>
+            <a:off x="3803904" y="5989320"/>
+            <a:ext cx="8387791" cy="201168"/>
+          </a:xfrm>
+          <a:prstGeom prst="rect">
+            <a:avLst/>
+          </a:prstGeom>
+          <a:solidFill>
+            <a:srgbClr val="4C7F8C"/>
+          </a:solidFill>
+          <a:ln>
+            <a:noFill/>
+          </a:ln>
+          <a:effectLst/>
+        </p:spPr>
+        <p:style>
+          <a:lnRef idx="1">
+            <a:schemeClr val="accent1"/>
+          </a:lnRef>
+          <a:fillRef idx="3">
+            <a:schemeClr val="accent1"/>
+          </a:fillRef>
+          <a:effectRef idx="2">
+            <a:schemeClr val="accent1"/>
+          </a:effectRef>
+          <a:fontRef idx="minor">
+            <a:schemeClr val="lt1"/>
+          </a:fontRef>
+        </p:style>
+        <p:txBody>
+          <a:bodyPr rtlCol="0" anchor="ctr"/>
+          <a:lstStyle/>
+          <a:p>
+            <a:pPr algn="ctr"/>
+          </a:p>
+        </p:txBody>
+      </p:sp>
+      <p:sp>
+        <p:nvSpPr>
+          <p:cNvPr id="5" name="Rectangle 4"/>
+          <p:cNvSpPr/>
+          <p:nvPr/>
+        </p:nvSpPr>
+        <p:spPr>
+          <a:xfrm>
+            <a:off x="3803904" y="6190488"/>
+            <a:ext cx="8387791" cy="54864"/>
+          </a:xfrm>
+          <a:prstGeom prst="rect">
+            <a:avLst/>
+          </a:prstGeom>
+          <a:solidFill>
+            <a:srgbClr val="E1D8DE"/>
+          </a:solidFill>
+          <a:ln>
+            <a:noFill/>
+          </a:ln>
+          <a:effectLst/>
+        </p:spPr>
+        <p:style>
+          <a:lnRef idx="1">
+            <a:schemeClr val="accent1"/>
+          </a:lnRef>
+          <a:fillRef idx="3">
+            <a:schemeClr val="accent1"/>
+          </a:fillRef>
+          <a:effectRef idx="2">
+            <a:schemeClr val="accent1"/>
+          </a:effectRef>
+          <a:fontRef idx="minor">
+            <a:schemeClr val="lt1"/>
+          </a:fontRef>
+        </p:style>
+        <p:txBody>
+          <a:bodyPr rtlCol="0" anchor="ctr"/>
+          <a:lstStyle/>
+          <a:p>
+            <a:pPr algn="ctr"/>
+          </a:p>
+        </p:txBody>
+      </p:sp>
+      <p:sp>
+        <p:nvSpPr>
+          <p:cNvPr id="6" name="TextBox 5"/>
           <p:cNvSpPr txBox="1"/>
           <p:nvPr/>
         </p:nvSpPr>
         <p:spPr>
           <a:xfrm>
-            <a:off x="411480" y="914400"/>
-            <a:ext cx="3291840" cy="2743200"/>
+            <a:off x="320040" y="320040"/>
+            <a:ext cx="3108960" cy="457200"/>
           </a:xfrm>
           <a:prstGeom prst="rect">
             <a:avLst/>
@@ -28504,9 +29325,48 @@
               </a:lnSpc>
             </a:pPr>
             <a:r>
-              <a:rPr sz="18000" b="1">
-                <a:solidFill>
-                  <a:srgbClr val="F2B27A"/>
+              <a:rPr sz="2800" b="1">
+                <a:solidFill>
+                  <a:srgbClr val="FFFFFF"/>
+                </a:solidFill>
+                <a:latin typeface="Arial"/>
+              </a:rPr>
+              <a:t>PART</a:t>
+            </a:r>
+          </a:p>
+        </p:txBody>
+      </p:sp>
+      <p:sp>
+        <p:nvSpPr>
+          <p:cNvPr id="7" name="TextBox 6"/>
+          <p:cNvSpPr txBox="1"/>
+          <p:nvPr/>
+        </p:nvSpPr>
+        <p:spPr>
+          <a:xfrm>
+            <a:off x="182880" y="731520"/>
+            <a:ext cx="3383280" cy="3108960"/>
+          </a:xfrm>
+          <a:prstGeom prst="rect">
+            <a:avLst/>
+          </a:prstGeom>
+          <a:noFill/>
+        </p:spPr>
+        <p:txBody>
+          <a:bodyPr wrap="square" anchor="t" lIns="0" rIns="0" tIns="0" bIns="0">
+            <a:spAutoFit/>
+          </a:bodyPr>
+          <a:lstStyle/>
+          <a:p>
+            <a:pPr algn="l">
+              <a:lnSpc>
+                <a:spcPct val="100000"/>
+              </a:lnSpc>
+            </a:pPr>
+            <a:r>
+              <a:rPr sz="22000" b="1">
+                <a:solidFill>
+                  <a:srgbClr val="FFFFFF"/>
                 </a:solidFill>
                 <a:latin typeface="Arial"/>
               </a:rPr>
@@ -28517,14 +29377,14 @@
       </p:sp>
       <p:sp>
         <p:nvSpPr>
-          <p:cNvPr id="3" name="TextBox 2"/>
+          <p:cNvPr id="8" name="TextBox 7"/>
           <p:cNvSpPr txBox="1"/>
           <p:nvPr/>
         </p:nvSpPr>
         <p:spPr>
           <a:xfrm>
-            <a:off x="3840480" y="548640"/>
-            <a:ext cx="7863840" cy="2103120"/>
+            <a:off x="4206240" y="502920"/>
+            <a:ext cx="7589520" cy="2103120"/>
           </a:xfrm>
           <a:prstGeom prst="rect">
             <a:avLst/>
@@ -28556,14 +29416,14 @@
       </p:sp>
       <p:sp>
         <p:nvSpPr>
-          <p:cNvPr id="4" name="TextBox 3"/>
+          <p:cNvPr id="9" name="TextBox 8"/>
           <p:cNvSpPr txBox="1"/>
           <p:nvPr/>
         </p:nvSpPr>
         <p:spPr>
           <a:xfrm>
-            <a:off x="3840480" y="2743200"/>
-            <a:ext cx="7863840" cy="914400"/>
+            <a:off x="4206240" y="2697480"/>
+            <a:ext cx="7589520" cy="914400"/>
           </a:xfrm>
           <a:prstGeom prst="rect">
             <a:avLst/>
@@ -28595,14 +29455,14 @@
       </p:sp>
       <p:sp>
         <p:nvSpPr>
-          <p:cNvPr id="5" name="TextBox 4"/>
+          <p:cNvPr id="10" name="TextBox 9"/>
           <p:cNvSpPr txBox="1"/>
           <p:nvPr/>
         </p:nvSpPr>
         <p:spPr>
           <a:xfrm>
-            <a:off x="3840480" y="3794760"/>
-            <a:ext cx="7863840" cy="1005840"/>
+            <a:off x="4206240" y="3703320"/>
+            <a:ext cx="7589520" cy="1005840"/>
           </a:xfrm>
           <a:prstGeom prst="rect">
             <a:avLst/>
@@ -28634,14 +29494,14 @@
       </p:sp>
       <p:sp>
         <p:nvSpPr>
-          <p:cNvPr id="6" name="EXEMPT_PROGRESS"/>
+          <p:cNvPr id="11" name="EXEMPT_PROGRESS"/>
           <p:cNvSpPr txBox="1"/>
           <p:nvPr/>
         </p:nvSpPr>
         <p:spPr>
           <a:xfrm>
-            <a:off x="3840480" y="5074920"/>
-            <a:ext cx="7863840" cy="457200"/>
+            <a:off x="4206240" y="4983480"/>
+            <a:ext cx="7589520" cy="457200"/>
           </a:xfrm>
           <a:prstGeom prst="rect">
             <a:avLst/>
@@ -31579,14 +32439,190 @@
       <p:grpSpPr/>
       <p:sp>
         <p:nvSpPr>
-          <p:cNvPr id="2" name="TextBox 1"/>
+          <p:cNvPr id="2" name="Rectangle 1"/>
+          <p:cNvSpPr/>
+          <p:nvPr/>
+        </p:nvSpPr>
+        <p:spPr>
+          <a:xfrm>
+            <a:off x="0" y="0"/>
+            <a:ext cx="3657600" cy="6858000"/>
+          </a:xfrm>
+          <a:prstGeom prst="rect">
+            <a:avLst/>
+          </a:prstGeom>
+          <a:solidFill>
+            <a:srgbClr val="222C5E"/>
+          </a:solidFill>
+          <a:ln>
+            <a:noFill/>
+          </a:ln>
+          <a:effectLst/>
+        </p:spPr>
+        <p:style>
+          <a:lnRef idx="1">
+            <a:schemeClr val="accent1"/>
+          </a:lnRef>
+          <a:fillRef idx="3">
+            <a:schemeClr val="accent1"/>
+          </a:fillRef>
+          <a:effectRef idx="2">
+            <a:schemeClr val="accent1"/>
+          </a:effectRef>
+          <a:fontRef idx="minor">
+            <a:schemeClr val="lt1"/>
+          </a:fontRef>
+        </p:style>
+        <p:txBody>
+          <a:bodyPr rtlCol="0" anchor="ctr"/>
+          <a:lstStyle/>
+          <a:p>
+            <a:pPr algn="ctr"/>
+          </a:p>
+        </p:txBody>
+      </p:sp>
+      <p:sp>
+        <p:nvSpPr>
+          <p:cNvPr id="3" name="Rectangle 2"/>
+          <p:cNvSpPr/>
+          <p:nvPr/>
+        </p:nvSpPr>
+        <p:spPr>
+          <a:xfrm>
+            <a:off x="3657600" y="0"/>
+            <a:ext cx="146304" cy="6858000"/>
+          </a:xfrm>
+          <a:prstGeom prst="rect">
+            <a:avLst/>
+          </a:prstGeom>
+          <a:solidFill>
+            <a:srgbClr val="E1D8DE"/>
+          </a:solidFill>
+          <a:ln>
+            <a:noFill/>
+          </a:ln>
+          <a:effectLst/>
+        </p:spPr>
+        <p:style>
+          <a:lnRef idx="1">
+            <a:schemeClr val="accent1"/>
+          </a:lnRef>
+          <a:fillRef idx="3">
+            <a:schemeClr val="accent1"/>
+          </a:fillRef>
+          <a:effectRef idx="2">
+            <a:schemeClr val="accent1"/>
+          </a:effectRef>
+          <a:fontRef idx="minor">
+            <a:schemeClr val="lt1"/>
+          </a:fontRef>
+        </p:style>
+        <p:txBody>
+          <a:bodyPr rtlCol="0" anchor="ctr"/>
+          <a:lstStyle/>
+          <a:p>
+            <a:pPr algn="ctr"/>
+          </a:p>
+        </p:txBody>
+      </p:sp>
+      <p:sp>
+        <p:nvSpPr>
+          <p:cNvPr id="4" name="Rectangle 3"/>
+          <p:cNvSpPr/>
+          <p:nvPr/>
+        </p:nvSpPr>
+        <p:spPr>
+          <a:xfrm>
+            <a:off x="3803904" y="5989320"/>
+            <a:ext cx="8387791" cy="201168"/>
+          </a:xfrm>
+          <a:prstGeom prst="rect">
+            <a:avLst/>
+          </a:prstGeom>
+          <a:solidFill>
+            <a:srgbClr val="4C7F8C"/>
+          </a:solidFill>
+          <a:ln>
+            <a:noFill/>
+          </a:ln>
+          <a:effectLst/>
+        </p:spPr>
+        <p:style>
+          <a:lnRef idx="1">
+            <a:schemeClr val="accent1"/>
+          </a:lnRef>
+          <a:fillRef idx="3">
+            <a:schemeClr val="accent1"/>
+          </a:fillRef>
+          <a:effectRef idx="2">
+            <a:schemeClr val="accent1"/>
+          </a:effectRef>
+          <a:fontRef idx="minor">
+            <a:schemeClr val="lt1"/>
+          </a:fontRef>
+        </p:style>
+        <p:txBody>
+          <a:bodyPr rtlCol="0" anchor="ctr"/>
+          <a:lstStyle/>
+          <a:p>
+            <a:pPr algn="ctr"/>
+          </a:p>
+        </p:txBody>
+      </p:sp>
+      <p:sp>
+        <p:nvSpPr>
+          <p:cNvPr id="5" name="Rectangle 4"/>
+          <p:cNvSpPr/>
+          <p:nvPr/>
+        </p:nvSpPr>
+        <p:spPr>
+          <a:xfrm>
+            <a:off x="3803904" y="6190488"/>
+            <a:ext cx="8387791" cy="54864"/>
+          </a:xfrm>
+          <a:prstGeom prst="rect">
+            <a:avLst/>
+          </a:prstGeom>
+          <a:solidFill>
+            <a:srgbClr val="E1D8DE"/>
+          </a:solidFill>
+          <a:ln>
+            <a:noFill/>
+          </a:ln>
+          <a:effectLst/>
+        </p:spPr>
+        <p:style>
+          <a:lnRef idx="1">
+            <a:schemeClr val="accent1"/>
+          </a:lnRef>
+          <a:fillRef idx="3">
+            <a:schemeClr val="accent1"/>
+          </a:fillRef>
+          <a:effectRef idx="2">
+            <a:schemeClr val="accent1"/>
+          </a:effectRef>
+          <a:fontRef idx="minor">
+            <a:schemeClr val="lt1"/>
+          </a:fontRef>
+        </p:style>
+        <p:txBody>
+          <a:bodyPr rtlCol="0" anchor="ctr"/>
+          <a:lstStyle/>
+          <a:p>
+            <a:pPr algn="ctr"/>
+          </a:p>
+        </p:txBody>
+      </p:sp>
+      <p:sp>
+        <p:nvSpPr>
+          <p:cNvPr id="6" name="TextBox 5"/>
           <p:cNvSpPr txBox="1"/>
           <p:nvPr/>
         </p:nvSpPr>
         <p:spPr>
           <a:xfrm>
-            <a:off x="411480" y="914400"/>
-            <a:ext cx="3291840" cy="2743200"/>
+            <a:off x="320040" y="320040"/>
+            <a:ext cx="3108960" cy="457200"/>
           </a:xfrm>
           <a:prstGeom prst="rect">
             <a:avLst/>
@@ -31605,9 +32641,48 @@
               </a:lnSpc>
             </a:pPr>
             <a:r>
-              <a:rPr sz="18000" b="1">
-                <a:solidFill>
-                  <a:srgbClr val="F2B27A"/>
+              <a:rPr sz="2800" b="1">
+                <a:solidFill>
+                  <a:srgbClr val="FFFFFF"/>
+                </a:solidFill>
+                <a:latin typeface="Arial"/>
+              </a:rPr>
+              <a:t>PART</a:t>
+            </a:r>
+          </a:p>
+        </p:txBody>
+      </p:sp>
+      <p:sp>
+        <p:nvSpPr>
+          <p:cNvPr id="7" name="TextBox 6"/>
+          <p:cNvSpPr txBox="1"/>
+          <p:nvPr/>
+        </p:nvSpPr>
+        <p:spPr>
+          <a:xfrm>
+            <a:off x="182880" y="731520"/>
+            <a:ext cx="3383280" cy="3108960"/>
+          </a:xfrm>
+          <a:prstGeom prst="rect">
+            <a:avLst/>
+          </a:prstGeom>
+          <a:noFill/>
+        </p:spPr>
+        <p:txBody>
+          <a:bodyPr wrap="square" anchor="t" lIns="0" rIns="0" tIns="0" bIns="0">
+            <a:spAutoFit/>
+          </a:bodyPr>
+          <a:lstStyle/>
+          <a:p>
+            <a:pPr algn="l">
+              <a:lnSpc>
+                <a:spcPct val="100000"/>
+              </a:lnSpc>
+            </a:pPr>
+            <a:r>
+              <a:rPr sz="22000" b="1">
+                <a:solidFill>
+                  <a:srgbClr val="FFFFFF"/>
                 </a:solidFill>
                 <a:latin typeface="Arial"/>
               </a:rPr>
@@ -31618,14 +32693,14 @@
       </p:sp>
       <p:sp>
         <p:nvSpPr>
-          <p:cNvPr id="3" name="TextBox 2"/>
+          <p:cNvPr id="8" name="TextBox 7"/>
           <p:cNvSpPr txBox="1"/>
           <p:nvPr/>
         </p:nvSpPr>
         <p:spPr>
           <a:xfrm>
-            <a:off x="3840480" y="548640"/>
-            <a:ext cx="7863840" cy="2103120"/>
+            <a:off x="4206240" y="502920"/>
+            <a:ext cx="7589520" cy="2103120"/>
           </a:xfrm>
           <a:prstGeom prst="rect">
             <a:avLst/>
@@ -31657,14 +32732,14 @@
       </p:sp>
       <p:sp>
         <p:nvSpPr>
-          <p:cNvPr id="4" name="TextBox 3"/>
+          <p:cNvPr id="9" name="TextBox 8"/>
           <p:cNvSpPr txBox="1"/>
           <p:nvPr/>
         </p:nvSpPr>
         <p:spPr>
           <a:xfrm>
-            <a:off x="3840480" y="2743200"/>
-            <a:ext cx="7863840" cy="914400"/>
+            <a:off x="4206240" y="2697480"/>
+            <a:ext cx="7589520" cy="914400"/>
           </a:xfrm>
           <a:prstGeom prst="rect">
             <a:avLst/>
@@ -31696,14 +32771,14 @@
       </p:sp>
       <p:sp>
         <p:nvSpPr>
-          <p:cNvPr id="5" name="TextBox 4"/>
+          <p:cNvPr id="10" name="TextBox 9"/>
           <p:cNvSpPr txBox="1"/>
           <p:nvPr/>
         </p:nvSpPr>
         <p:spPr>
           <a:xfrm>
-            <a:off x="3840480" y="3794760"/>
-            <a:ext cx="7863840" cy="1005840"/>
+            <a:off x="4206240" y="3703320"/>
+            <a:ext cx="7589520" cy="1005840"/>
           </a:xfrm>
           <a:prstGeom prst="rect">
             <a:avLst/>
@@ -31735,14 +32810,14 @@
       </p:sp>
       <p:sp>
         <p:nvSpPr>
-          <p:cNvPr id="6" name="EXEMPT_PROGRESS"/>
+          <p:cNvPr id="11" name="EXEMPT_PROGRESS"/>
           <p:cNvSpPr txBox="1"/>
           <p:nvPr/>
         </p:nvSpPr>
         <p:spPr>
           <a:xfrm>
-            <a:off x="3840480" y="5074920"/>
-            <a:ext cx="7863840" cy="457200"/>
+            <a:off x="4206240" y="4983480"/>
+            <a:ext cx="7589520" cy="457200"/>
           </a:xfrm>
           <a:prstGeom prst="rect">
             <a:avLst/>
@@ -34635,14 +35710,190 @@
       <p:grpSpPr/>
       <p:sp>
         <p:nvSpPr>
-          <p:cNvPr id="2" name="TextBox 1"/>
+          <p:cNvPr id="2" name="Rectangle 1"/>
+          <p:cNvSpPr/>
+          <p:nvPr/>
+        </p:nvSpPr>
+        <p:spPr>
+          <a:xfrm>
+            <a:off x="0" y="0"/>
+            <a:ext cx="3657600" cy="6858000"/>
+          </a:xfrm>
+          <a:prstGeom prst="rect">
+            <a:avLst/>
+          </a:prstGeom>
+          <a:solidFill>
+            <a:srgbClr val="AF9510"/>
+          </a:solidFill>
+          <a:ln>
+            <a:noFill/>
+          </a:ln>
+          <a:effectLst/>
+        </p:spPr>
+        <p:style>
+          <a:lnRef idx="1">
+            <a:schemeClr val="accent1"/>
+          </a:lnRef>
+          <a:fillRef idx="3">
+            <a:schemeClr val="accent1"/>
+          </a:fillRef>
+          <a:effectRef idx="2">
+            <a:schemeClr val="accent1"/>
+          </a:effectRef>
+          <a:fontRef idx="minor">
+            <a:schemeClr val="lt1"/>
+          </a:fontRef>
+        </p:style>
+        <p:txBody>
+          <a:bodyPr rtlCol="0" anchor="ctr"/>
+          <a:lstStyle/>
+          <a:p>
+            <a:pPr algn="ctr"/>
+          </a:p>
+        </p:txBody>
+      </p:sp>
+      <p:sp>
+        <p:nvSpPr>
+          <p:cNvPr id="3" name="Rectangle 2"/>
+          <p:cNvSpPr/>
+          <p:nvPr/>
+        </p:nvSpPr>
+        <p:spPr>
+          <a:xfrm>
+            <a:off x="3657600" y="0"/>
+            <a:ext cx="146304" cy="6858000"/>
+          </a:xfrm>
+          <a:prstGeom prst="rect">
+            <a:avLst/>
+          </a:prstGeom>
+          <a:solidFill>
+            <a:srgbClr val="E1D8DE"/>
+          </a:solidFill>
+          <a:ln>
+            <a:noFill/>
+          </a:ln>
+          <a:effectLst/>
+        </p:spPr>
+        <p:style>
+          <a:lnRef idx="1">
+            <a:schemeClr val="accent1"/>
+          </a:lnRef>
+          <a:fillRef idx="3">
+            <a:schemeClr val="accent1"/>
+          </a:fillRef>
+          <a:effectRef idx="2">
+            <a:schemeClr val="accent1"/>
+          </a:effectRef>
+          <a:fontRef idx="minor">
+            <a:schemeClr val="lt1"/>
+          </a:fontRef>
+        </p:style>
+        <p:txBody>
+          <a:bodyPr rtlCol="0" anchor="ctr"/>
+          <a:lstStyle/>
+          <a:p>
+            <a:pPr algn="ctr"/>
+          </a:p>
+        </p:txBody>
+      </p:sp>
+      <p:sp>
+        <p:nvSpPr>
+          <p:cNvPr id="4" name="Rectangle 3"/>
+          <p:cNvSpPr/>
+          <p:nvPr/>
+        </p:nvSpPr>
+        <p:spPr>
+          <a:xfrm>
+            <a:off x="3803904" y="5989320"/>
+            <a:ext cx="8387791" cy="201168"/>
+          </a:xfrm>
+          <a:prstGeom prst="rect">
+            <a:avLst/>
+          </a:prstGeom>
+          <a:solidFill>
+            <a:srgbClr val="4C7F8C"/>
+          </a:solidFill>
+          <a:ln>
+            <a:noFill/>
+          </a:ln>
+          <a:effectLst/>
+        </p:spPr>
+        <p:style>
+          <a:lnRef idx="1">
+            <a:schemeClr val="accent1"/>
+          </a:lnRef>
+          <a:fillRef idx="3">
+            <a:schemeClr val="accent1"/>
+          </a:fillRef>
+          <a:effectRef idx="2">
+            <a:schemeClr val="accent1"/>
+          </a:effectRef>
+          <a:fontRef idx="minor">
+            <a:schemeClr val="lt1"/>
+          </a:fontRef>
+        </p:style>
+        <p:txBody>
+          <a:bodyPr rtlCol="0" anchor="ctr"/>
+          <a:lstStyle/>
+          <a:p>
+            <a:pPr algn="ctr"/>
+          </a:p>
+        </p:txBody>
+      </p:sp>
+      <p:sp>
+        <p:nvSpPr>
+          <p:cNvPr id="5" name="Rectangle 4"/>
+          <p:cNvSpPr/>
+          <p:nvPr/>
+        </p:nvSpPr>
+        <p:spPr>
+          <a:xfrm>
+            <a:off x="3803904" y="6190488"/>
+            <a:ext cx="8387791" cy="54864"/>
+          </a:xfrm>
+          <a:prstGeom prst="rect">
+            <a:avLst/>
+          </a:prstGeom>
+          <a:solidFill>
+            <a:srgbClr val="E1D8DE"/>
+          </a:solidFill>
+          <a:ln>
+            <a:noFill/>
+          </a:ln>
+          <a:effectLst/>
+        </p:spPr>
+        <p:style>
+          <a:lnRef idx="1">
+            <a:schemeClr val="accent1"/>
+          </a:lnRef>
+          <a:fillRef idx="3">
+            <a:schemeClr val="accent1"/>
+          </a:fillRef>
+          <a:effectRef idx="2">
+            <a:schemeClr val="accent1"/>
+          </a:effectRef>
+          <a:fontRef idx="minor">
+            <a:schemeClr val="lt1"/>
+          </a:fontRef>
+        </p:style>
+        <p:txBody>
+          <a:bodyPr rtlCol="0" anchor="ctr"/>
+          <a:lstStyle/>
+          <a:p>
+            <a:pPr algn="ctr"/>
+          </a:p>
+        </p:txBody>
+      </p:sp>
+      <p:sp>
+        <p:nvSpPr>
+          <p:cNvPr id="6" name="TextBox 5"/>
           <p:cNvSpPr txBox="1"/>
           <p:nvPr/>
         </p:nvSpPr>
         <p:spPr>
           <a:xfrm>
-            <a:off x="411480" y="914400"/>
-            <a:ext cx="3291840" cy="2743200"/>
+            <a:off x="320040" y="320040"/>
+            <a:ext cx="3108960" cy="457200"/>
           </a:xfrm>
           <a:prstGeom prst="rect">
             <a:avLst/>
@@ -34661,9 +35912,48 @@
               </a:lnSpc>
             </a:pPr>
             <a:r>
-              <a:rPr sz="18000" b="1">
-                <a:solidFill>
-                  <a:srgbClr val="F2B27A"/>
+              <a:rPr sz="2800" b="1">
+                <a:solidFill>
+                  <a:srgbClr val="14202E"/>
+                </a:solidFill>
+                <a:latin typeface="Arial"/>
+              </a:rPr>
+              <a:t>PART</a:t>
+            </a:r>
+          </a:p>
+        </p:txBody>
+      </p:sp>
+      <p:sp>
+        <p:nvSpPr>
+          <p:cNvPr id="7" name="TextBox 6"/>
+          <p:cNvSpPr txBox="1"/>
+          <p:nvPr/>
+        </p:nvSpPr>
+        <p:spPr>
+          <a:xfrm>
+            <a:off x="182880" y="731520"/>
+            <a:ext cx="3383280" cy="3108960"/>
+          </a:xfrm>
+          <a:prstGeom prst="rect">
+            <a:avLst/>
+          </a:prstGeom>
+          <a:noFill/>
+        </p:spPr>
+        <p:txBody>
+          <a:bodyPr wrap="square" anchor="t" lIns="0" rIns="0" tIns="0" bIns="0">
+            <a:spAutoFit/>
+          </a:bodyPr>
+          <a:lstStyle/>
+          <a:p>
+            <a:pPr algn="l">
+              <a:lnSpc>
+                <a:spcPct val="100000"/>
+              </a:lnSpc>
+            </a:pPr>
+            <a:r>
+              <a:rPr sz="22000" b="1">
+                <a:solidFill>
+                  <a:srgbClr val="14202E"/>
                 </a:solidFill>
                 <a:latin typeface="Arial"/>
               </a:rPr>
@@ -34674,14 +35964,14 @@
       </p:sp>
       <p:sp>
         <p:nvSpPr>
-          <p:cNvPr id="3" name="TextBox 2"/>
+          <p:cNvPr id="8" name="TextBox 7"/>
           <p:cNvSpPr txBox="1"/>
           <p:nvPr/>
         </p:nvSpPr>
         <p:spPr>
           <a:xfrm>
-            <a:off x="3840480" y="548640"/>
-            <a:ext cx="7863840" cy="2103120"/>
+            <a:off x="4206240" y="502920"/>
+            <a:ext cx="7589520" cy="2103120"/>
           </a:xfrm>
           <a:prstGeom prst="rect">
             <a:avLst/>
@@ -34713,14 +36003,14 @@
       </p:sp>
       <p:sp>
         <p:nvSpPr>
-          <p:cNvPr id="4" name="TextBox 3"/>
+          <p:cNvPr id="9" name="TextBox 8"/>
           <p:cNvSpPr txBox="1"/>
           <p:nvPr/>
         </p:nvSpPr>
         <p:spPr>
           <a:xfrm>
-            <a:off x="3840480" y="2743200"/>
-            <a:ext cx="7863840" cy="914400"/>
+            <a:off x="4206240" y="2697480"/>
+            <a:ext cx="7589520" cy="914400"/>
           </a:xfrm>
           <a:prstGeom prst="rect">
             <a:avLst/>
@@ -34752,14 +36042,14 @@
       </p:sp>
       <p:sp>
         <p:nvSpPr>
-          <p:cNvPr id="5" name="TextBox 4"/>
+          <p:cNvPr id="10" name="TextBox 9"/>
           <p:cNvSpPr txBox="1"/>
           <p:nvPr/>
         </p:nvSpPr>
         <p:spPr>
           <a:xfrm>
-            <a:off x="3840480" y="3794760"/>
-            <a:ext cx="7863840" cy="1005840"/>
+            <a:off x="4206240" y="3703320"/>
+            <a:ext cx="7589520" cy="1005840"/>
           </a:xfrm>
           <a:prstGeom prst="rect">
             <a:avLst/>
@@ -34791,14 +36081,14 @@
       </p:sp>
       <p:sp>
         <p:nvSpPr>
-          <p:cNvPr id="6" name="EXEMPT_PROGRESS"/>
+          <p:cNvPr id="11" name="EXEMPT_PROGRESS"/>
           <p:cNvSpPr txBox="1"/>
           <p:nvPr/>
         </p:nvSpPr>
         <p:spPr>
           <a:xfrm>
-            <a:off x="3840480" y="5074920"/>
-            <a:ext cx="7863840" cy="457200"/>
+            <a:off x="4206240" y="4983480"/>
+            <a:ext cx="7589520" cy="457200"/>
           </a:xfrm>
           <a:prstGeom prst="rect">
             <a:avLst/>
@@ -37358,14 +38648,190 @@
       <p:grpSpPr/>
       <p:sp>
         <p:nvSpPr>
-          <p:cNvPr id="2" name="TextBox 1"/>
+          <p:cNvPr id="2" name="Rectangle 1"/>
+          <p:cNvSpPr/>
+          <p:nvPr/>
+        </p:nvSpPr>
+        <p:spPr>
+          <a:xfrm>
+            <a:off x="0" y="0"/>
+            <a:ext cx="3657600" cy="6858000"/>
+          </a:xfrm>
+          <a:prstGeom prst="rect">
+            <a:avLst/>
+          </a:prstGeom>
+          <a:solidFill>
+            <a:srgbClr val="951C1D"/>
+          </a:solidFill>
+          <a:ln>
+            <a:noFill/>
+          </a:ln>
+          <a:effectLst/>
+        </p:spPr>
+        <p:style>
+          <a:lnRef idx="1">
+            <a:schemeClr val="accent1"/>
+          </a:lnRef>
+          <a:fillRef idx="3">
+            <a:schemeClr val="accent1"/>
+          </a:fillRef>
+          <a:effectRef idx="2">
+            <a:schemeClr val="accent1"/>
+          </a:effectRef>
+          <a:fontRef idx="minor">
+            <a:schemeClr val="lt1"/>
+          </a:fontRef>
+        </p:style>
+        <p:txBody>
+          <a:bodyPr rtlCol="0" anchor="ctr"/>
+          <a:lstStyle/>
+          <a:p>
+            <a:pPr algn="ctr"/>
+          </a:p>
+        </p:txBody>
+      </p:sp>
+      <p:sp>
+        <p:nvSpPr>
+          <p:cNvPr id="3" name="Rectangle 2"/>
+          <p:cNvSpPr/>
+          <p:nvPr/>
+        </p:nvSpPr>
+        <p:spPr>
+          <a:xfrm>
+            <a:off x="3657600" y="0"/>
+            <a:ext cx="146304" cy="6858000"/>
+          </a:xfrm>
+          <a:prstGeom prst="rect">
+            <a:avLst/>
+          </a:prstGeom>
+          <a:solidFill>
+            <a:srgbClr val="E1D8DE"/>
+          </a:solidFill>
+          <a:ln>
+            <a:noFill/>
+          </a:ln>
+          <a:effectLst/>
+        </p:spPr>
+        <p:style>
+          <a:lnRef idx="1">
+            <a:schemeClr val="accent1"/>
+          </a:lnRef>
+          <a:fillRef idx="3">
+            <a:schemeClr val="accent1"/>
+          </a:fillRef>
+          <a:effectRef idx="2">
+            <a:schemeClr val="accent1"/>
+          </a:effectRef>
+          <a:fontRef idx="minor">
+            <a:schemeClr val="lt1"/>
+          </a:fontRef>
+        </p:style>
+        <p:txBody>
+          <a:bodyPr rtlCol="0" anchor="ctr"/>
+          <a:lstStyle/>
+          <a:p>
+            <a:pPr algn="ctr"/>
+          </a:p>
+        </p:txBody>
+      </p:sp>
+      <p:sp>
+        <p:nvSpPr>
+          <p:cNvPr id="4" name="Rectangle 3"/>
+          <p:cNvSpPr/>
+          <p:nvPr/>
+        </p:nvSpPr>
+        <p:spPr>
+          <a:xfrm>
+            <a:off x="3803904" y="5989320"/>
+            <a:ext cx="8387791" cy="201168"/>
+          </a:xfrm>
+          <a:prstGeom prst="rect">
+            <a:avLst/>
+          </a:prstGeom>
+          <a:solidFill>
+            <a:srgbClr val="4C7F8C"/>
+          </a:solidFill>
+          <a:ln>
+            <a:noFill/>
+          </a:ln>
+          <a:effectLst/>
+        </p:spPr>
+        <p:style>
+          <a:lnRef idx="1">
+            <a:schemeClr val="accent1"/>
+          </a:lnRef>
+          <a:fillRef idx="3">
+            <a:schemeClr val="accent1"/>
+          </a:fillRef>
+          <a:effectRef idx="2">
+            <a:schemeClr val="accent1"/>
+          </a:effectRef>
+          <a:fontRef idx="minor">
+            <a:schemeClr val="lt1"/>
+          </a:fontRef>
+        </p:style>
+        <p:txBody>
+          <a:bodyPr rtlCol="0" anchor="ctr"/>
+          <a:lstStyle/>
+          <a:p>
+            <a:pPr algn="ctr"/>
+          </a:p>
+        </p:txBody>
+      </p:sp>
+      <p:sp>
+        <p:nvSpPr>
+          <p:cNvPr id="5" name="Rectangle 4"/>
+          <p:cNvSpPr/>
+          <p:nvPr/>
+        </p:nvSpPr>
+        <p:spPr>
+          <a:xfrm>
+            <a:off x="3803904" y="6190488"/>
+            <a:ext cx="8387791" cy="54864"/>
+          </a:xfrm>
+          <a:prstGeom prst="rect">
+            <a:avLst/>
+          </a:prstGeom>
+          <a:solidFill>
+            <a:srgbClr val="E1D8DE"/>
+          </a:solidFill>
+          <a:ln>
+            <a:noFill/>
+          </a:ln>
+          <a:effectLst/>
+        </p:spPr>
+        <p:style>
+          <a:lnRef idx="1">
+            <a:schemeClr val="accent1"/>
+          </a:lnRef>
+          <a:fillRef idx="3">
+            <a:schemeClr val="accent1"/>
+          </a:fillRef>
+          <a:effectRef idx="2">
+            <a:schemeClr val="accent1"/>
+          </a:effectRef>
+          <a:fontRef idx="minor">
+            <a:schemeClr val="lt1"/>
+          </a:fontRef>
+        </p:style>
+        <p:txBody>
+          <a:bodyPr rtlCol="0" anchor="ctr"/>
+          <a:lstStyle/>
+          <a:p>
+            <a:pPr algn="ctr"/>
+          </a:p>
+        </p:txBody>
+      </p:sp>
+      <p:sp>
+        <p:nvSpPr>
+          <p:cNvPr id="6" name="TextBox 5"/>
           <p:cNvSpPr txBox="1"/>
           <p:nvPr/>
         </p:nvSpPr>
         <p:spPr>
           <a:xfrm>
-            <a:off x="411480" y="914400"/>
-            <a:ext cx="3291840" cy="2743200"/>
+            <a:off x="320040" y="320040"/>
+            <a:ext cx="3108960" cy="457200"/>
           </a:xfrm>
           <a:prstGeom prst="rect">
             <a:avLst/>
@@ -37384,9 +38850,48 @@
               </a:lnSpc>
             </a:pPr>
             <a:r>
-              <a:rPr sz="18000" b="1">
-                <a:solidFill>
-                  <a:srgbClr val="F2B27A"/>
+              <a:rPr sz="2800" b="1">
+                <a:solidFill>
+                  <a:srgbClr val="FFFFFF"/>
+                </a:solidFill>
+                <a:latin typeface="Arial"/>
+              </a:rPr>
+              <a:t>PART</a:t>
+            </a:r>
+          </a:p>
+        </p:txBody>
+      </p:sp>
+      <p:sp>
+        <p:nvSpPr>
+          <p:cNvPr id="7" name="TextBox 6"/>
+          <p:cNvSpPr txBox="1"/>
+          <p:nvPr/>
+        </p:nvSpPr>
+        <p:spPr>
+          <a:xfrm>
+            <a:off x="182880" y="731520"/>
+            <a:ext cx="3383280" cy="3108960"/>
+          </a:xfrm>
+          <a:prstGeom prst="rect">
+            <a:avLst/>
+          </a:prstGeom>
+          <a:noFill/>
+        </p:spPr>
+        <p:txBody>
+          <a:bodyPr wrap="square" anchor="t" lIns="0" rIns="0" tIns="0" bIns="0">
+            <a:spAutoFit/>
+          </a:bodyPr>
+          <a:lstStyle/>
+          <a:p>
+            <a:pPr algn="l">
+              <a:lnSpc>
+                <a:spcPct val="100000"/>
+              </a:lnSpc>
+            </a:pPr>
+            <a:r>
+              <a:rPr sz="22000" b="1">
+                <a:solidFill>
+                  <a:srgbClr val="FFFFFF"/>
                 </a:solidFill>
                 <a:latin typeface="Arial"/>
               </a:rPr>
@@ -37397,14 +38902,14 @@
       </p:sp>
       <p:sp>
         <p:nvSpPr>
-          <p:cNvPr id="3" name="TextBox 2"/>
+          <p:cNvPr id="8" name="TextBox 7"/>
           <p:cNvSpPr txBox="1"/>
           <p:nvPr/>
         </p:nvSpPr>
         <p:spPr>
           <a:xfrm>
-            <a:off x="3840480" y="548640"/>
-            <a:ext cx="7863840" cy="2103120"/>
+            <a:off x="4206240" y="502920"/>
+            <a:ext cx="7589520" cy="2103120"/>
           </a:xfrm>
           <a:prstGeom prst="rect">
             <a:avLst/>
@@ -37436,14 +38941,14 @@
       </p:sp>
       <p:sp>
         <p:nvSpPr>
-          <p:cNvPr id="4" name="TextBox 3"/>
+          <p:cNvPr id="9" name="TextBox 8"/>
           <p:cNvSpPr txBox="1"/>
           <p:nvPr/>
         </p:nvSpPr>
         <p:spPr>
           <a:xfrm>
-            <a:off x="3840480" y="2743200"/>
-            <a:ext cx="7863840" cy="914400"/>
+            <a:off x="4206240" y="2697480"/>
+            <a:ext cx="7589520" cy="914400"/>
           </a:xfrm>
           <a:prstGeom prst="rect">
             <a:avLst/>
@@ -37475,14 +38980,14 @@
       </p:sp>
       <p:sp>
         <p:nvSpPr>
-          <p:cNvPr id="5" name="TextBox 4"/>
+          <p:cNvPr id="10" name="TextBox 9"/>
           <p:cNvSpPr txBox="1"/>
           <p:nvPr/>
         </p:nvSpPr>
         <p:spPr>
           <a:xfrm>
-            <a:off x="3840480" y="3794760"/>
-            <a:ext cx="7863840" cy="1005840"/>
+            <a:off x="4206240" y="3703320"/>
+            <a:ext cx="7589520" cy="1005840"/>
           </a:xfrm>
           <a:prstGeom prst="rect">
             <a:avLst/>
@@ -37514,14 +39019,14 @@
       </p:sp>
       <p:sp>
         <p:nvSpPr>
-          <p:cNvPr id="6" name="EXEMPT_PROGRESS"/>
+          <p:cNvPr id="11" name="EXEMPT_PROGRESS"/>
           <p:cNvSpPr txBox="1"/>
           <p:nvPr/>
         </p:nvSpPr>
         <p:spPr>
           <a:xfrm>
-            <a:off x="3840480" y="5074920"/>
-            <a:ext cx="7863840" cy="457200"/>
+            <a:off x="4206240" y="4983480"/>
+            <a:ext cx="7589520" cy="457200"/>
           </a:xfrm>
           <a:prstGeom prst="rect">
             <a:avLst/>
@@ -40511,14 +42016,190 @@
       <p:grpSpPr/>
       <p:sp>
         <p:nvSpPr>
-          <p:cNvPr id="2" name="TextBox 1"/>
+          <p:cNvPr id="2" name="Rectangle 1"/>
+          <p:cNvSpPr/>
+          <p:nvPr/>
+        </p:nvSpPr>
+        <p:spPr>
+          <a:xfrm>
+            <a:off x="0" y="0"/>
+            <a:ext cx="3657600" cy="6858000"/>
+          </a:xfrm>
+          <a:prstGeom prst="rect">
+            <a:avLst/>
+          </a:prstGeom>
+          <a:solidFill>
+            <a:srgbClr val="222C5E"/>
+          </a:solidFill>
+          <a:ln>
+            <a:noFill/>
+          </a:ln>
+          <a:effectLst/>
+        </p:spPr>
+        <p:style>
+          <a:lnRef idx="1">
+            <a:schemeClr val="accent1"/>
+          </a:lnRef>
+          <a:fillRef idx="3">
+            <a:schemeClr val="accent1"/>
+          </a:fillRef>
+          <a:effectRef idx="2">
+            <a:schemeClr val="accent1"/>
+          </a:effectRef>
+          <a:fontRef idx="minor">
+            <a:schemeClr val="lt1"/>
+          </a:fontRef>
+        </p:style>
+        <p:txBody>
+          <a:bodyPr rtlCol="0" anchor="ctr"/>
+          <a:lstStyle/>
+          <a:p>
+            <a:pPr algn="ctr"/>
+          </a:p>
+        </p:txBody>
+      </p:sp>
+      <p:sp>
+        <p:nvSpPr>
+          <p:cNvPr id="3" name="Rectangle 2"/>
+          <p:cNvSpPr/>
+          <p:nvPr/>
+        </p:nvSpPr>
+        <p:spPr>
+          <a:xfrm>
+            <a:off x="3657600" y="0"/>
+            <a:ext cx="146304" cy="6858000"/>
+          </a:xfrm>
+          <a:prstGeom prst="rect">
+            <a:avLst/>
+          </a:prstGeom>
+          <a:solidFill>
+            <a:srgbClr val="E1D8DE"/>
+          </a:solidFill>
+          <a:ln>
+            <a:noFill/>
+          </a:ln>
+          <a:effectLst/>
+        </p:spPr>
+        <p:style>
+          <a:lnRef idx="1">
+            <a:schemeClr val="accent1"/>
+          </a:lnRef>
+          <a:fillRef idx="3">
+            <a:schemeClr val="accent1"/>
+          </a:fillRef>
+          <a:effectRef idx="2">
+            <a:schemeClr val="accent1"/>
+          </a:effectRef>
+          <a:fontRef idx="minor">
+            <a:schemeClr val="lt1"/>
+          </a:fontRef>
+        </p:style>
+        <p:txBody>
+          <a:bodyPr rtlCol="0" anchor="ctr"/>
+          <a:lstStyle/>
+          <a:p>
+            <a:pPr algn="ctr"/>
+          </a:p>
+        </p:txBody>
+      </p:sp>
+      <p:sp>
+        <p:nvSpPr>
+          <p:cNvPr id="4" name="Rectangle 3"/>
+          <p:cNvSpPr/>
+          <p:nvPr/>
+        </p:nvSpPr>
+        <p:spPr>
+          <a:xfrm>
+            <a:off x="3803904" y="5989320"/>
+            <a:ext cx="8387791" cy="201168"/>
+          </a:xfrm>
+          <a:prstGeom prst="rect">
+            <a:avLst/>
+          </a:prstGeom>
+          <a:solidFill>
+            <a:srgbClr val="4C7F8C"/>
+          </a:solidFill>
+          <a:ln>
+            <a:noFill/>
+          </a:ln>
+          <a:effectLst/>
+        </p:spPr>
+        <p:style>
+          <a:lnRef idx="1">
+            <a:schemeClr val="accent1"/>
+          </a:lnRef>
+          <a:fillRef idx="3">
+            <a:schemeClr val="accent1"/>
+          </a:fillRef>
+          <a:effectRef idx="2">
+            <a:schemeClr val="accent1"/>
+          </a:effectRef>
+          <a:fontRef idx="minor">
+            <a:schemeClr val="lt1"/>
+          </a:fontRef>
+        </p:style>
+        <p:txBody>
+          <a:bodyPr rtlCol="0" anchor="ctr"/>
+          <a:lstStyle/>
+          <a:p>
+            <a:pPr algn="ctr"/>
+          </a:p>
+        </p:txBody>
+      </p:sp>
+      <p:sp>
+        <p:nvSpPr>
+          <p:cNvPr id="5" name="Rectangle 4"/>
+          <p:cNvSpPr/>
+          <p:nvPr/>
+        </p:nvSpPr>
+        <p:spPr>
+          <a:xfrm>
+            <a:off x="3803904" y="6190488"/>
+            <a:ext cx="8387791" cy="54864"/>
+          </a:xfrm>
+          <a:prstGeom prst="rect">
+            <a:avLst/>
+          </a:prstGeom>
+          <a:solidFill>
+            <a:srgbClr val="E1D8DE"/>
+          </a:solidFill>
+          <a:ln>
+            <a:noFill/>
+          </a:ln>
+          <a:effectLst/>
+        </p:spPr>
+        <p:style>
+          <a:lnRef idx="1">
+            <a:schemeClr val="accent1"/>
+          </a:lnRef>
+          <a:fillRef idx="3">
+            <a:schemeClr val="accent1"/>
+          </a:fillRef>
+          <a:effectRef idx="2">
+            <a:schemeClr val="accent1"/>
+          </a:effectRef>
+          <a:fontRef idx="minor">
+            <a:schemeClr val="lt1"/>
+          </a:fontRef>
+        </p:style>
+        <p:txBody>
+          <a:bodyPr rtlCol="0" anchor="ctr"/>
+          <a:lstStyle/>
+          <a:p>
+            <a:pPr algn="ctr"/>
+          </a:p>
+        </p:txBody>
+      </p:sp>
+      <p:sp>
+        <p:nvSpPr>
+          <p:cNvPr id="6" name="TextBox 5"/>
           <p:cNvSpPr txBox="1"/>
           <p:nvPr/>
         </p:nvSpPr>
         <p:spPr>
           <a:xfrm>
-            <a:off x="411480" y="914400"/>
-            <a:ext cx="3291840" cy="2743200"/>
+            <a:off x="320040" y="320040"/>
+            <a:ext cx="3108960" cy="457200"/>
           </a:xfrm>
           <a:prstGeom prst="rect">
             <a:avLst/>
@@ -40537,9 +42218,48 @@
               </a:lnSpc>
             </a:pPr>
             <a:r>
-              <a:rPr sz="18000" b="1">
-                <a:solidFill>
-                  <a:srgbClr val="F2B27A"/>
+              <a:rPr sz="2800" b="1">
+                <a:solidFill>
+                  <a:srgbClr val="FFFFFF"/>
+                </a:solidFill>
+                <a:latin typeface="Arial"/>
+              </a:rPr>
+              <a:t>PART</a:t>
+            </a:r>
+          </a:p>
+        </p:txBody>
+      </p:sp>
+      <p:sp>
+        <p:nvSpPr>
+          <p:cNvPr id="7" name="TextBox 6"/>
+          <p:cNvSpPr txBox="1"/>
+          <p:nvPr/>
+        </p:nvSpPr>
+        <p:spPr>
+          <a:xfrm>
+            <a:off x="182880" y="731520"/>
+            <a:ext cx="3383280" cy="3108960"/>
+          </a:xfrm>
+          <a:prstGeom prst="rect">
+            <a:avLst/>
+          </a:prstGeom>
+          <a:noFill/>
+        </p:spPr>
+        <p:txBody>
+          <a:bodyPr wrap="square" anchor="t" lIns="0" rIns="0" tIns="0" bIns="0">
+            <a:spAutoFit/>
+          </a:bodyPr>
+          <a:lstStyle/>
+          <a:p>
+            <a:pPr algn="l">
+              <a:lnSpc>
+                <a:spcPct val="100000"/>
+              </a:lnSpc>
+            </a:pPr>
+            <a:r>
+              <a:rPr sz="22000" b="1">
+                <a:solidFill>
+                  <a:srgbClr val="FFFFFF"/>
                 </a:solidFill>
                 <a:latin typeface="Arial"/>
               </a:rPr>
@@ -40550,14 +42270,14 @@
       </p:sp>
       <p:sp>
         <p:nvSpPr>
-          <p:cNvPr id="3" name="TextBox 2"/>
+          <p:cNvPr id="8" name="TextBox 7"/>
           <p:cNvSpPr txBox="1"/>
           <p:nvPr/>
         </p:nvSpPr>
         <p:spPr>
           <a:xfrm>
-            <a:off x="3840480" y="548640"/>
-            <a:ext cx="7863840" cy="2103120"/>
+            <a:off x="4206240" y="502920"/>
+            <a:ext cx="7589520" cy="2103120"/>
           </a:xfrm>
           <a:prstGeom prst="rect">
             <a:avLst/>
@@ -40589,14 +42309,14 @@
       </p:sp>
       <p:sp>
         <p:nvSpPr>
-          <p:cNvPr id="4" name="TextBox 3"/>
+          <p:cNvPr id="9" name="TextBox 8"/>
           <p:cNvSpPr txBox="1"/>
           <p:nvPr/>
         </p:nvSpPr>
         <p:spPr>
           <a:xfrm>
-            <a:off x="3840480" y="2743200"/>
-            <a:ext cx="7863840" cy="914400"/>
+            <a:off x="4206240" y="2697480"/>
+            <a:ext cx="7589520" cy="914400"/>
           </a:xfrm>
           <a:prstGeom prst="rect">
             <a:avLst/>
@@ -40628,14 +42348,14 @@
       </p:sp>
       <p:sp>
         <p:nvSpPr>
-          <p:cNvPr id="5" name="TextBox 4"/>
+          <p:cNvPr id="10" name="TextBox 9"/>
           <p:cNvSpPr txBox="1"/>
           <p:nvPr/>
         </p:nvSpPr>
         <p:spPr>
           <a:xfrm>
-            <a:off x="3840480" y="3794760"/>
-            <a:ext cx="7863840" cy="1005840"/>
+            <a:off x="4206240" y="3703320"/>
+            <a:ext cx="7589520" cy="1005840"/>
           </a:xfrm>
           <a:prstGeom prst="rect">
             <a:avLst/>
@@ -40667,14 +42387,14 @@
       </p:sp>
       <p:sp>
         <p:nvSpPr>
-          <p:cNvPr id="6" name="EXEMPT_PROGRESS"/>
+          <p:cNvPr id="11" name="EXEMPT_PROGRESS"/>
           <p:cNvSpPr txBox="1"/>
           <p:nvPr/>
         </p:nvSpPr>
         <p:spPr>
           <a:xfrm>
-            <a:off x="3840480" y="5074920"/>
-            <a:ext cx="7863840" cy="457200"/>
+            <a:off x="4206240" y="4983480"/>
+            <a:ext cx="7589520" cy="457200"/>
           </a:xfrm>
           <a:prstGeom prst="rect">
             <a:avLst/>

--- a/01_FULL_DECK/ADBS_FULL_answer_key.pptx
+++ b/01_FULL_DECK/ADBS_FULL_answer_key.pptx
@@ -14453,7 +14453,7 @@
         </p:nvSpPr>
         <p:spPr>
           <a:xfrm>
-            <a:off x="4206240" y="502920"/>
+            <a:off x="4206240" y="411480"/>
             <a:ext cx="7589520" cy="2103120"/>
           </a:xfrm>
           <a:prstGeom prst="rect">
@@ -14492,7 +14492,7 @@
         </p:nvSpPr>
         <p:spPr>
           <a:xfrm>
-            <a:off x="4206240" y="2697480"/>
+            <a:off x="4206240" y="2651760"/>
             <a:ext cx="7589520" cy="914400"/>
           </a:xfrm>
           <a:prstGeom prst="rect">
@@ -14531,8 +14531,8 @@
         </p:nvSpPr>
         <p:spPr>
           <a:xfrm>
-            <a:off x="4206240" y="3703320"/>
-            <a:ext cx="7589520" cy="1005840"/>
+            <a:off x="4206240" y="3657600"/>
+            <a:ext cx="7589520" cy="1188720"/>
           </a:xfrm>
           <a:prstGeom prst="rect">
             <a:avLst/>
@@ -14570,7 +14570,7 @@
         </p:nvSpPr>
         <p:spPr>
           <a:xfrm>
-            <a:off x="4206240" y="4983480"/>
+            <a:off x="4206240" y="5074920"/>
             <a:ext cx="7589520" cy="457200"/>
           </a:xfrm>
           <a:prstGeom prst="rect">
@@ -21148,7 +21148,7 @@
         </p:nvSpPr>
         <p:spPr>
           <a:xfrm>
-            <a:off x="4206240" y="502920"/>
+            <a:off x="4206240" y="411480"/>
             <a:ext cx="7589520" cy="2103120"/>
           </a:xfrm>
           <a:prstGeom prst="rect">
@@ -21187,7 +21187,7 @@
         </p:nvSpPr>
         <p:spPr>
           <a:xfrm>
-            <a:off x="4206240" y="2697480"/>
+            <a:off x="4206240" y="2651760"/>
             <a:ext cx="7589520" cy="914400"/>
           </a:xfrm>
           <a:prstGeom prst="rect">
@@ -21226,8 +21226,8 @@
         </p:nvSpPr>
         <p:spPr>
           <a:xfrm>
-            <a:off x="4206240" y="3703320"/>
-            <a:ext cx="7589520" cy="1005840"/>
+            <a:off x="4206240" y="3657600"/>
+            <a:ext cx="7589520" cy="1188720"/>
           </a:xfrm>
           <a:prstGeom prst="rect">
             <a:avLst/>
@@ -21265,7 +21265,7 @@
         </p:nvSpPr>
         <p:spPr>
           <a:xfrm>
-            <a:off x="4206240" y="4983480"/>
+            <a:off x="4206240" y="5074920"/>
             <a:ext cx="7589520" cy="457200"/>
           </a:xfrm>
           <a:prstGeom prst="rect">
@@ -25535,7 +25535,7 @@
         </p:nvSpPr>
         <p:spPr>
           <a:xfrm>
-            <a:off x="4206240" y="502920"/>
+            <a:off x="4206240" y="411480"/>
             <a:ext cx="7589520" cy="2103120"/>
           </a:xfrm>
           <a:prstGeom prst="rect">
@@ -25574,7 +25574,7 @@
         </p:nvSpPr>
         <p:spPr>
           <a:xfrm>
-            <a:off x="4206240" y="2697480"/>
+            <a:off x="4206240" y="2651760"/>
             <a:ext cx="7589520" cy="914400"/>
           </a:xfrm>
           <a:prstGeom prst="rect">
@@ -25613,8 +25613,8 @@
         </p:nvSpPr>
         <p:spPr>
           <a:xfrm>
-            <a:off x="4206240" y="3703320"/>
-            <a:ext cx="7589520" cy="1005840"/>
+            <a:off x="4206240" y="3657600"/>
+            <a:ext cx="7589520" cy="1188720"/>
           </a:xfrm>
           <a:prstGeom prst="rect">
             <a:avLst/>
@@ -25652,7 +25652,7 @@
         </p:nvSpPr>
         <p:spPr>
           <a:xfrm>
-            <a:off x="4206240" y="4983480"/>
+            <a:off x="4206240" y="5074920"/>
             <a:ext cx="7589520" cy="457200"/>
           </a:xfrm>
           <a:prstGeom prst="rect">
@@ -29383,7 +29383,7 @@
         </p:nvSpPr>
         <p:spPr>
           <a:xfrm>
-            <a:off x="4206240" y="502920"/>
+            <a:off x="4206240" y="411480"/>
             <a:ext cx="7589520" cy="2103120"/>
           </a:xfrm>
           <a:prstGeom prst="rect">
@@ -29422,7 +29422,7 @@
         </p:nvSpPr>
         <p:spPr>
           <a:xfrm>
-            <a:off x="4206240" y="2697480"/>
+            <a:off x="4206240" y="2651760"/>
             <a:ext cx="7589520" cy="914400"/>
           </a:xfrm>
           <a:prstGeom prst="rect">
@@ -29461,8 +29461,8 @@
         </p:nvSpPr>
         <p:spPr>
           <a:xfrm>
-            <a:off x="4206240" y="3703320"/>
-            <a:ext cx="7589520" cy="1005840"/>
+            <a:off x="4206240" y="3657600"/>
+            <a:ext cx="7589520" cy="1188720"/>
           </a:xfrm>
           <a:prstGeom prst="rect">
             <a:avLst/>
@@ -29500,7 +29500,7 @@
         </p:nvSpPr>
         <p:spPr>
           <a:xfrm>
-            <a:off x="4206240" y="4983480"/>
+            <a:off x="4206240" y="5074920"/>
             <a:ext cx="7589520" cy="457200"/>
           </a:xfrm>
           <a:prstGeom prst="rect">
@@ -32699,7 +32699,7 @@
         </p:nvSpPr>
         <p:spPr>
           <a:xfrm>
-            <a:off x="4206240" y="502920"/>
+            <a:off x="4206240" y="411480"/>
             <a:ext cx="7589520" cy="2103120"/>
           </a:xfrm>
           <a:prstGeom prst="rect">
@@ -32738,7 +32738,7 @@
         </p:nvSpPr>
         <p:spPr>
           <a:xfrm>
-            <a:off x="4206240" y="2697480"/>
+            <a:off x="4206240" y="2651760"/>
             <a:ext cx="7589520" cy="914400"/>
           </a:xfrm>
           <a:prstGeom prst="rect">
@@ -32777,8 +32777,8 @@
         </p:nvSpPr>
         <p:spPr>
           <a:xfrm>
-            <a:off x="4206240" y="3703320"/>
-            <a:ext cx="7589520" cy="1005840"/>
+            <a:off x="4206240" y="3657600"/>
+            <a:ext cx="7589520" cy="1188720"/>
           </a:xfrm>
           <a:prstGeom prst="rect">
             <a:avLst/>
@@ -32816,7 +32816,7 @@
         </p:nvSpPr>
         <p:spPr>
           <a:xfrm>
-            <a:off x="4206240" y="4983480"/>
+            <a:off x="4206240" y="5074920"/>
             <a:ext cx="7589520" cy="457200"/>
           </a:xfrm>
           <a:prstGeom prst="rect">
@@ -35970,7 +35970,7 @@
         </p:nvSpPr>
         <p:spPr>
           <a:xfrm>
-            <a:off x="4206240" y="502920"/>
+            <a:off x="4206240" y="411480"/>
             <a:ext cx="7589520" cy="2103120"/>
           </a:xfrm>
           <a:prstGeom prst="rect">
@@ -36009,7 +36009,7 @@
         </p:nvSpPr>
         <p:spPr>
           <a:xfrm>
-            <a:off x="4206240" y="2697480"/>
+            <a:off x="4206240" y="2651760"/>
             <a:ext cx="7589520" cy="914400"/>
           </a:xfrm>
           <a:prstGeom prst="rect">
@@ -36048,8 +36048,8 @@
         </p:nvSpPr>
         <p:spPr>
           <a:xfrm>
-            <a:off x="4206240" y="3703320"/>
-            <a:ext cx="7589520" cy="1005840"/>
+            <a:off x="4206240" y="3657600"/>
+            <a:ext cx="7589520" cy="1188720"/>
           </a:xfrm>
           <a:prstGeom prst="rect">
             <a:avLst/>
@@ -36087,7 +36087,7 @@
         </p:nvSpPr>
         <p:spPr>
           <a:xfrm>
-            <a:off x="4206240" y="4983480"/>
+            <a:off x="4206240" y="5074920"/>
             <a:ext cx="7589520" cy="457200"/>
           </a:xfrm>
           <a:prstGeom prst="rect">
@@ -38908,7 +38908,7 @@
         </p:nvSpPr>
         <p:spPr>
           <a:xfrm>
-            <a:off x="4206240" y="502920"/>
+            <a:off x="4206240" y="411480"/>
             <a:ext cx="7589520" cy="2103120"/>
           </a:xfrm>
           <a:prstGeom prst="rect">
@@ -38947,7 +38947,7 @@
         </p:nvSpPr>
         <p:spPr>
           <a:xfrm>
-            <a:off x="4206240" y="2697480"/>
+            <a:off x="4206240" y="2651760"/>
             <a:ext cx="7589520" cy="914400"/>
           </a:xfrm>
           <a:prstGeom prst="rect">
@@ -38986,8 +38986,8 @@
         </p:nvSpPr>
         <p:spPr>
           <a:xfrm>
-            <a:off x="4206240" y="3703320"/>
-            <a:ext cx="7589520" cy="1005840"/>
+            <a:off x="4206240" y="3657600"/>
+            <a:ext cx="7589520" cy="1188720"/>
           </a:xfrm>
           <a:prstGeom prst="rect">
             <a:avLst/>
@@ -39025,7 +39025,7 @@
         </p:nvSpPr>
         <p:spPr>
           <a:xfrm>
-            <a:off x="4206240" y="4983480"/>
+            <a:off x="4206240" y="5074920"/>
             <a:ext cx="7589520" cy="457200"/>
           </a:xfrm>
           <a:prstGeom prst="rect">
@@ -42276,7 +42276,7 @@
         </p:nvSpPr>
         <p:spPr>
           <a:xfrm>
-            <a:off x="4206240" y="502920"/>
+            <a:off x="4206240" y="411480"/>
             <a:ext cx="7589520" cy="2103120"/>
           </a:xfrm>
           <a:prstGeom prst="rect">
@@ -42315,7 +42315,7 @@
         </p:nvSpPr>
         <p:spPr>
           <a:xfrm>
-            <a:off x="4206240" y="2697480"/>
+            <a:off x="4206240" y="2651760"/>
             <a:ext cx="7589520" cy="914400"/>
           </a:xfrm>
           <a:prstGeom prst="rect">
@@ -42354,8 +42354,8 @@
         </p:nvSpPr>
         <p:spPr>
           <a:xfrm>
-            <a:off x="4206240" y="3703320"/>
-            <a:ext cx="7589520" cy="1005840"/>
+            <a:off x="4206240" y="3657600"/>
+            <a:ext cx="7589520" cy="1188720"/>
           </a:xfrm>
           <a:prstGeom prst="rect">
             <a:avLst/>
@@ -42393,7 +42393,7 @@
         </p:nvSpPr>
         <p:spPr>
           <a:xfrm>
-            <a:off x="4206240" y="4983480"/>
+            <a:off x="4206240" y="5074920"/>
             <a:ext cx="7589520" cy="457200"/>
           </a:xfrm>
           <a:prstGeom prst="rect">
